--- a/tuts/prezzo/antupy_diagram.pptx
+++ b/tuts/prezzo/antupy_diagram.pptx
@@ -5,11 +5,13 @@
     <p:sldMasterId id="2147483648" r:id="rId1"/>
   </p:sldMasterIdLst>
   <p:sldIdLst>
-    <p:sldId id="256" r:id="rId2"/>
+    <p:sldId id="264" r:id="rId2"/>
     <p:sldId id="259" r:id="rId3"/>
-    <p:sldId id="257" r:id="rId4"/>
-    <p:sldId id="260" r:id="rId5"/>
-    <p:sldId id="261" r:id="rId6"/>
+    <p:sldId id="263" r:id="rId4"/>
+    <p:sldId id="262" r:id="rId5"/>
+    <p:sldId id="257" r:id="rId6"/>
+    <p:sldId id="260" r:id="rId7"/>
+    <p:sldId id="261" r:id="rId8"/>
   </p:sldIdLst>
   <p:sldSz cx="12192000" cy="6858000"/>
   <p:notesSz cx="6858000" cy="9144000"/>
@@ -414,7 +416,7 @@
           <a:p>
             <a:fld id="{0F545F80-4238-44B2-8FA4-030309B17934}" type="datetimeFigureOut">
               <a:rPr lang="en-IE" smtClean="0"/>
-              <a:t>09/04/2026</a:t>
+              <a:t>16/04/2026</a:t>
             </a:fld>
             <a:endParaRPr lang="en-IE"/>
           </a:p>
@@ -614,7 +616,7 @@
           <a:p>
             <a:fld id="{0F545F80-4238-44B2-8FA4-030309B17934}" type="datetimeFigureOut">
               <a:rPr lang="en-IE" smtClean="0"/>
-              <a:t>09/04/2026</a:t>
+              <a:t>16/04/2026</a:t>
             </a:fld>
             <a:endParaRPr lang="en-IE"/>
           </a:p>
@@ -824,7 +826,7 @@
           <a:p>
             <a:fld id="{0F545F80-4238-44B2-8FA4-030309B17934}" type="datetimeFigureOut">
               <a:rPr lang="en-IE" smtClean="0"/>
-              <a:t>09/04/2026</a:t>
+              <a:t>16/04/2026</a:t>
             </a:fld>
             <a:endParaRPr lang="en-IE"/>
           </a:p>
@@ -1024,7 +1026,7 @@
           <a:p>
             <a:fld id="{0F545F80-4238-44B2-8FA4-030309B17934}" type="datetimeFigureOut">
               <a:rPr lang="en-IE" smtClean="0"/>
-              <a:t>09/04/2026</a:t>
+              <a:t>16/04/2026</a:t>
             </a:fld>
             <a:endParaRPr lang="en-IE"/>
           </a:p>
@@ -1300,7 +1302,7 @@
           <a:p>
             <a:fld id="{0F545F80-4238-44B2-8FA4-030309B17934}" type="datetimeFigureOut">
               <a:rPr lang="en-IE" smtClean="0"/>
-              <a:t>09/04/2026</a:t>
+              <a:t>16/04/2026</a:t>
             </a:fld>
             <a:endParaRPr lang="en-IE"/>
           </a:p>
@@ -1568,7 +1570,7 @@
           <a:p>
             <a:fld id="{0F545F80-4238-44B2-8FA4-030309B17934}" type="datetimeFigureOut">
               <a:rPr lang="en-IE" smtClean="0"/>
-              <a:t>09/04/2026</a:t>
+              <a:t>16/04/2026</a:t>
             </a:fld>
             <a:endParaRPr lang="en-IE"/>
           </a:p>
@@ -1983,7 +1985,7 @@
           <a:p>
             <a:fld id="{0F545F80-4238-44B2-8FA4-030309B17934}" type="datetimeFigureOut">
               <a:rPr lang="en-IE" smtClean="0"/>
-              <a:t>09/04/2026</a:t>
+              <a:t>16/04/2026</a:t>
             </a:fld>
             <a:endParaRPr lang="en-IE"/>
           </a:p>
@@ -2125,7 +2127,7 @@
           <a:p>
             <a:fld id="{0F545F80-4238-44B2-8FA4-030309B17934}" type="datetimeFigureOut">
               <a:rPr lang="en-IE" smtClean="0"/>
-              <a:t>09/04/2026</a:t>
+              <a:t>16/04/2026</a:t>
             </a:fld>
             <a:endParaRPr lang="en-IE"/>
           </a:p>
@@ -2238,7 +2240,7 @@
           <a:p>
             <a:fld id="{0F545F80-4238-44B2-8FA4-030309B17934}" type="datetimeFigureOut">
               <a:rPr lang="en-IE" smtClean="0"/>
-              <a:t>09/04/2026</a:t>
+              <a:t>16/04/2026</a:t>
             </a:fld>
             <a:endParaRPr lang="en-IE"/>
           </a:p>
@@ -2551,7 +2553,7 @@
           <a:p>
             <a:fld id="{0F545F80-4238-44B2-8FA4-030309B17934}" type="datetimeFigureOut">
               <a:rPr lang="en-IE" smtClean="0"/>
-              <a:t>09/04/2026</a:t>
+              <a:t>16/04/2026</a:t>
             </a:fld>
             <a:endParaRPr lang="en-IE"/>
           </a:p>
@@ -2840,7 +2842,7 @@
           <a:p>
             <a:fld id="{0F545F80-4238-44B2-8FA4-030309B17934}" type="datetimeFigureOut">
               <a:rPr lang="en-IE" smtClean="0"/>
-              <a:t>09/04/2026</a:t>
+              <a:t>16/04/2026</a:t>
             </a:fld>
             <a:endParaRPr lang="en-IE"/>
           </a:p>
@@ -3083,7 +3085,7 @@
           <a:p>
             <a:fld id="{0F545F80-4238-44B2-8FA4-030309B17934}" type="datetimeFigureOut">
               <a:rPr lang="en-IE" smtClean="0"/>
-              <a:t>09/04/2026</a:t>
+              <a:t>16/04/2026</a:t>
             </a:fld>
             <a:endParaRPr lang="en-IE"/>
           </a:p>
@@ -3488,7 +3490,13 @@
   <p:cSld>
     <p:spTree>
       <p:nvGrpSpPr>
-        <p:cNvPr id="1" name=""/>
+        <p:cNvPr id="1" name="">
+          <a:extLst>
+            <a:ext uri="{FF2B5EF4-FFF2-40B4-BE49-F238E27FC236}">
+              <a16:creationId xmlns:a16="http://schemas.microsoft.com/office/drawing/2014/main" id="{4330CC94-AB9F-FF0F-F1DB-F2FF305FD07C}"/>
+            </a:ext>
+          </a:extLst>
+        </p:cNvPr>
         <p:cNvGrpSpPr/>
         <p:nvPr/>
       </p:nvGrpSpPr>
@@ -3505,7 +3513,7 @@
           <p:cNvPr id="2" name="Title 1">
             <a:extLst>
               <a:ext uri="{FF2B5EF4-FFF2-40B4-BE49-F238E27FC236}">
-                <a16:creationId xmlns:a16="http://schemas.microsoft.com/office/drawing/2014/main" id="{F624A7D5-56C1-F469-F78F-226A99C30A4C}"/>
+                <a16:creationId xmlns:a16="http://schemas.microsoft.com/office/drawing/2014/main" id="{C943D8AA-607D-41EB-F6BD-ED449AD917DA}"/>
               </a:ext>
             </a:extLst>
           </p:cNvPr>
@@ -3513,47 +3521,938 @@
             <a:spLocks noGrp="1"/>
           </p:cNvSpPr>
           <p:nvPr>
-            <p:ph type="ctrTitle"/>
+            <p:ph type="title"/>
           </p:nvPr>
         </p:nvSpPr>
-        <p:spPr/>
+        <p:spPr>
+          <a:xfrm>
+            <a:off x="1789355" y="290634"/>
+            <a:ext cx="3352800" cy="1325563"/>
+          </a:xfrm>
+        </p:spPr>
         <p:txBody>
           <a:bodyPr/>
           <a:lstStyle/>
           <a:p>
-            <a:endParaRPr lang="en-IE" dirty="0"/>
+            <a:r>
+              <a:rPr lang="en-IE" noProof="1"/>
+              <a:t>phd code</a:t>
+            </a:r>
           </a:p>
         </p:txBody>
       </p:sp>
       <p:sp>
         <p:nvSpPr>
-          <p:cNvPr id="3" name="Subtitle 2">
+          <p:cNvPr id="3" name="Title 1">
             <a:extLst>
               <a:ext uri="{FF2B5EF4-FFF2-40B4-BE49-F238E27FC236}">
-                <a16:creationId xmlns:a16="http://schemas.microsoft.com/office/drawing/2014/main" id="{7371F30E-ECDA-0CB1-0A22-62852AFF7E8E}"/>
+                <a16:creationId xmlns:a16="http://schemas.microsoft.com/office/drawing/2014/main" id="{B5217E51-8BC4-83C9-E022-C633D30DF6F7}"/>
               </a:ext>
             </a:extLst>
           </p:cNvPr>
-          <p:cNvSpPr>
-            <a:spLocks noGrp="1"/>
+          <p:cNvSpPr txBox="1">
+            <a:spLocks/>
           </p:cNvSpPr>
-          <p:nvPr>
-            <p:ph type="subTitle" idx="1"/>
-          </p:nvPr>
+          <p:nvPr/>
         </p:nvSpPr>
-        <p:spPr/>
+        <p:spPr>
+          <a:xfrm>
+            <a:off x="6939205" y="341096"/>
+            <a:ext cx="4457700" cy="1325563"/>
+          </a:xfrm>
+          <a:prstGeom prst="rect">
+            <a:avLst/>
+          </a:prstGeom>
+        </p:spPr>
         <p:txBody>
-          <a:bodyPr/>
-          <a:lstStyle/>
-          <a:p>
-            <a:endParaRPr lang="en-IE"/>
+          <a:bodyPr vert="horz" lIns="91440" tIns="45720" rIns="91440" bIns="45720" rtlCol="0" anchor="ctr">
+            <a:normAutofit/>
+          </a:bodyPr>
+          <a:lstStyle>
+            <a:lvl1pPr algn="l" defTabSz="914400" rtl="0" eaLnBrk="1" latinLnBrk="0" hangingPunct="1">
+              <a:lnSpc>
+                <a:spcPct val="90000"/>
+              </a:lnSpc>
+              <a:spcBef>
+                <a:spcPct val="0"/>
+              </a:spcBef>
+              <a:buNone/>
+              <a:defRPr sz="4400" kern="1200">
+                <a:solidFill>
+                  <a:schemeClr val="tx1"/>
+                </a:solidFill>
+                <a:latin typeface="+mj-lt"/>
+                <a:ea typeface="+mj-ea"/>
+                <a:cs typeface="+mj-cs"/>
+              </a:defRPr>
+            </a:lvl1pPr>
+          </a:lstStyle>
+          <a:p>
+            <a:r>
+              <a:rPr lang="en-IE" noProof="1"/>
+              <a:t>postdoc_1</a:t>
+            </a:r>
           </a:p>
         </p:txBody>
       </p:sp>
+      <p:grpSp>
+        <p:nvGrpSpPr>
+          <p:cNvPr id="8" name="Group 7">
+            <a:extLst>
+              <a:ext uri="{FF2B5EF4-FFF2-40B4-BE49-F238E27FC236}">
+                <a16:creationId xmlns:a16="http://schemas.microsoft.com/office/drawing/2014/main" id="{339B78DC-E358-4C51-48A6-42FFB8211D40}"/>
+              </a:ext>
+            </a:extLst>
+          </p:cNvPr>
+          <p:cNvGrpSpPr/>
+          <p:nvPr/>
+        </p:nvGrpSpPr>
+        <p:grpSpPr>
+          <a:xfrm>
+            <a:off x="1167055" y="1585867"/>
+            <a:ext cx="3975100" cy="5053088"/>
+            <a:chOff x="893056" y="1614489"/>
+            <a:chExt cx="1928938" cy="5053088"/>
+          </a:xfrm>
+        </p:grpSpPr>
+        <p:sp>
+          <p:nvSpPr>
+            <p:cNvPr id="11" name="Rectangle: Rounded Corners 10">
+              <a:extLst>
+                <a:ext uri="{FF2B5EF4-FFF2-40B4-BE49-F238E27FC236}">
+                  <a16:creationId xmlns:a16="http://schemas.microsoft.com/office/drawing/2014/main" id="{7A754D42-6517-2F95-D0B7-D20429C61989}"/>
+                </a:ext>
+              </a:extLst>
+            </p:cNvPr>
+            <p:cNvSpPr/>
+            <p:nvPr/>
+          </p:nvSpPr>
+          <p:spPr>
+            <a:xfrm>
+              <a:off x="893056" y="1614489"/>
+              <a:ext cx="1928938" cy="5053088"/>
+            </a:xfrm>
+            <a:prstGeom prst="roundRect">
+              <a:avLst>
+                <a:gd name="adj" fmla="val 3656"/>
+              </a:avLst>
+            </a:prstGeom>
+          </p:spPr>
+          <p:style>
+            <a:lnRef idx="2">
+              <a:schemeClr val="accent1"/>
+            </a:lnRef>
+            <a:fillRef idx="1">
+              <a:schemeClr val="lt1"/>
+            </a:fillRef>
+            <a:effectRef idx="0">
+              <a:schemeClr val="accent1"/>
+            </a:effectRef>
+            <a:fontRef idx="minor">
+              <a:schemeClr val="dk1"/>
+            </a:fontRef>
+          </p:style>
+          <p:txBody>
+            <a:bodyPr rtlCol="0" anchor="t"/>
+            <a:lstStyle/>
+            <a:p>
+              <a:pPr algn="ctr"/>
+              <a:r>
+                <a:rPr lang="en-IE" noProof="1"/>
+                <a:t>/bdr_csp</a:t>
+              </a:r>
+            </a:p>
+          </p:txBody>
+        </p:sp>
+        <p:sp>
+          <p:nvSpPr>
+            <p:cNvPr id="12" name="Rectangle: Rounded Corners 11">
+              <a:extLst>
+                <a:ext uri="{FF2B5EF4-FFF2-40B4-BE49-F238E27FC236}">
+                  <a16:creationId xmlns:a16="http://schemas.microsoft.com/office/drawing/2014/main" id="{1D282318-5CF2-3689-493A-1D307D27CE16}"/>
+                </a:ext>
+              </a:extLst>
+            </p:cNvPr>
+            <p:cNvSpPr/>
+            <p:nvPr/>
+          </p:nvSpPr>
+          <p:spPr>
+            <a:xfrm>
+              <a:off x="950949" y="5547392"/>
+              <a:ext cx="1761893" cy="501805"/>
+            </a:xfrm>
+            <a:prstGeom prst="roundRect">
+              <a:avLst/>
+            </a:prstGeom>
+          </p:spPr>
+          <p:style>
+            <a:lnRef idx="2">
+              <a:schemeClr val="accent5"/>
+            </a:lnRef>
+            <a:fillRef idx="1">
+              <a:schemeClr val="lt1"/>
+            </a:fillRef>
+            <a:effectRef idx="0">
+              <a:schemeClr val="accent5"/>
+            </a:effectRef>
+            <a:fontRef idx="minor">
+              <a:schemeClr val="dk1"/>
+            </a:fontRef>
+          </p:style>
+          <p:txBody>
+            <a:bodyPr rtlCol="0" anchor="ctr"/>
+            <a:lstStyle/>
+            <a:p>
+              <a:pPr algn="ctr"/>
+              <a:r>
+                <a:rPr lang="en-IE" noProof="1">
+                  <a:solidFill>
+                    <a:schemeClr val="accent5"/>
+                  </a:solidFill>
+                </a:rPr>
+                <a:t>weather data</a:t>
+              </a:r>
+            </a:p>
+          </p:txBody>
+        </p:sp>
+        <p:sp>
+          <p:nvSpPr>
+            <p:cNvPr id="13" name="Rectangle: Rounded Corners 12">
+              <a:extLst>
+                <a:ext uri="{FF2B5EF4-FFF2-40B4-BE49-F238E27FC236}">
+                  <a16:creationId xmlns:a16="http://schemas.microsoft.com/office/drawing/2014/main" id="{2855ACE5-A6C6-CFE7-691F-77DCB67998E1}"/>
+                </a:ext>
+              </a:extLst>
+            </p:cNvPr>
+            <p:cNvSpPr/>
+            <p:nvPr/>
+          </p:nvSpPr>
+          <p:spPr>
+            <a:xfrm>
+              <a:off x="950949" y="4040436"/>
+              <a:ext cx="1761893" cy="501805"/>
+            </a:xfrm>
+            <a:prstGeom prst="roundRect">
+              <a:avLst/>
+            </a:prstGeom>
+          </p:spPr>
+          <p:style>
+            <a:lnRef idx="2">
+              <a:schemeClr val="accent2"/>
+            </a:lnRef>
+            <a:fillRef idx="1">
+              <a:schemeClr val="lt1"/>
+            </a:fillRef>
+            <a:effectRef idx="0">
+              <a:schemeClr val="accent2"/>
+            </a:effectRef>
+            <a:fontRef idx="minor">
+              <a:schemeClr val="dk1"/>
+            </a:fontRef>
+          </p:style>
+          <p:txBody>
+            <a:bodyPr rtlCol="0" anchor="ctr"/>
+            <a:lstStyle/>
+            <a:p>
+              <a:pPr algn="ctr"/>
+              <a:r>
+                <a:rPr lang="en-IE" noProof="1">
+                  <a:solidFill>
+                    <a:schemeClr val="accent2"/>
+                  </a:solidFill>
+                </a:rPr>
+                <a:t>thermal analysis (particle receiver)</a:t>
+              </a:r>
+            </a:p>
+          </p:txBody>
+        </p:sp>
+        <p:sp>
+          <p:nvSpPr>
+            <p:cNvPr id="15" name="Rectangle: Rounded Corners 14">
+              <a:extLst>
+                <a:ext uri="{FF2B5EF4-FFF2-40B4-BE49-F238E27FC236}">
+                  <a16:creationId xmlns:a16="http://schemas.microsoft.com/office/drawing/2014/main" id="{5198E766-D94E-0EE1-DFFF-C4BECF792377}"/>
+                </a:ext>
+              </a:extLst>
+            </p:cNvPr>
+            <p:cNvSpPr/>
+            <p:nvPr/>
+          </p:nvSpPr>
+          <p:spPr>
+            <a:xfrm>
+              <a:off x="950949" y="4618257"/>
+              <a:ext cx="1761894" cy="501805"/>
+            </a:xfrm>
+            <a:prstGeom prst="roundRect">
+              <a:avLst/>
+            </a:prstGeom>
+          </p:spPr>
+          <p:style>
+            <a:lnRef idx="2">
+              <a:schemeClr val="accent2"/>
+            </a:lnRef>
+            <a:fillRef idx="1">
+              <a:schemeClr val="lt1"/>
+            </a:fillRef>
+            <a:effectRef idx="0">
+              <a:schemeClr val="accent2"/>
+            </a:effectRef>
+            <a:fontRef idx="minor">
+              <a:schemeClr val="dk1"/>
+            </a:fontRef>
+          </p:style>
+          <p:txBody>
+            <a:bodyPr rtlCol="0" anchor="ctr"/>
+            <a:lstStyle/>
+            <a:p>
+              <a:pPr algn="ctr"/>
+              <a:r>
+                <a:rPr lang="en-IE" noProof="1">
+                  <a:solidFill>
+                    <a:schemeClr val="accent2"/>
+                  </a:solidFill>
+                </a:rPr>
+                <a:t>power generation (dispatch)</a:t>
+              </a:r>
+            </a:p>
+          </p:txBody>
+        </p:sp>
+        <p:sp>
+          <p:nvSpPr>
+            <p:cNvPr id="16" name="Rectangle: Rounded Corners 15">
+              <a:extLst>
+                <a:ext uri="{FF2B5EF4-FFF2-40B4-BE49-F238E27FC236}">
+                  <a16:creationId xmlns:a16="http://schemas.microsoft.com/office/drawing/2014/main" id="{30FEAAE3-0015-1710-56C2-0FC13B31F2A4}"/>
+                </a:ext>
+              </a:extLst>
+            </p:cNvPr>
+            <p:cNvSpPr/>
+            <p:nvPr/>
+          </p:nvSpPr>
+          <p:spPr>
+            <a:xfrm>
+              <a:off x="950949" y="3480344"/>
+              <a:ext cx="1761893" cy="501805"/>
+            </a:xfrm>
+            <a:prstGeom prst="roundRect">
+              <a:avLst/>
+            </a:prstGeom>
+          </p:spPr>
+          <p:style>
+            <a:lnRef idx="2">
+              <a:schemeClr val="accent2"/>
+            </a:lnRef>
+            <a:fillRef idx="1">
+              <a:schemeClr val="lt1"/>
+            </a:fillRef>
+            <a:effectRef idx="0">
+              <a:schemeClr val="accent2"/>
+            </a:effectRef>
+            <a:fontRef idx="minor">
+              <a:schemeClr val="dk1"/>
+            </a:fontRef>
+          </p:style>
+          <p:txBody>
+            <a:bodyPr rtlCol="0" anchor="ctr"/>
+            <a:lstStyle/>
+            <a:p>
+              <a:pPr algn="ctr"/>
+              <a:r>
+                <a:rPr lang="en-IE" noProof="1">
+                  <a:solidFill>
+                    <a:schemeClr val="accent2"/>
+                  </a:solidFill>
+                </a:rPr>
+                <a:t>optical analysis (beam down)</a:t>
+              </a:r>
+            </a:p>
+          </p:txBody>
+        </p:sp>
+        <p:sp>
+          <p:nvSpPr>
+            <p:cNvPr id="17" name="Rectangle: Rounded Corners 16">
+              <a:extLst>
+                <a:ext uri="{FF2B5EF4-FFF2-40B4-BE49-F238E27FC236}">
+                  <a16:creationId xmlns:a16="http://schemas.microsoft.com/office/drawing/2014/main" id="{1A526E97-16CF-0D57-7B0A-9EB131F19A9B}"/>
+                </a:ext>
+              </a:extLst>
+            </p:cNvPr>
+            <p:cNvSpPr/>
+            <p:nvPr/>
+          </p:nvSpPr>
+          <p:spPr>
+            <a:xfrm>
+              <a:off x="950950" y="6094183"/>
+              <a:ext cx="1761894" cy="501805"/>
+            </a:xfrm>
+            <a:prstGeom prst="roundRect">
+              <a:avLst/>
+            </a:prstGeom>
+          </p:spPr>
+          <p:style>
+            <a:lnRef idx="2">
+              <a:schemeClr val="accent5"/>
+            </a:lnRef>
+            <a:fillRef idx="1">
+              <a:schemeClr val="lt1"/>
+            </a:fillRef>
+            <a:effectRef idx="0">
+              <a:schemeClr val="accent5"/>
+            </a:effectRef>
+            <a:fontRef idx="minor">
+              <a:schemeClr val="dk1"/>
+            </a:fontRef>
+          </p:style>
+          <p:txBody>
+            <a:bodyPr rtlCol="0" anchor="ctr"/>
+            <a:lstStyle/>
+            <a:p>
+              <a:pPr algn="ctr"/>
+              <a:r>
+                <a:rPr lang="en-IE" noProof="1">
+                  <a:solidFill>
+                    <a:schemeClr val="accent5"/>
+                  </a:solidFill>
+                </a:rPr>
+                <a:t>market data</a:t>
+              </a:r>
+            </a:p>
+          </p:txBody>
+        </p:sp>
+        <p:sp>
+          <p:nvSpPr>
+            <p:cNvPr id="18" name="Rectangle: Rounded Corners 17">
+              <a:extLst>
+                <a:ext uri="{FF2B5EF4-FFF2-40B4-BE49-F238E27FC236}">
+                  <a16:creationId xmlns:a16="http://schemas.microsoft.com/office/drawing/2014/main" id="{602A0A2E-03CA-CF28-EEF7-82EA7B91DF60}"/>
+                </a:ext>
+              </a:extLst>
+            </p:cNvPr>
+            <p:cNvSpPr/>
+            <p:nvPr/>
+          </p:nvSpPr>
+          <p:spPr>
+            <a:xfrm>
+              <a:off x="950949" y="2109645"/>
+              <a:ext cx="1761893" cy="501805"/>
+            </a:xfrm>
+            <a:prstGeom prst="roundRect">
+              <a:avLst/>
+            </a:prstGeom>
+          </p:spPr>
+          <p:style>
+            <a:lnRef idx="2">
+              <a:schemeClr val="accent1"/>
+            </a:lnRef>
+            <a:fillRef idx="1">
+              <a:schemeClr val="lt1"/>
+            </a:fillRef>
+            <a:effectRef idx="0">
+              <a:schemeClr val="accent1"/>
+            </a:effectRef>
+            <a:fontRef idx="minor">
+              <a:schemeClr val="dk1"/>
+            </a:fontRef>
+          </p:style>
+          <p:txBody>
+            <a:bodyPr rtlCol="0" anchor="ctr"/>
+            <a:lstStyle/>
+            <a:p>
+              <a:pPr algn="ctr"/>
+              <a:r>
+                <a:rPr lang="en-IE" noProof="1">
+                  <a:solidFill>
+                    <a:schemeClr val="accent1"/>
+                  </a:solidFill>
+                </a:rPr>
+                <a:t>settings</a:t>
+              </a:r>
+            </a:p>
+          </p:txBody>
+        </p:sp>
+        <p:sp>
+          <p:nvSpPr>
+            <p:cNvPr id="19" name="Rectangle: Rounded Corners 18">
+              <a:extLst>
+                <a:ext uri="{FF2B5EF4-FFF2-40B4-BE49-F238E27FC236}">
+                  <a16:creationId xmlns:a16="http://schemas.microsoft.com/office/drawing/2014/main" id="{CB55BC2C-1C34-4FE0-86AC-7EB65E1FA0D5}"/>
+                </a:ext>
+              </a:extLst>
+            </p:cNvPr>
+            <p:cNvSpPr/>
+            <p:nvPr/>
+          </p:nvSpPr>
+          <p:spPr>
+            <a:xfrm>
+              <a:off x="950949" y="2676116"/>
+              <a:ext cx="1761893" cy="501805"/>
+            </a:xfrm>
+            <a:prstGeom prst="roundRect">
+              <a:avLst/>
+            </a:prstGeom>
+          </p:spPr>
+          <p:style>
+            <a:lnRef idx="2">
+              <a:schemeClr val="accent1"/>
+            </a:lnRef>
+            <a:fillRef idx="1">
+              <a:schemeClr val="lt1"/>
+            </a:fillRef>
+            <a:effectRef idx="0">
+              <a:schemeClr val="accent1"/>
+            </a:effectRef>
+            <a:fontRef idx="minor">
+              <a:schemeClr val="dk1"/>
+            </a:fontRef>
+          </p:style>
+          <p:txBody>
+            <a:bodyPr rtlCol="0" anchor="ctr"/>
+            <a:lstStyle/>
+            <a:p>
+              <a:pPr algn="ctr"/>
+              <a:r>
+                <a:rPr lang="en-IE" noProof="1">
+                  <a:solidFill>
+                    <a:schemeClr val="accent1"/>
+                  </a:solidFill>
+                </a:rPr>
+                <a:t>location</a:t>
+              </a:r>
+            </a:p>
+          </p:txBody>
+        </p:sp>
+      </p:grpSp>
+      <p:grpSp>
+        <p:nvGrpSpPr>
+          <p:cNvPr id="20" name="Group 19">
+            <a:extLst>
+              <a:ext uri="{FF2B5EF4-FFF2-40B4-BE49-F238E27FC236}">
+                <a16:creationId xmlns:a16="http://schemas.microsoft.com/office/drawing/2014/main" id="{63276837-7BE1-705E-2AD1-56880267F9F1}"/>
+              </a:ext>
+            </a:extLst>
+          </p:cNvPr>
+          <p:cNvGrpSpPr/>
+          <p:nvPr/>
+        </p:nvGrpSpPr>
+        <p:grpSpPr>
+          <a:xfrm>
+            <a:off x="6680201" y="1585867"/>
+            <a:ext cx="3975100" cy="5053088"/>
+            <a:chOff x="893056" y="1614489"/>
+            <a:chExt cx="1928938" cy="5053088"/>
+          </a:xfrm>
+        </p:grpSpPr>
+        <p:sp>
+          <p:nvSpPr>
+            <p:cNvPr id="21" name="Rectangle: Rounded Corners 20">
+              <a:extLst>
+                <a:ext uri="{FF2B5EF4-FFF2-40B4-BE49-F238E27FC236}">
+                  <a16:creationId xmlns:a16="http://schemas.microsoft.com/office/drawing/2014/main" id="{900DB1BC-1807-F323-1CBD-7C6C4765A200}"/>
+                </a:ext>
+              </a:extLst>
+            </p:cNvPr>
+            <p:cNvSpPr/>
+            <p:nvPr/>
+          </p:nvSpPr>
+          <p:spPr>
+            <a:xfrm>
+              <a:off x="893056" y="1614489"/>
+              <a:ext cx="1928938" cy="5053088"/>
+            </a:xfrm>
+            <a:prstGeom prst="roundRect">
+              <a:avLst>
+                <a:gd name="adj" fmla="val 3656"/>
+              </a:avLst>
+            </a:prstGeom>
+          </p:spPr>
+          <p:style>
+            <a:lnRef idx="2">
+              <a:schemeClr val="accent1"/>
+            </a:lnRef>
+            <a:fillRef idx="1">
+              <a:schemeClr val="lt1"/>
+            </a:fillRef>
+            <a:effectRef idx="0">
+              <a:schemeClr val="accent1"/>
+            </a:effectRef>
+            <a:fontRef idx="minor">
+              <a:schemeClr val="dk1"/>
+            </a:fontRef>
+          </p:style>
+          <p:txBody>
+            <a:bodyPr rtlCol="0" anchor="t"/>
+            <a:lstStyle/>
+            <a:p>
+              <a:pPr algn="ctr"/>
+              <a:r>
+                <a:rPr lang="en-IE" noProof="1"/>
+                <a:t>/tm_solarshift</a:t>
+              </a:r>
+            </a:p>
+          </p:txBody>
+        </p:sp>
+        <p:sp>
+          <p:nvSpPr>
+            <p:cNvPr id="22" name="Rectangle: Rounded Corners 21">
+              <a:extLst>
+                <a:ext uri="{FF2B5EF4-FFF2-40B4-BE49-F238E27FC236}">
+                  <a16:creationId xmlns:a16="http://schemas.microsoft.com/office/drawing/2014/main" id="{31210052-9917-552A-0A0B-F565E06C2535}"/>
+                </a:ext>
+              </a:extLst>
+            </p:cNvPr>
+            <p:cNvSpPr/>
+            <p:nvPr/>
+          </p:nvSpPr>
+          <p:spPr>
+            <a:xfrm>
+              <a:off x="950949" y="5547392"/>
+              <a:ext cx="1761893" cy="501805"/>
+            </a:xfrm>
+            <a:prstGeom prst="roundRect">
+              <a:avLst/>
+            </a:prstGeom>
+          </p:spPr>
+          <p:style>
+            <a:lnRef idx="2">
+              <a:schemeClr val="accent5"/>
+            </a:lnRef>
+            <a:fillRef idx="1">
+              <a:schemeClr val="lt1"/>
+            </a:fillRef>
+            <a:effectRef idx="0">
+              <a:schemeClr val="accent5"/>
+            </a:effectRef>
+            <a:fontRef idx="minor">
+              <a:schemeClr val="dk1"/>
+            </a:fontRef>
+          </p:style>
+          <p:txBody>
+            <a:bodyPr rtlCol="0" anchor="ctr"/>
+            <a:lstStyle/>
+            <a:p>
+              <a:pPr algn="ctr"/>
+              <a:r>
+                <a:rPr lang="en-IE" noProof="1">
+                  <a:solidFill>
+                    <a:schemeClr val="accent5"/>
+                  </a:solidFill>
+                </a:rPr>
+                <a:t>weather data</a:t>
+              </a:r>
+            </a:p>
+          </p:txBody>
+        </p:sp>
+        <p:sp>
+          <p:nvSpPr>
+            <p:cNvPr id="23" name="Rectangle: Rounded Corners 22">
+              <a:extLst>
+                <a:ext uri="{FF2B5EF4-FFF2-40B4-BE49-F238E27FC236}">
+                  <a16:creationId xmlns:a16="http://schemas.microsoft.com/office/drawing/2014/main" id="{F5AF26BA-C943-2094-CD77-0CA0AC923984}"/>
+                </a:ext>
+              </a:extLst>
+            </p:cNvPr>
+            <p:cNvSpPr/>
+            <p:nvPr/>
+          </p:nvSpPr>
+          <p:spPr>
+            <a:xfrm>
+              <a:off x="950949" y="4040436"/>
+              <a:ext cx="1761893" cy="501805"/>
+            </a:xfrm>
+            <a:prstGeom prst="roundRect">
+              <a:avLst/>
+            </a:prstGeom>
+          </p:spPr>
+          <p:style>
+            <a:lnRef idx="2">
+              <a:schemeClr val="accent2"/>
+            </a:lnRef>
+            <a:fillRef idx="1">
+              <a:schemeClr val="lt1"/>
+            </a:fillRef>
+            <a:effectRef idx="0">
+              <a:schemeClr val="accent2"/>
+            </a:effectRef>
+            <a:fontRef idx="minor">
+              <a:schemeClr val="dk1"/>
+            </a:fontRef>
+          </p:style>
+          <p:txBody>
+            <a:bodyPr rtlCol="0" anchor="ctr"/>
+            <a:lstStyle/>
+            <a:p>
+              <a:pPr algn="ctr"/>
+              <a:r>
+                <a:rPr lang="en-IE" noProof="1">
+                  <a:solidFill>
+                    <a:schemeClr val="accent2"/>
+                  </a:solidFill>
+                </a:rPr>
+                <a:t>thermal analysis (particle receiver)</a:t>
+              </a:r>
+            </a:p>
+          </p:txBody>
+        </p:sp>
+        <p:sp>
+          <p:nvSpPr>
+            <p:cNvPr id="24" name="Rectangle: Rounded Corners 23">
+              <a:extLst>
+                <a:ext uri="{FF2B5EF4-FFF2-40B4-BE49-F238E27FC236}">
+                  <a16:creationId xmlns:a16="http://schemas.microsoft.com/office/drawing/2014/main" id="{D3DA0310-4D7B-0B3A-9F4D-F2F4F96E6E0E}"/>
+                </a:ext>
+              </a:extLst>
+            </p:cNvPr>
+            <p:cNvSpPr/>
+            <p:nvPr/>
+          </p:nvSpPr>
+          <p:spPr>
+            <a:xfrm>
+              <a:off x="950949" y="4618257"/>
+              <a:ext cx="1761894" cy="501805"/>
+            </a:xfrm>
+            <a:prstGeom prst="roundRect">
+              <a:avLst/>
+            </a:prstGeom>
+          </p:spPr>
+          <p:style>
+            <a:lnRef idx="2">
+              <a:schemeClr val="accent2"/>
+            </a:lnRef>
+            <a:fillRef idx="1">
+              <a:schemeClr val="lt1"/>
+            </a:fillRef>
+            <a:effectRef idx="0">
+              <a:schemeClr val="accent2"/>
+            </a:effectRef>
+            <a:fontRef idx="minor">
+              <a:schemeClr val="dk1"/>
+            </a:fontRef>
+          </p:style>
+          <p:txBody>
+            <a:bodyPr rtlCol="0" anchor="ctr"/>
+            <a:lstStyle/>
+            <a:p>
+              <a:pPr algn="ctr"/>
+              <a:r>
+                <a:rPr lang="en-IE" noProof="1">
+                  <a:solidFill>
+                    <a:schemeClr val="accent2"/>
+                  </a:solidFill>
+                </a:rPr>
+                <a:t>power generation (dispatch)</a:t>
+              </a:r>
+            </a:p>
+          </p:txBody>
+        </p:sp>
+        <p:sp>
+          <p:nvSpPr>
+            <p:cNvPr id="25" name="Rectangle: Rounded Corners 24">
+              <a:extLst>
+                <a:ext uri="{FF2B5EF4-FFF2-40B4-BE49-F238E27FC236}">
+                  <a16:creationId xmlns:a16="http://schemas.microsoft.com/office/drawing/2014/main" id="{45CFD34D-2D23-5548-7A09-9047B6A8FB2A}"/>
+                </a:ext>
+              </a:extLst>
+            </p:cNvPr>
+            <p:cNvSpPr/>
+            <p:nvPr/>
+          </p:nvSpPr>
+          <p:spPr>
+            <a:xfrm>
+              <a:off x="950949" y="3480344"/>
+              <a:ext cx="1761893" cy="501805"/>
+            </a:xfrm>
+            <a:prstGeom prst="roundRect">
+              <a:avLst/>
+            </a:prstGeom>
+          </p:spPr>
+          <p:style>
+            <a:lnRef idx="2">
+              <a:schemeClr val="accent2"/>
+            </a:lnRef>
+            <a:fillRef idx="1">
+              <a:schemeClr val="lt1"/>
+            </a:fillRef>
+            <a:effectRef idx="0">
+              <a:schemeClr val="accent2"/>
+            </a:effectRef>
+            <a:fontRef idx="minor">
+              <a:schemeClr val="dk1"/>
+            </a:fontRef>
+          </p:style>
+          <p:txBody>
+            <a:bodyPr rtlCol="0" anchor="ctr"/>
+            <a:lstStyle/>
+            <a:p>
+              <a:pPr algn="ctr"/>
+              <a:r>
+                <a:rPr lang="en-IE" noProof="1">
+                  <a:solidFill>
+                    <a:schemeClr val="accent2"/>
+                  </a:solidFill>
+                </a:rPr>
+                <a:t>optical analysis (beam down)</a:t>
+              </a:r>
+            </a:p>
+          </p:txBody>
+        </p:sp>
+        <p:sp>
+          <p:nvSpPr>
+            <p:cNvPr id="26" name="Rectangle: Rounded Corners 25">
+              <a:extLst>
+                <a:ext uri="{FF2B5EF4-FFF2-40B4-BE49-F238E27FC236}">
+                  <a16:creationId xmlns:a16="http://schemas.microsoft.com/office/drawing/2014/main" id="{F2969CA1-6C2E-289D-F695-A90EDD193807}"/>
+                </a:ext>
+              </a:extLst>
+            </p:cNvPr>
+            <p:cNvSpPr/>
+            <p:nvPr/>
+          </p:nvSpPr>
+          <p:spPr>
+            <a:xfrm>
+              <a:off x="950950" y="6094183"/>
+              <a:ext cx="1761894" cy="501805"/>
+            </a:xfrm>
+            <a:prstGeom prst="roundRect">
+              <a:avLst/>
+            </a:prstGeom>
+          </p:spPr>
+          <p:style>
+            <a:lnRef idx="2">
+              <a:schemeClr val="accent5"/>
+            </a:lnRef>
+            <a:fillRef idx="1">
+              <a:schemeClr val="lt1"/>
+            </a:fillRef>
+            <a:effectRef idx="0">
+              <a:schemeClr val="accent5"/>
+            </a:effectRef>
+            <a:fontRef idx="minor">
+              <a:schemeClr val="dk1"/>
+            </a:fontRef>
+          </p:style>
+          <p:txBody>
+            <a:bodyPr rtlCol="0" anchor="ctr"/>
+            <a:lstStyle/>
+            <a:p>
+              <a:pPr algn="ctr"/>
+              <a:r>
+                <a:rPr lang="en-IE" noProof="1">
+                  <a:solidFill>
+                    <a:schemeClr val="accent5"/>
+                  </a:solidFill>
+                </a:rPr>
+                <a:t>market data</a:t>
+              </a:r>
+            </a:p>
+          </p:txBody>
+        </p:sp>
+        <p:sp>
+          <p:nvSpPr>
+            <p:cNvPr id="27" name="Rectangle: Rounded Corners 26">
+              <a:extLst>
+                <a:ext uri="{FF2B5EF4-FFF2-40B4-BE49-F238E27FC236}">
+                  <a16:creationId xmlns:a16="http://schemas.microsoft.com/office/drawing/2014/main" id="{28DA0D29-315E-FAE8-3E43-4F3C6CCAAFDA}"/>
+                </a:ext>
+              </a:extLst>
+            </p:cNvPr>
+            <p:cNvSpPr/>
+            <p:nvPr/>
+          </p:nvSpPr>
+          <p:spPr>
+            <a:xfrm>
+              <a:off x="950949" y="2109645"/>
+              <a:ext cx="1761893" cy="501805"/>
+            </a:xfrm>
+            <a:prstGeom prst="roundRect">
+              <a:avLst/>
+            </a:prstGeom>
+          </p:spPr>
+          <p:style>
+            <a:lnRef idx="2">
+              <a:schemeClr val="accent1"/>
+            </a:lnRef>
+            <a:fillRef idx="1">
+              <a:schemeClr val="lt1"/>
+            </a:fillRef>
+            <a:effectRef idx="0">
+              <a:schemeClr val="accent1"/>
+            </a:effectRef>
+            <a:fontRef idx="minor">
+              <a:schemeClr val="dk1"/>
+            </a:fontRef>
+          </p:style>
+          <p:txBody>
+            <a:bodyPr rtlCol="0" anchor="ctr"/>
+            <a:lstStyle/>
+            <a:p>
+              <a:pPr algn="ctr"/>
+              <a:r>
+                <a:rPr lang="en-IE" noProof="1">
+                  <a:solidFill>
+                    <a:schemeClr val="accent1"/>
+                  </a:solidFill>
+                </a:rPr>
+                <a:t>settings</a:t>
+              </a:r>
+            </a:p>
+          </p:txBody>
+        </p:sp>
+        <p:sp>
+          <p:nvSpPr>
+            <p:cNvPr id="29" name="Rectangle: Rounded Corners 28">
+              <a:extLst>
+                <a:ext uri="{FF2B5EF4-FFF2-40B4-BE49-F238E27FC236}">
+                  <a16:creationId xmlns:a16="http://schemas.microsoft.com/office/drawing/2014/main" id="{1E06A59B-DCBD-8C00-F324-CBFD57F5E65D}"/>
+                </a:ext>
+              </a:extLst>
+            </p:cNvPr>
+            <p:cNvSpPr/>
+            <p:nvPr/>
+          </p:nvSpPr>
+          <p:spPr>
+            <a:xfrm>
+              <a:off x="950949" y="2676116"/>
+              <a:ext cx="1761893" cy="501805"/>
+            </a:xfrm>
+            <a:prstGeom prst="roundRect">
+              <a:avLst/>
+            </a:prstGeom>
+          </p:spPr>
+          <p:style>
+            <a:lnRef idx="2">
+              <a:schemeClr val="accent1"/>
+            </a:lnRef>
+            <a:fillRef idx="1">
+              <a:schemeClr val="lt1"/>
+            </a:fillRef>
+            <a:effectRef idx="0">
+              <a:schemeClr val="accent1"/>
+            </a:effectRef>
+            <a:fontRef idx="minor">
+              <a:schemeClr val="dk1"/>
+            </a:fontRef>
+          </p:style>
+          <p:txBody>
+            <a:bodyPr rtlCol="0" anchor="ctr"/>
+            <a:lstStyle/>
+            <a:p>
+              <a:pPr algn="ctr"/>
+              <a:r>
+                <a:rPr lang="en-IE" noProof="1">
+                  <a:solidFill>
+                    <a:schemeClr val="accent1"/>
+                  </a:solidFill>
+                </a:rPr>
+                <a:t>location (household)</a:t>
+              </a:r>
+            </a:p>
+          </p:txBody>
+        </p:sp>
+      </p:grpSp>
     </p:spTree>
     <p:extLst>
       <p:ext uri="{BB962C8B-B14F-4D97-AF65-F5344CB8AC3E}">
-        <p14:creationId xmlns:p14="http://schemas.microsoft.com/office/powerpoint/2010/main" val="3390520210"/>
+        <p14:creationId xmlns:p14="http://schemas.microsoft.com/office/powerpoint/2010/main" val="3861047050"/>
       </p:ext>
     </p:extLst>
   </p:cSld>
@@ -3602,20 +4501,2084 @@
             <p:ph type="title"/>
           </p:nvPr>
         </p:nvSpPr>
+        <p:spPr>
+          <a:xfrm>
+            <a:off x="838200" y="365125"/>
+            <a:ext cx="2260600" cy="1325563"/>
+          </a:xfrm>
+        </p:spPr>
+        <p:txBody>
+          <a:bodyPr/>
+          <a:lstStyle/>
+          <a:p>
+            <a:r>
+              <a:rPr lang="en-IE" noProof="1"/>
+              <a:t>master</a:t>
+            </a:r>
+          </a:p>
+        </p:txBody>
+      </p:sp>
+      <p:grpSp>
+        <p:nvGrpSpPr>
+          <p:cNvPr id="46" name="Group 45">
+            <a:extLst>
+              <a:ext uri="{FF2B5EF4-FFF2-40B4-BE49-F238E27FC236}">
+                <a16:creationId xmlns:a16="http://schemas.microsoft.com/office/drawing/2014/main" id="{E6ED06A7-32A6-8373-3247-36BA39DD1228}"/>
+              </a:ext>
+            </a:extLst>
+          </p:cNvPr>
+          <p:cNvGrpSpPr/>
+          <p:nvPr/>
+        </p:nvGrpSpPr>
+        <p:grpSpPr>
+          <a:xfrm>
+            <a:off x="450532" y="1576464"/>
+            <a:ext cx="2732049" cy="4202035"/>
+            <a:chOff x="6301662" y="1576465"/>
+            <a:chExt cx="2732049" cy="4202035"/>
+          </a:xfrm>
+        </p:grpSpPr>
+        <p:sp>
+          <p:nvSpPr>
+            <p:cNvPr id="21" name="Rectangle: Rounded Corners 20">
+              <a:extLst>
+                <a:ext uri="{FF2B5EF4-FFF2-40B4-BE49-F238E27FC236}">
+                  <a16:creationId xmlns:a16="http://schemas.microsoft.com/office/drawing/2014/main" id="{53B0F28A-B4C7-EA7C-0057-AA6FF43E78AF}"/>
+                </a:ext>
+              </a:extLst>
+            </p:cNvPr>
+            <p:cNvSpPr/>
+            <p:nvPr/>
+          </p:nvSpPr>
+          <p:spPr>
+            <a:xfrm>
+              <a:off x="6301662" y="1576465"/>
+              <a:ext cx="2732049" cy="4202035"/>
+            </a:xfrm>
+            <a:prstGeom prst="roundRect">
+              <a:avLst/>
+            </a:prstGeom>
+          </p:spPr>
+          <p:style>
+            <a:lnRef idx="2">
+              <a:schemeClr val="accent1"/>
+            </a:lnRef>
+            <a:fillRef idx="1">
+              <a:schemeClr val="lt1"/>
+            </a:fillRef>
+            <a:effectRef idx="0">
+              <a:schemeClr val="accent1"/>
+            </a:effectRef>
+            <a:fontRef idx="minor">
+              <a:schemeClr val="dk1"/>
+            </a:fontRef>
+          </p:style>
+          <p:txBody>
+            <a:bodyPr rtlCol="0" anchor="t"/>
+            <a:lstStyle/>
+            <a:p>
+              <a:pPr algn="ctr"/>
+              <a:r>
+                <a:rPr lang="en-IE" noProof="1"/>
+                <a:t>MED-Solar</a:t>
+              </a:r>
+            </a:p>
+          </p:txBody>
+        </p:sp>
+        <p:sp>
+          <p:nvSpPr>
+            <p:cNvPr id="30" name="Rectangle: Rounded Corners 29">
+              <a:extLst>
+                <a:ext uri="{FF2B5EF4-FFF2-40B4-BE49-F238E27FC236}">
+                  <a16:creationId xmlns:a16="http://schemas.microsoft.com/office/drawing/2014/main" id="{EC4F3EA9-8516-5629-5E5E-EE4ED9D0183C}"/>
+                </a:ext>
+              </a:extLst>
+            </p:cNvPr>
+            <p:cNvSpPr/>
+            <p:nvPr/>
+          </p:nvSpPr>
+          <p:spPr>
+            <a:xfrm>
+              <a:off x="6789849" y="2126670"/>
+              <a:ext cx="1761893" cy="501805"/>
+            </a:xfrm>
+            <a:prstGeom prst="roundRect">
+              <a:avLst/>
+            </a:prstGeom>
+          </p:spPr>
+          <p:style>
+            <a:lnRef idx="2">
+              <a:schemeClr val="accent1"/>
+            </a:lnRef>
+            <a:fillRef idx="1">
+              <a:schemeClr val="lt1"/>
+            </a:fillRef>
+            <a:effectRef idx="0">
+              <a:schemeClr val="accent1"/>
+            </a:effectRef>
+            <a:fontRef idx="minor">
+              <a:schemeClr val="dk1"/>
+            </a:fontRef>
+          </p:style>
+          <p:txBody>
+            <a:bodyPr rtlCol="0" anchor="ctr"/>
+            <a:lstStyle/>
+            <a:p>
+              <a:pPr algn="ctr"/>
+              <a:r>
+                <a:rPr lang="en-IE" noProof="1">
+                  <a:solidFill>
+                    <a:schemeClr val="accent1"/>
+                  </a:solidFill>
+                </a:rPr>
+                <a:t>Settings</a:t>
+              </a:r>
+            </a:p>
+          </p:txBody>
+        </p:sp>
+        <p:sp>
+          <p:nvSpPr>
+            <p:cNvPr id="31" name="Rectangle: Rounded Corners 30">
+              <a:extLst>
+                <a:ext uri="{FF2B5EF4-FFF2-40B4-BE49-F238E27FC236}">
+                  <a16:creationId xmlns:a16="http://schemas.microsoft.com/office/drawing/2014/main" id="{D19A5861-F1FC-C19F-A36F-57668C224537}"/>
+                </a:ext>
+              </a:extLst>
+            </p:cNvPr>
+            <p:cNvSpPr/>
+            <p:nvPr/>
+          </p:nvSpPr>
+          <p:spPr>
+            <a:xfrm>
+              <a:off x="6789844" y="2714909"/>
+              <a:ext cx="1761893" cy="501805"/>
+            </a:xfrm>
+            <a:prstGeom prst="roundRect">
+              <a:avLst/>
+            </a:prstGeom>
+          </p:spPr>
+          <p:style>
+            <a:lnRef idx="2">
+              <a:schemeClr val="accent1"/>
+            </a:lnRef>
+            <a:fillRef idx="1">
+              <a:schemeClr val="lt1"/>
+            </a:fillRef>
+            <a:effectRef idx="0">
+              <a:schemeClr val="accent1"/>
+            </a:effectRef>
+            <a:fontRef idx="minor">
+              <a:schemeClr val="dk1"/>
+            </a:fontRef>
+          </p:style>
+          <p:txBody>
+            <a:bodyPr rtlCol="0" anchor="ctr"/>
+            <a:lstStyle/>
+            <a:p>
+              <a:pPr algn="ctr"/>
+              <a:r>
+                <a:rPr lang="en-IE" noProof="1">
+                  <a:solidFill>
+                    <a:schemeClr val="accent1"/>
+                  </a:solidFill>
+                </a:rPr>
+                <a:t>Location</a:t>
+              </a:r>
+            </a:p>
+          </p:txBody>
+        </p:sp>
+        <p:sp>
+          <p:nvSpPr>
+            <p:cNvPr id="32" name="Rectangle: Rounded Corners 31">
+              <a:extLst>
+                <a:ext uri="{FF2B5EF4-FFF2-40B4-BE49-F238E27FC236}">
+                  <a16:creationId xmlns:a16="http://schemas.microsoft.com/office/drawing/2014/main" id="{006246F9-993D-0B9A-3C6E-E0CFF21C520F}"/>
+                </a:ext>
+              </a:extLst>
+            </p:cNvPr>
+            <p:cNvSpPr/>
+            <p:nvPr/>
+          </p:nvSpPr>
+          <p:spPr>
+            <a:xfrm>
+              <a:off x="6786739" y="3868743"/>
+              <a:ext cx="1761893" cy="501805"/>
+            </a:xfrm>
+            <a:prstGeom prst="roundRect">
+              <a:avLst/>
+            </a:prstGeom>
+          </p:spPr>
+          <p:style>
+            <a:lnRef idx="2">
+              <a:schemeClr val="accent2"/>
+            </a:lnRef>
+            <a:fillRef idx="1">
+              <a:schemeClr val="lt1"/>
+            </a:fillRef>
+            <a:effectRef idx="0">
+              <a:schemeClr val="accent2"/>
+            </a:effectRef>
+            <a:fontRef idx="minor">
+              <a:schemeClr val="dk1"/>
+            </a:fontRef>
+          </p:style>
+          <p:txBody>
+            <a:bodyPr rtlCol="0" anchor="ctr"/>
+            <a:lstStyle/>
+            <a:p>
+              <a:pPr algn="ctr"/>
+              <a:r>
+                <a:rPr lang="en-IE" noProof="1">
+                  <a:solidFill>
+                    <a:schemeClr val="accent2"/>
+                  </a:solidFill>
+                </a:rPr>
+                <a:t>PTC</a:t>
+              </a:r>
+            </a:p>
+          </p:txBody>
+        </p:sp>
+        <p:sp>
+          <p:nvSpPr>
+            <p:cNvPr id="33" name="Rectangle: Rounded Corners 32">
+              <a:extLst>
+                <a:ext uri="{FF2B5EF4-FFF2-40B4-BE49-F238E27FC236}">
+                  <a16:creationId xmlns:a16="http://schemas.microsoft.com/office/drawing/2014/main" id="{9BFB76D7-B9BD-176A-487F-FD77F7C77165}"/>
+                </a:ext>
+              </a:extLst>
+            </p:cNvPr>
+            <p:cNvSpPr/>
+            <p:nvPr/>
+          </p:nvSpPr>
+          <p:spPr>
+            <a:xfrm>
+              <a:off x="6786739" y="4481727"/>
+              <a:ext cx="1761893" cy="501805"/>
+            </a:xfrm>
+            <a:prstGeom prst="roundRect">
+              <a:avLst/>
+            </a:prstGeom>
+          </p:spPr>
+          <p:style>
+            <a:lnRef idx="2">
+              <a:schemeClr val="accent2"/>
+            </a:lnRef>
+            <a:fillRef idx="1">
+              <a:schemeClr val="lt1"/>
+            </a:fillRef>
+            <a:effectRef idx="0">
+              <a:schemeClr val="accent2"/>
+            </a:effectRef>
+            <a:fontRef idx="minor">
+              <a:schemeClr val="dk1"/>
+            </a:fontRef>
+          </p:style>
+          <p:txBody>
+            <a:bodyPr rtlCol="0" anchor="ctr"/>
+            <a:lstStyle/>
+            <a:p>
+              <a:pPr algn="ctr"/>
+              <a:r>
+                <a:rPr lang="en-IE" noProof="1">
+                  <a:solidFill>
+                    <a:schemeClr val="accent2"/>
+                  </a:solidFill>
+                </a:rPr>
+                <a:t>MED</a:t>
+              </a:r>
+            </a:p>
+          </p:txBody>
+        </p:sp>
+        <p:sp>
+          <p:nvSpPr>
+            <p:cNvPr id="35" name="Rectangle: Rounded Corners 34">
+              <a:extLst>
+                <a:ext uri="{FF2B5EF4-FFF2-40B4-BE49-F238E27FC236}">
+                  <a16:creationId xmlns:a16="http://schemas.microsoft.com/office/drawing/2014/main" id="{BC462F86-B144-2AB9-2267-7FFE18EC71C0}"/>
+                </a:ext>
+              </a:extLst>
+            </p:cNvPr>
+            <p:cNvSpPr/>
+            <p:nvPr/>
+          </p:nvSpPr>
+          <p:spPr>
+            <a:xfrm>
+              <a:off x="6789843" y="3280504"/>
+              <a:ext cx="1761893" cy="501805"/>
+            </a:xfrm>
+            <a:prstGeom prst="roundRect">
+              <a:avLst/>
+            </a:prstGeom>
+          </p:spPr>
+          <p:style>
+            <a:lnRef idx="2">
+              <a:schemeClr val="accent5"/>
+            </a:lnRef>
+            <a:fillRef idx="1">
+              <a:schemeClr val="lt1"/>
+            </a:fillRef>
+            <a:effectRef idx="0">
+              <a:schemeClr val="accent5"/>
+            </a:effectRef>
+            <a:fontRef idx="minor">
+              <a:schemeClr val="dk1"/>
+            </a:fontRef>
+          </p:style>
+          <p:txBody>
+            <a:bodyPr rtlCol="0" anchor="ctr"/>
+            <a:lstStyle/>
+            <a:p>
+              <a:pPr algn="ctr"/>
+              <a:r>
+                <a:rPr lang="en-IE" noProof="1">
+                  <a:solidFill>
+                    <a:schemeClr val="accent5"/>
+                  </a:solidFill>
+                </a:rPr>
+                <a:t>Weather</a:t>
+              </a:r>
+            </a:p>
+          </p:txBody>
+        </p:sp>
+      </p:grpSp>
+      <p:grpSp>
+        <p:nvGrpSpPr>
+          <p:cNvPr id="47" name="Group 46">
+            <a:extLst>
+              <a:ext uri="{FF2B5EF4-FFF2-40B4-BE49-F238E27FC236}">
+                <a16:creationId xmlns:a16="http://schemas.microsoft.com/office/drawing/2014/main" id="{1937D759-E297-45D5-A433-8D5CB3DFBB5C}"/>
+              </a:ext>
+            </a:extLst>
+          </p:cNvPr>
+          <p:cNvGrpSpPr/>
+          <p:nvPr/>
+        </p:nvGrpSpPr>
+        <p:grpSpPr>
+          <a:xfrm>
+            <a:off x="3850562" y="1576463"/>
+            <a:ext cx="2732049" cy="4202035"/>
+            <a:chOff x="9336962" y="1576465"/>
+            <a:chExt cx="2732049" cy="4202035"/>
+          </a:xfrm>
+        </p:grpSpPr>
+        <p:sp>
+          <p:nvSpPr>
+            <p:cNvPr id="36" name="Rectangle: Rounded Corners 35">
+              <a:extLst>
+                <a:ext uri="{FF2B5EF4-FFF2-40B4-BE49-F238E27FC236}">
+                  <a16:creationId xmlns:a16="http://schemas.microsoft.com/office/drawing/2014/main" id="{3FFFFB88-F2EB-57A1-E43C-77240FF7E545}"/>
+                </a:ext>
+              </a:extLst>
+            </p:cNvPr>
+            <p:cNvSpPr/>
+            <p:nvPr/>
+          </p:nvSpPr>
+          <p:spPr>
+            <a:xfrm>
+              <a:off x="9336962" y="1576465"/>
+              <a:ext cx="2732049" cy="4202035"/>
+            </a:xfrm>
+            <a:prstGeom prst="roundRect">
+              <a:avLst/>
+            </a:prstGeom>
+          </p:spPr>
+          <p:style>
+            <a:lnRef idx="2">
+              <a:schemeClr val="accent1"/>
+            </a:lnRef>
+            <a:fillRef idx="1">
+              <a:schemeClr val="lt1"/>
+            </a:fillRef>
+            <a:effectRef idx="0">
+              <a:schemeClr val="accent1"/>
+            </a:effectRef>
+            <a:fontRef idx="minor">
+              <a:schemeClr val="dk1"/>
+            </a:fontRef>
+          </p:style>
+          <p:txBody>
+            <a:bodyPr rtlCol="0" anchor="t"/>
+            <a:lstStyle/>
+            <a:p>
+              <a:pPr algn="ctr"/>
+              <a:r>
+                <a:rPr lang="en-IE" noProof="1"/>
+                <a:t>HDH</a:t>
+              </a:r>
+            </a:p>
+          </p:txBody>
+        </p:sp>
+        <p:sp>
+          <p:nvSpPr>
+            <p:cNvPr id="37" name="Rectangle: Rounded Corners 36">
+              <a:extLst>
+                <a:ext uri="{FF2B5EF4-FFF2-40B4-BE49-F238E27FC236}">
+                  <a16:creationId xmlns:a16="http://schemas.microsoft.com/office/drawing/2014/main" id="{B075F9B0-89F4-4B63-5E23-B7F04CF45FD0}"/>
+                </a:ext>
+              </a:extLst>
+            </p:cNvPr>
+            <p:cNvSpPr/>
+            <p:nvPr/>
+          </p:nvSpPr>
+          <p:spPr>
+            <a:xfrm>
+              <a:off x="9825149" y="2126670"/>
+              <a:ext cx="1761893" cy="501805"/>
+            </a:xfrm>
+            <a:prstGeom prst="roundRect">
+              <a:avLst/>
+            </a:prstGeom>
+          </p:spPr>
+          <p:style>
+            <a:lnRef idx="2">
+              <a:schemeClr val="accent1"/>
+            </a:lnRef>
+            <a:fillRef idx="1">
+              <a:schemeClr val="lt1"/>
+            </a:fillRef>
+            <a:effectRef idx="0">
+              <a:schemeClr val="accent1"/>
+            </a:effectRef>
+            <a:fontRef idx="minor">
+              <a:schemeClr val="dk1"/>
+            </a:fontRef>
+          </p:style>
+          <p:txBody>
+            <a:bodyPr rtlCol="0" anchor="ctr"/>
+            <a:lstStyle/>
+            <a:p>
+              <a:pPr algn="ctr"/>
+              <a:r>
+                <a:rPr lang="en-IE" noProof="1">
+                  <a:solidFill>
+                    <a:schemeClr val="accent1"/>
+                  </a:solidFill>
+                </a:rPr>
+                <a:t>Settings</a:t>
+              </a:r>
+            </a:p>
+          </p:txBody>
+        </p:sp>
+        <p:sp>
+          <p:nvSpPr>
+            <p:cNvPr id="38" name="Rectangle: Rounded Corners 37">
+              <a:extLst>
+                <a:ext uri="{FF2B5EF4-FFF2-40B4-BE49-F238E27FC236}">
+                  <a16:creationId xmlns:a16="http://schemas.microsoft.com/office/drawing/2014/main" id="{71476E60-46A5-8351-70E9-0F31E36DB2E6}"/>
+                </a:ext>
+              </a:extLst>
+            </p:cNvPr>
+            <p:cNvSpPr/>
+            <p:nvPr/>
+          </p:nvSpPr>
+          <p:spPr>
+            <a:xfrm>
+              <a:off x="9825144" y="2714909"/>
+              <a:ext cx="1761893" cy="501805"/>
+            </a:xfrm>
+            <a:prstGeom prst="roundRect">
+              <a:avLst/>
+            </a:prstGeom>
+          </p:spPr>
+          <p:style>
+            <a:lnRef idx="2">
+              <a:schemeClr val="accent1"/>
+            </a:lnRef>
+            <a:fillRef idx="1">
+              <a:schemeClr val="lt1"/>
+            </a:fillRef>
+            <a:effectRef idx="0">
+              <a:schemeClr val="accent1"/>
+            </a:effectRef>
+            <a:fontRef idx="minor">
+              <a:schemeClr val="dk1"/>
+            </a:fontRef>
+          </p:style>
+          <p:txBody>
+            <a:bodyPr rtlCol="0" anchor="ctr"/>
+            <a:lstStyle/>
+            <a:p>
+              <a:pPr algn="ctr"/>
+              <a:r>
+                <a:rPr lang="en-IE" noProof="1">
+                  <a:solidFill>
+                    <a:schemeClr val="accent1"/>
+                  </a:solidFill>
+                </a:rPr>
+                <a:t>Location</a:t>
+              </a:r>
+            </a:p>
+          </p:txBody>
+        </p:sp>
+        <p:sp>
+          <p:nvSpPr>
+            <p:cNvPr id="39" name="Rectangle: Rounded Corners 38">
+              <a:extLst>
+                <a:ext uri="{FF2B5EF4-FFF2-40B4-BE49-F238E27FC236}">
+                  <a16:creationId xmlns:a16="http://schemas.microsoft.com/office/drawing/2014/main" id="{5D6D9959-0FCF-D180-BE28-37D2B56F61C5}"/>
+                </a:ext>
+              </a:extLst>
+            </p:cNvPr>
+            <p:cNvSpPr/>
+            <p:nvPr/>
+          </p:nvSpPr>
+          <p:spPr>
+            <a:xfrm>
+              <a:off x="9822039" y="3868743"/>
+              <a:ext cx="1761893" cy="501805"/>
+            </a:xfrm>
+            <a:prstGeom prst="roundRect">
+              <a:avLst/>
+            </a:prstGeom>
+          </p:spPr>
+          <p:style>
+            <a:lnRef idx="2">
+              <a:schemeClr val="accent2"/>
+            </a:lnRef>
+            <a:fillRef idx="1">
+              <a:schemeClr val="lt1"/>
+            </a:fillRef>
+            <a:effectRef idx="0">
+              <a:schemeClr val="accent2"/>
+            </a:effectRef>
+            <a:fontRef idx="minor">
+              <a:schemeClr val="dk1"/>
+            </a:fontRef>
+          </p:style>
+          <p:txBody>
+            <a:bodyPr rtlCol="0" anchor="ctr"/>
+            <a:lstStyle/>
+            <a:p>
+              <a:pPr algn="ctr"/>
+              <a:r>
+                <a:rPr lang="en-IE" noProof="1">
+                  <a:solidFill>
+                    <a:schemeClr val="accent2"/>
+                  </a:solidFill>
+                </a:rPr>
+                <a:t>CAES</a:t>
+              </a:r>
+            </a:p>
+          </p:txBody>
+        </p:sp>
+        <p:sp>
+          <p:nvSpPr>
+            <p:cNvPr id="41" name="Rectangle: Rounded Corners 40">
+              <a:extLst>
+                <a:ext uri="{FF2B5EF4-FFF2-40B4-BE49-F238E27FC236}">
+                  <a16:creationId xmlns:a16="http://schemas.microsoft.com/office/drawing/2014/main" id="{8F74EA40-F44E-2E38-9FBB-4D1D6F8BAE50}"/>
+                </a:ext>
+              </a:extLst>
+            </p:cNvPr>
+            <p:cNvSpPr/>
+            <p:nvPr/>
+          </p:nvSpPr>
+          <p:spPr>
+            <a:xfrm>
+              <a:off x="9822039" y="4466477"/>
+              <a:ext cx="1761894" cy="501805"/>
+            </a:xfrm>
+            <a:prstGeom prst="roundRect">
+              <a:avLst/>
+            </a:prstGeom>
+          </p:spPr>
+          <p:style>
+            <a:lnRef idx="2">
+              <a:schemeClr val="accent5"/>
+            </a:lnRef>
+            <a:fillRef idx="1">
+              <a:schemeClr val="lt1"/>
+            </a:fillRef>
+            <a:effectRef idx="0">
+              <a:schemeClr val="accent5"/>
+            </a:effectRef>
+            <a:fontRef idx="minor">
+              <a:schemeClr val="dk1"/>
+            </a:fontRef>
+          </p:style>
+          <p:txBody>
+            <a:bodyPr rtlCol="0" anchor="ctr"/>
+            <a:lstStyle/>
+            <a:p>
+              <a:pPr algn="ctr"/>
+              <a:r>
+                <a:rPr lang="en-IE" noProof="1">
+                  <a:solidFill>
+                    <a:schemeClr val="accent5"/>
+                  </a:solidFill>
+                </a:rPr>
+                <a:t>Market</a:t>
+              </a:r>
+            </a:p>
+          </p:txBody>
+        </p:sp>
+        <p:sp>
+          <p:nvSpPr>
+            <p:cNvPr id="42" name="Rectangle: Rounded Corners 41">
+              <a:extLst>
+                <a:ext uri="{FF2B5EF4-FFF2-40B4-BE49-F238E27FC236}">
+                  <a16:creationId xmlns:a16="http://schemas.microsoft.com/office/drawing/2014/main" id="{C540D844-2E26-5EBA-07CF-B0D198E37699}"/>
+                </a:ext>
+              </a:extLst>
+            </p:cNvPr>
+            <p:cNvSpPr/>
+            <p:nvPr/>
+          </p:nvSpPr>
+          <p:spPr>
+            <a:xfrm>
+              <a:off x="9825143" y="3280504"/>
+              <a:ext cx="1761893" cy="501805"/>
+            </a:xfrm>
+            <a:prstGeom prst="roundRect">
+              <a:avLst/>
+            </a:prstGeom>
+          </p:spPr>
+          <p:style>
+            <a:lnRef idx="2">
+              <a:schemeClr val="accent5"/>
+            </a:lnRef>
+            <a:fillRef idx="1">
+              <a:schemeClr val="lt1"/>
+            </a:fillRef>
+            <a:effectRef idx="0">
+              <a:schemeClr val="accent5"/>
+            </a:effectRef>
+            <a:fontRef idx="minor">
+              <a:schemeClr val="dk1"/>
+            </a:fontRef>
+          </p:style>
+          <p:txBody>
+            <a:bodyPr rtlCol="0" anchor="ctr"/>
+            <a:lstStyle/>
+            <a:p>
+              <a:pPr algn="ctr"/>
+              <a:r>
+                <a:rPr lang="en-IE" noProof="1">
+                  <a:solidFill>
+                    <a:schemeClr val="accent5"/>
+                  </a:solidFill>
+                </a:rPr>
+                <a:t>Weather</a:t>
+              </a:r>
+            </a:p>
+          </p:txBody>
+        </p:sp>
+      </p:grpSp>
+      <p:sp>
+        <p:nvSpPr>
+          <p:cNvPr id="20" name="Title 1">
+            <a:extLst>
+              <a:ext uri="{FF2B5EF4-FFF2-40B4-BE49-F238E27FC236}">
+                <a16:creationId xmlns:a16="http://schemas.microsoft.com/office/drawing/2014/main" id="{0DFD5482-0531-C01D-21BC-3C3BE59F6C7D}"/>
+              </a:ext>
+            </a:extLst>
+          </p:cNvPr>
+          <p:cNvSpPr txBox="1">
+            <a:spLocks/>
+          </p:cNvSpPr>
+          <p:nvPr/>
+        </p:nvSpPr>
+        <p:spPr>
+          <a:xfrm>
+            <a:off x="4664910" y="352675"/>
+            <a:ext cx="5585521" cy="1325563"/>
+          </a:xfrm>
+          <a:prstGeom prst="rect">
+            <a:avLst/>
+          </a:prstGeom>
+        </p:spPr>
+        <p:txBody>
+          <a:bodyPr vert="horz" lIns="91440" tIns="45720" rIns="91440" bIns="45720" rtlCol="0" anchor="ctr">
+            <a:normAutofit/>
+          </a:bodyPr>
+          <a:lstStyle>
+            <a:lvl1pPr algn="l" defTabSz="914400" rtl="0" eaLnBrk="1" latinLnBrk="0" hangingPunct="1">
+              <a:lnSpc>
+                <a:spcPct val="90000"/>
+              </a:lnSpc>
+              <a:spcBef>
+                <a:spcPct val="0"/>
+              </a:spcBef>
+              <a:buNone/>
+              <a:defRPr sz="4400" kern="1200">
+                <a:solidFill>
+                  <a:schemeClr val="tx1"/>
+                </a:solidFill>
+                <a:latin typeface="+mj-lt"/>
+                <a:ea typeface="+mj-ea"/>
+                <a:cs typeface="+mj-cs"/>
+              </a:defRPr>
+            </a:lvl1pPr>
+          </a:lstStyle>
+          <a:p>
+            <a:r>
+              <a:rPr lang="en-IE" noProof="1"/>
+              <a:t>research assistant</a:t>
+            </a:r>
+          </a:p>
+        </p:txBody>
+      </p:sp>
+      <p:grpSp>
+        <p:nvGrpSpPr>
+          <p:cNvPr id="23" name="Group 22">
+            <a:extLst>
+              <a:ext uri="{FF2B5EF4-FFF2-40B4-BE49-F238E27FC236}">
+                <a16:creationId xmlns:a16="http://schemas.microsoft.com/office/drawing/2014/main" id="{460848BE-72F4-7583-6E25-49FDCAC2C5D7}"/>
+              </a:ext>
+            </a:extLst>
+          </p:cNvPr>
+          <p:cNvGrpSpPr/>
+          <p:nvPr/>
+        </p:nvGrpSpPr>
+        <p:grpSpPr>
+          <a:xfrm>
+            <a:off x="6911880" y="1627351"/>
+            <a:ext cx="2732049" cy="4202035"/>
+            <a:chOff x="9336962" y="1576465"/>
+            <a:chExt cx="2732049" cy="4202035"/>
+          </a:xfrm>
+        </p:grpSpPr>
+        <p:sp>
+          <p:nvSpPr>
+            <p:cNvPr id="24" name="Rectangle: Rounded Corners 23">
+              <a:extLst>
+                <a:ext uri="{FF2B5EF4-FFF2-40B4-BE49-F238E27FC236}">
+                  <a16:creationId xmlns:a16="http://schemas.microsoft.com/office/drawing/2014/main" id="{DF24068B-E269-E057-3B7C-0DDBC59FF9A7}"/>
+                </a:ext>
+              </a:extLst>
+            </p:cNvPr>
+            <p:cNvSpPr/>
+            <p:nvPr/>
+          </p:nvSpPr>
+          <p:spPr>
+            <a:xfrm>
+              <a:off x="9336962" y="1576465"/>
+              <a:ext cx="2732049" cy="4202035"/>
+            </a:xfrm>
+            <a:prstGeom prst="roundRect">
+              <a:avLst/>
+            </a:prstGeom>
+          </p:spPr>
+          <p:style>
+            <a:lnRef idx="2">
+              <a:schemeClr val="accent1"/>
+            </a:lnRef>
+            <a:fillRef idx="1">
+              <a:schemeClr val="lt1"/>
+            </a:fillRef>
+            <a:effectRef idx="0">
+              <a:schemeClr val="accent1"/>
+            </a:effectRef>
+            <a:fontRef idx="minor">
+              <a:schemeClr val="dk1"/>
+            </a:fontRef>
+          </p:style>
+          <p:txBody>
+            <a:bodyPr rtlCol="0" anchor="t"/>
+            <a:lstStyle/>
+            <a:p>
+              <a:pPr algn="ctr"/>
+              <a:r>
+                <a:rPr lang="en-IE" noProof="1"/>
+                <a:t>CAES</a:t>
+              </a:r>
+            </a:p>
+          </p:txBody>
+        </p:sp>
+        <p:sp>
+          <p:nvSpPr>
+            <p:cNvPr id="25" name="Rectangle: Rounded Corners 24">
+              <a:extLst>
+                <a:ext uri="{FF2B5EF4-FFF2-40B4-BE49-F238E27FC236}">
+                  <a16:creationId xmlns:a16="http://schemas.microsoft.com/office/drawing/2014/main" id="{EC2146B5-31C0-0BFA-D961-6C5151C59B6F}"/>
+                </a:ext>
+              </a:extLst>
+            </p:cNvPr>
+            <p:cNvSpPr/>
+            <p:nvPr/>
+          </p:nvSpPr>
+          <p:spPr>
+            <a:xfrm>
+              <a:off x="9825149" y="2126670"/>
+              <a:ext cx="1761893" cy="501805"/>
+            </a:xfrm>
+            <a:prstGeom prst="roundRect">
+              <a:avLst/>
+            </a:prstGeom>
+          </p:spPr>
+          <p:style>
+            <a:lnRef idx="2">
+              <a:schemeClr val="accent1"/>
+            </a:lnRef>
+            <a:fillRef idx="1">
+              <a:schemeClr val="lt1"/>
+            </a:fillRef>
+            <a:effectRef idx="0">
+              <a:schemeClr val="accent1"/>
+            </a:effectRef>
+            <a:fontRef idx="minor">
+              <a:schemeClr val="dk1"/>
+            </a:fontRef>
+          </p:style>
+          <p:txBody>
+            <a:bodyPr rtlCol="0" anchor="ctr"/>
+            <a:lstStyle/>
+            <a:p>
+              <a:pPr algn="ctr"/>
+              <a:r>
+                <a:rPr lang="en-IE" noProof="1">
+                  <a:solidFill>
+                    <a:schemeClr val="accent1"/>
+                  </a:solidFill>
+                </a:rPr>
+                <a:t>Settings</a:t>
+              </a:r>
+            </a:p>
+          </p:txBody>
+        </p:sp>
+        <p:sp>
+          <p:nvSpPr>
+            <p:cNvPr id="26" name="Rectangle: Rounded Corners 25">
+              <a:extLst>
+                <a:ext uri="{FF2B5EF4-FFF2-40B4-BE49-F238E27FC236}">
+                  <a16:creationId xmlns:a16="http://schemas.microsoft.com/office/drawing/2014/main" id="{9A489DD9-1327-FD30-AF26-3D376B1E2808}"/>
+                </a:ext>
+              </a:extLst>
+            </p:cNvPr>
+            <p:cNvSpPr/>
+            <p:nvPr/>
+          </p:nvSpPr>
+          <p:spPr>
+            <a:xfrm>
+              <a:off x="9825144" y="2714909"/>
+              <a:ext cx="1761893" cy="501805"/>
+            </a:xfrm>
+            <a:prstGeom prst="roundRect">
+              <a:avLst/>
+            </a:prstGeom>
+          </p:spPr>
+          <p:style>
+            <a:lnRef idx="2">
+              <a:schemeClr val="accent1"/>
+            </a:lnRef>
+            <a:fillRef idx="1">
+              <a:schemeClr val="lt1"/>
+            </a:fillRef>
+            <a:effectRef idx="0">
+              <a:schemeClr val="accent1"/>
+            </a:effectRef>
+            <a:fontRef idx="minor">
+              <a:schemeClr val="dk1"/>
+            </a:fontRef>
+          </p:style>
+          <p:txBody>
+            <a:bodyPr rtlCol="0" anchor="ctr"/>
+            <a:lstStyle/>
+            <a:p>
+              <a:pPr algn="ctr"/>
+              <a:r>
+                <a:rPr lang="en-IE" noProof="1">
+                  <a:solidFill>
+                    <a:schemeClr val="accent1"/>
+                  </a:solidFill>
+                </a:rPr>
+                <a:t>Location</a:t>
+              </a:r>
+            </a:p>
+          </p:txBody>
+        </p:sp>
+        <p:sp>
+          <p:nvSpPr>
+            <p:cNvPr id="27" name="Rectangle: Rounded Corners 26">
+              <a:extLst>
+                <a:ext uri="{FF2B5EF4-FFF2-40B4-BE49-F238E27FC236}">
+                  <a16:creationId xmlns:a16="http://schemas.microsoft.com/office/drawing/2014/main" id="{8F554250-495D-8BDA-915D-A78AD4E1CE83}"/>
+                </a:ext>
+              </a:extLst>
+            </p:cNvPr>
+            <p:cNvSpPr/>
+            <p:nvPr/>
+          </p:nvSpPr>
+          <p:spPr>
+            <a:xfrm>
+              <a:off x="9822039" y="3868743"/>
+              <a:ext cx="1761893" cy="501805"/>
+            </a:xfrm>
+            <a:prstGeom prst="roundRect">
+              <a:avLst/>
+            </a:prstGeom>
+          </p:spPr>
+          <p:style>
+            <a:lnRef idx="2">
+              <a:schemeClr val="accent2"/>
+            </a:lnRef>
+            <a:fillRef idx="1">
+              <a:schemeClr val="lt1"/>
+            </a:fillRef>
+            <a:effectRef idx="0">
+              <a:schemeClr val="accent2"/>
+            </a:effectRef>
+            <a:fontRef idx="minor">
+              <a:schemeClr val="dk1"/>
+            </a:fontRef>
+          </p:style>
+          <p:txBody>
+            <a:bodyPr rtlCol="0" anchor="ctr"/>
+            <a:lstStyle/>
+            <a:p>
+              <a:pPr algn="ctr"/>
+              <a:r>
+                <a:rPr lang="en-IE" noProof="1">
+                  <a:solidFill>
+                    <a:schemeClr val="accent2"/>
+                  </a:solidFill>
+                </a:rPr>
+                <a:t>CAES</a:t>
+              </a:r>
+            </a:p>
+          </p:txBody>
+        </p:sp>
+        <p:sp>
+          <p:nvSpPr>
+            <p:cNvPr id="29" name="Rectangle: Rounded Corners 28">
+              <a:extLst>
+                <a:ext uri="{FF2B5EF4-FFF2-40B4-BE49-F238E27FC236}">
+                  <a16:creationId xmlns:a16="http://schemas.microsoft.com/office/drawing/2014/main" id="{11CB0059-5AF1-C58A-E7E6-940B04F2D898}"/>
+                </a:ext>
+              </a:extLst>
+            </p:cNvPr>
+            <p:cNvSpPr/>
+            <p:nvPr/>
+          </p:nvSpPr>
+          <p:spPr>
+            <a:xfrm>
+              <a:off x="9822039" y="4466477"/>
+              <a:ext cx="1761894" cy="501805"/>
+            </a:xfrm>
+            <a:prstGeom prst="roundRect">
+              <a:avLst/>
+            </a:prstGeom>
+          </p:spPr>
+          <p:style>
+            <a:lnRef idx="2">
+              <a:schemeClr val="accent5"/>
+            </a:lnRef>
+            <a:fillRef idx="1">
+              <a:schemeClr val="lt1"/>
+            </a:fillRef>
+            <a:effectRef idx="0">
+              <a:schemeClr val="accent5"/>
+            </a:effectRef>
+            <a:fontRef idx="minor">
+              <a:schemeClr val="dk1"/>
+            </a:fontRef>
+          </p:style>
+          <p:txBody>
+            <a:bodyPr rtlCol="0" anchor="ctr"/>
+            <a:lstStyle/>
+            <a:p>
+              <a:pPr algn="ctr"/>
+              <a:r>
+                <a:rPr lang="en-IE" noProof="1">
+                  <a:solidFill>
+                    <a:schemeClr val="accent5"/>
+                  </a:solidFill>
+                </a:rPr>
+                <a:t>Market</a:t>
+              </a:r>
+            </a:p>
+          </p:txBody>
+        </p:sp>
+        <p:sp>
+          <p:nvSpPr>
+            <p:cNvPr id="40" name="Rectangle: Rounded Corners 39">
+              <a:extLst>
+                <a:ext uri="{FF2B5EF4-FFF2-40B4-BE49-F238E27FC236}">
+                  <a16:creationId xmlns:a16="http://schemas.microsoft.com/office/drawing/2014/main" id="{38A3A396-00B2-FFBA-A01C-FC26828CF5EA}"/>
+                </a:ext>
+              </a:extLst>
+            </p:cNvPr>
+            <p:cNvSpPr/>
+            <p:nvPr/>
+          </p:nvSpPr>
+          <p:spPr>
+            <a:xfrm>
+              <a:off x="9825143" y="3280504"/>
+              <a:ext cx="1761893" cy="501805"/>
+            </a:xfrm>
+            <a:prstGeom prst="roundRect">
+              <a:avLst/>
+            </a:prstGeom>
+          </p:spPr>
+          <p:style>
+            <a:lnRef idx="2">
+              <a:schemeClr val="accent5"/>
+            </a:lnRef>
+            <a:fillRef idx="1">
+              <a:schemeClr val="lt1"/>
+            </a:fillRef>
+            <a:effectRef idx="0">
+              <a:schemeClr val="accent5"/>
+            </a:effectRef>
+            <a:fontRef idx="minor">
+              <a:schemeClr val="dk1"/>
+            </a:fontRef>
+          </p:style>
+          <p:txBody>
+            <a:bodyPr rtlCol="0" anchor="ctr"/>
+            <a:lstStyle/>
+            <a:p>
+              <a:pPr algn="ctr"/>
+              <a:r>
+                <a:rPr lang="en-IE" noProof="1">
+                  <a:solidFill>
+                    <a:schemeClr val="accent5"/>
+                  </a:solidFill>
+                </a:rPr>
+                <a:t>Weather</a:t>
+              </a:r>
+            </a:p>
+          </p:txBody>
+        </p:sp>
+      </p:grpSp>
+    </p:spTree>
+    <p:extLst>
+      <p:ext uri="{BB962C8B-B14F-4D97-AF65-F5344CB8AC3E}">
+        <p14:creationId xmlns:p14="http://schemas.microsoft.com/office/powerpoint/2010/main" val="577795663"/>
+      </p:ext>
+    </p:extLst>
+  </p:cSld>
+  <p:clrMapOvr>
+    <a:masterClrMapping/>
+  </p:clrMapOvr>
+</p:sld>
+</file>
+
+<file path=ppt/slides/slide3.xml><?xml version="1.0" encoding="utf-8"?>
+<p:sld xmlns:a="http://schemas.openxmlformats.org/drawingml/2006/main" xmlns:r="http://schemas.openxmlformats.org/officeDocument/2006/relationships" xmlns:p="http://schemas.openxmlformats.org/presentationml/2006/main">
+  <p:cSld>
+    <p:spTree>
+      <p:nvGrpSpPr>
+        <p:cNvPr id="1" name="">
+          <a:extLst>
+            <a:ext uri="{FF2B5EF4-FFF2-40B4-BE49-F238E27FC236}">
+              <a16:creationId xmlns:a16="http://schemas.microsoft.com/office/drawing/2014/main" id="{41DC16EB-4349-15F5-035A-C5B0F5A6752F}"/>
+            </a:ext>
+          </a:extLst>
+        </p:cNvPr>
+        <p:cNvGrpSpPr/>
+        <p:nvPr/>
+      </p:nvGrpSpPr>
+      <p:grpSpPr>
+        <a:xfrm>
+          <a:off x="0" y="0"/>
+          <a:ext cx="0" cy="0"/>
+          <a:chOff x="0" y="0"/>
+          <a:chExt cx="0" cy="0"/>
+        </a:xfrm>
+      </p:grpSpPr>
+      <p:sp>
+        <p:nvSpPr>
+          <p:cNvPr id="2" name="Title 1">
+            <a:extLst>
+              <a:ext uri="{FF2B5EF4-FFF2-40B4-BE49-F238E27FC236}">
+                <a16:creationId xmlns:a16="http://schemas.microsoft.com/office/drawing/2014/main" id="{5E8A2517-DC32-A828-CD5A-30A46F94184B}"/>
+              </a:ext>
+            </a:extLst>
+          </p:cNvPr>
+          <p:cNvSpPr>
+            <a:spLocks noGrp="1"/>
+          </p:cNvSpPr>
+          <p:nvPr>
+            <p:ph type="title"/>
+          </p:nvPr>
+        </p:nvSpPr>
+        <p:spPr>
+          <a:xfrm>
+            <a:off x="1789355" y="290634"/>
+            <a:ext cx="3352800" cy="1325563"/>
+          </a:xfrm>
+        </p:spPr>
+        <p:txBody>
+          <a:bodyPr/>
+          <a:lstStyle/>
+          <a:p>
+            <a:r>
+              <a:rPr lang="en-IE" noProof="1"/>
+              <a:t>postdoc_2</a:t>
+            </a:r>
+          </a:p>
+        </p:txBody>
+      </p:sp>
+      <p:sp>
+        <p:nvSpPr>
+          <p:cNvPr id="3" name="Title 1">
+            <a:extLst>
+              <a:ext uri="{FF2B5EF4-FFF2-40B4-BE49-F238E27FC236}">
+                <a16:creationId xmlns:a16="http://schemas.microsoft.com/office/drawing/2014/main" id="{9CFFAB82-665A-FC5E-6151-75E7815D8AE4}"/>
+              </a:ext>
+            </a:extLst>
+          </p:cNvPr>
+          <p:cNvSpPr txBox="1">
+            <a:spLocks/>
+          </p:cNvSpPr>
+          <p:nvPr/>
+        </p:nvSpPr>
+        <p:spPr>
+          <a:xfrm>
+            <a:off x="6939205" y="341096"/>
+            <a:ext cx="4457700" cy="1325563"/>
+          </a:xfrm>
+          <a:prstGeom prst="rect">
+            <a:avLst/>
+          </a:prstGeom>
+        </p:spPr>
+        <p:txBody>
+          <a:bodyPr vert="horz" lIns="91440" tIns="45720" rIns="91440" bIns="45720" rtlCol="0" anchor="ctr">
+            <a:normAutofit/>
+          </a:bodyPr>
+          <a:lstStyle>
+            <a:lvl1pPr algn="l" defTabSz="914400" rtl="0" eaLnBrk="1" latinLnBrk="0" hangingPunct="1">
+              <a:lnSpc>
+                <a:spcPct val="90000"/>
+              </a:lnSpc>
+              <a:spcBef>
+                <a:spcPct val="0"/>
+              </a:spcBef>
+              <a:buNone/>
+              <a:defRPr sz="4400" kern="1200">
+                <a:solidFill>
+                  <a:schemeClr val="tx1"/>
+                </a:solidFill>
+                <a:latin typeface="+mj-lt"/>
+                <a:ea typeface="+mj-ea"/>
+                <a:cs typeface="+mj-cs"/>
+              </a:defRPr>
+            </a:lvl1pPr>
+          </a:lstStyle>
+          <a:p>
+            <a:r>
+              <a:rPr lang="en-IE" noProof="1"/>
+              <a:t>postdoc_1</a:t>
+            </a:r>
+          </a:p>
+        </p:txBody>
+      </p:sp>
+      <p:grpSp>
+        <p:nvGrpSpPr>
+          <p:cNvPr id="8" name="Group 7">
+            <a:extLst>
+              <a:ext uri="{FF2B5EF4-FFF2-40B4-BE49-F238E27FC236}">
+                <a16:creationId xmlns:a16="http://schemas.microsoft.com/office/drawing/2014/main" id="{3B48B27D-B0FE-2037-A1A7-6C50EEFA8384}"/>
+              </a:ext>
+            </a:extLst>
+          </p:cNvPr>
+          <p:cNvGrpSpPr/>
+          <p:nvPr/>
+        </p:nvGrpSpPr>
+        <p:grpSpPr>
+          <a:xfrm>
+            <a:off x="1167055" y="1585867"/>
+            <a:ext cx="3975100" cy="5053088"/>
+            <a:chOff x="893056" y="1614489"/>
+            <a:chExt cx="1928938" cy="5053088"/>
+          </a:xfrm>
+        </p:grpSpPr>
+        <p:sp>
+          <p:nvSpPr>
+            <p:cNvPr id="11" name="Rectangle: Rounded Corners 10">
+              <a:extLst>
+                <a:ext uri="{FF2B5EF4-FFF2-40B4-BE49-F238E27FC236}">
+                  <a16:creationId xmlns:a16="http://schemas.microsoft.com/office/drawing/2014/main" id="{7ADC10ED-A03C-2177-D59B-E9C27A434C8E}"/>
+                </a:ext>
+              </a:extLst>
+            </p:cNvPr>
+            <p:cNvSpPr/>
+            <p:nvPr/>
+          </p:nvSpPr>
+          <p:spPr>
+            <a:xfrm>
+              <a:off x="893056" y="1614489"/>
+              <a:ext cx="1928938" cy="5053088"/>
+            </a:xfrm>
+            <a:prstGeom prst="roundRect">
+              <a:avLst>
+                <a:gd name="adj" fmla="val 3656"/>
+              </a:avLst>
+            </a:prstGeom>
+          </p:spPr>
+          <p:style>
+            <a:lnRef idx="2">
+              <a:schemeClr val="accent1"/>
+            </a:lnRef>
+            <a:fillRef idx="1">
+              <a:schemeClr val="lt1"/>
+            </a:fillRef>
+            <a:effectRef idx="0">
+              <a:schemeClr val="accent1"/>
+            </a:effectRef>
+            <a:fontRef idx="minor">
+              <a:schemeClr val="dk1"/>
+            </a:fontRef>
+          </p:style>
+          <p:txBody>
+            <a:bodyPr rtlCol="0" anchor="t"/>
+            <a:lstStyle/>
+            <a:p>
+              <a:pPr algn="ctr"/>
+              <a:r>
+                <a:rPr lang="en-IE" noProof="1"/>
+                <a:t>/bdr_csp</a:t>
+              </a:r>
+            </a:p>
+          </p:txBody>
+        </p:sp>
+        <p:sp>
+          <p:nvSpPr>
+            <p:cNvPr id="12" name="Rectangle: Rounded Corners 11">
+              <a:extLst>
+                <a:ext uri="{FF2B5EF4-FFF2-40B4-BE49-F238E27FC236}">
+                  <a16:creationId xmlns:a16="http://schemas.microsoft.com/office/drawing/2014/main" id="{F10249B5-028B-7D2D-3A20-E080771667A0}"/>
+                </a:ext>
+              </a:extLst>
+            </p:cNvPr>
+            <p:cNvSpPr/>
+            <p:nvPr/>
+          </p:nvSpPr>
+          <p:spPr>
+            <a:xfrm>
+              <a:off x="950949" y="5547392"/>
+              <a:ext cx="1761893" cy="501805"/>
+            </a:xfrm>
+            <a:prstGeom prst="roundRect">
+              <a:avLst/>
+            </a:prstGeom>
+          </p:spPr>
+          <p:style>
+            <a:lnRef idx="2">
+              <a:schemeClr val="accent5"/>
+            </a:lnRef>
+            <a:fillRef idx="1">
+              <a:schemeClr val="lt1"/>
+            </a:fillRef>
+            <a:effectRef idx="0">
+              <a:schemeClr val="accent5"/>
+            </a:effectRef>
+            <a:fontRef idx="minor">
+              <a:schemeClr val="dk1"/>
+            </a:fontRef>
+          </p:style>
+          <p:txBody>
+            <a:bodyPr rtlCol="0" anchor="ctr"/>
+            <a:lstStyle/>
+            <a:p>
+              <a:pPr algn="ctr"/>
+              <a:r>
+                <a:rPr lang="en-IE" noProof="1">
+                  <a:solidFill>
+                    <a:schemeClr val="accent5"/>
+                  </a:solidFill>
+                </a:rPr>
+                <a:t>weather data</a:t>
+              </a:r>
+            </a:p>
+          </p:txBody>
+        </p:sp>
+        <p:sp>
+          <p:nvSpPr>
+            <p:cNvPr id="13" name="Rectangle: Rounded Corners 12">
+              <a:extLst>
+                <a:ext uri="{FF2B5EF4-FFF2-40B4-BE49-F238E27FC236}">
+                  <a16:creationId xmlns:a16="http://schemas.microsoft.com/office/drawing/2014/main" id="{FFDB26FB-8A97-5375-9E82-CC84C90B7BE5}"/>
+                </a:ext>
+              </a:extLst>
+            </p:cNvPr>
+            <p:cNvSpPr/>
+            <p:nvPr/>
+          </p:nvSpPr>
+          <p:spPr>
+            <a:xfrm>
+              <a:off x="950949" y="4040436"/>
+              <a:ext cx="1761893" cy="501805"/>
+            </a:xfrm>
+            <a:prstGeom prst="roundRect">
+              <a:avLst/>
+            </a:prstGeom>
+          </p:spPr>
+          <p:style>
+            <a:lnRef idx="2">
+              <a:schemeClr val="accent2"/>
+            </a:lnRef>
+            <a:fillRef idx="1">
+              <a:schemeClr val="lt1"/>
+            </a:fillRef>
+            <a:effectRef idx="0">
+              <a:schemeClr val="accent2"/>
+            </a:effectRef>
+            <a:fontRef idx="minor">
+              <a:schemeClr val="dk1"/>
+            </a:fontRef>
+          </p:style>
+          <p:txBody>
+            <a:bodyPr rtlCol="0" anchor="ctr"/>
+            <a:lstStyle/>
+            <a:p>
+              <a:pPr algn="ctr"/>
+              <a:r>
+                <a:rPr lang="en-IE" noProof="1">
+                  <a:solidFill>
+                    <a:schemeClr val="accent2"/>
+                  </a:solidFill>
+                </a:rPr>
+                <a:t>thermal analysis (particle receiver)</a:t>
+              </a:r>
+            </a:p>
+          </p:txBody>
+        </p:sp>
+        <p:sp>
+          <p:nvSpPr>
+            <p:cNvPr id="15" name="Rectangle: Rounded Corners 14">
+              <a:extLst>
+                <a:ext uri="{FF2B5EF4-FFF2-40B4-BE49-F238E27FC236}">
+                  <a16:creationId xmlns:a16="http://schemas.microsoft.com/office/drawing/2014/main" id="{3AE3FA1E-3506-FD3C-F976-77FA24982F82}"/>
+                </a:ext>
+              </a:extLst>
+            </p:cNvPr>
+            <p:cNvSpPr/>
+            <p:nvPr/>
+          </p:nvSpPr>
+          <p:spPr>
+            <a:xfrm>
+              <a:off x="950949" y="4618257"/>
+              <a:ext cx="1761894" cy="501805"/>
+            </a:xfrm>
+            <a:prstGeom prst="roundRect">
+              <a:avLst/>
+            </a:prstGeom>
+          </p:spPr>
+          <p:style>
+            <a:lnRef idx="2">
+              <a:schemeClr val="accent2"/>
+            </a:lnRef>
+            <a:fillRef idx="1">
+              <a:schemeClr val="lt1"/>
+            </a:fillRef>
+            <a:effectRef idx="0">
+              <a:schemeClr val="accent2"/>
+            </a:effectRef>
+            <a:fontRef idx="minor">
+              <a:schemeClr val="dk1"/>
+            </a:fontRef>
+          </p:style>
+          <p:txBody>
+            <a:bodyPr rtlCol="0" anchor="ctr"/>
+            <a:lstStyle/>
+            <a:p>
+              <a:pPr algn="ctr"/>
+              <a:r>
+                <a:rPr lang="en-IE" noProof="1">
+                  <a:solidFill>
+                    <a:schemeClr val="accent2"/>
+                  </a:solidFill>
+                </a:rPr>
+                <a:t>power generation (dispatch)</a:t>
+              </a:r>
+            </a:p>
+          </p:txBody>
+        </p:sp>
+        <p:sp>
+          <p:nvSpPr>
+            <p:cNvPr id="16" name="Rectangle: Rounded Corners 15">
+              <a:extLst>
+                <a:ext uri="{FF2B5EF4-FFF2-40B4-BE49-F238E27FC236}">
+                  <a16:creationId xmlns:a16="http://schemas.microsoft.com/office/drawing/2014/main" id="{D7D96856-C6FD-6D69-BB18-5766E9897702}"/>
+                </a:ext>
+              </a:extLst>
+            </p:cNvPr>
+            <p:cNvSpPr/>
+            <p:nvPr/>
+          </p:nvSpPr>
+          <p:spPr>
+            <a:xfrm>
+              <a:off x="950949" y="3480344"/>
+              <a:ext cx="1761893" cy="501805"/>
+            </a:xfrm>
+            <a:prstGeom prst="roundRect">
+              <a:avLst/>
+            </a:prstGeom>
+          </p:spPr>
+          <p:style>
+            <a:lnRef idx="2">
+              <a:schemeClr val="accent2"/>
+            </a:lnRef>
+            <a:fillRef idx="1">
+              <a:schemeClr val="lt1"/>
+            </a:fillRef>
+            <a:effectRef idx="0">
+              <a:schemeClr val="accent2"/>
+            </a:effectRef>
+            <a:fontRef idx="minor">
+              <a:schemeClr val="dk1"/>
+            </a:fontRef>
+          </p:style>
+          <p:txBody>
+            <a:bodyPr rtlCol="0" anchor="ctr"/>
+            <a:lstStyle/>
+            <a:p>
+              <a:pPr algn="ctr"/>
+              <a:r>
+                <a:rPr lang="en-IE" noProof="1">
+                  <a:solidFill>
+                    <a:schemeClr val="accent2"/>
+                  </a:solidFill>
+                </a:rPr>
+                <a:t>optical analysis (beam down)</a:t>
+              </a:r>
+            </a:p>
+          </p:txBody>
+        </p:sp>
+        <p:sp>
+          <p:nvSpPr>
+            <p:cNvPr id="17" name="Rectangle: Rounded Corners 16">
+              <a:extLst>
+                <a:ext uri="{FF2B5EF4-FFF2-40B4-BE49-F238E27FC236}">
+                  <a16:creationId xmlns:a16="http://schemas.microsoft.com/office/drawing/2014/main" id="{BEB857F1-038F-0C68-F429-5376A3BE8D09}"/>
+                </a:ext>
+              </a:extLst>
+            </p:cNvPr>
+            <p:cNvSpPr/>
+            <p:nvPr/>
+          </p:nvSpPr>
+          <p:spPr>
+            <a:xfrm>
+              <a:off x="950950" y="6094183"/>
+              <a:ext cx="1761894" cy="501805"/>
+            </a:xfrm>
+            <a:prstGeom prst="roundRect">
+              <a:avLst/>
+            </a:prstGeom>
+          </p:spPr>
+          <p:style>
+            <a:lnRef idx="2">
+              <a:schemeClr val="accent5"/>
+            </a:lnRef>
+            <a:fillRef idx="1">
+              <a:schemeClr val="lt1"/>
+            </a:fillRef>
+            <a:effectRef idx="0">
+              <a:schemeClr val="accent5"/>
+            </a:effectRef>
+            <a:fontRef idx="minor">
+              <a:schemeClr val="dk1"/>
+            </a:fontRef>
+          </p:style>
+          <p:txBody>
+            <a:bodyPr rtlCol="0" anchor="ctr"/>
+            <a:lstStyle/>
+            <a:p>
+              <a:pPr algn="ctr"/>
+              <a:r>
+                <a:rPr lang="en-IE" noProof="1">
+                  <a:solidFill>
+                    <a:schemeClr val="accent5"/>
+                  </a:solidFill>
+                </a:rPr>
+                <a:t>market data</a:t>
+              </a:r>
+            </a:p>
+          </p:txBody>
+        </p:sp>
+        <p:sp>
+          <p:nvSpPr>
+            <p:cNvPr id="18" name="Rectangle: Rounded Corners 17">
+              <a:extLst>
+                <a:ext uri="{FF2B5EF4-FFF2-40B4-BE49-F238E27FC236}">
+                  <a16:creationId xmlns:a16="http://schemas.microsoft.com/office/drawing/2014/main" id="{3C827AEE-0D55-AD6A-B2ED-B9004283CC78}"/>
+                </a:ext>
+              </a:extLst>
+            </p:cNvPr>
+            <p:cNvSpPr/>
+            <p:nvPr/>
+          </p:nvSpPr>
+          <p:spPr>
+            <a:xfrm>
+              <a:off x="950949" y="2109645"/>
+              <a:ext cx="1761893" cy="501805"/>
+            </a:xfrm>
+            <a:prstGeom prst="roundRect">
+              <a:avLst/>
+            </a:prstGeom>
+          </p:spPr>
+          <p:style>
+            <a:lnRef idx="2">
+              <a:schemeClr val="accent1"/>
+            </a:lnRef>
+            <a:fillRef idx="1">
+              <a:schemeClr val="lt1"/>
+            </a:fillRef>
+            <a:effectRef idx="0">
+              <a:schemeClr val="accent1"/>
+            </a:effectRef>
+            <a:fontRef idx="minor">
+              <a:schemeClr val="dk1"/>
+            </a:fontRef>
+          </p:style>
+          <p:txBody>
+            <a:bodyPr rtlCol="0" anchor="ctr"/>
+            <a:lstStyle/>
+            <a:p>
+              <a:pPr algn="ctr"/>
+              <a:r>
+                <a:rPr lang="en-IE" noProof="1">
+                  <a:solidFill>
+                    <a:schemeClr val="accent1"/>
+                  </a:solidFill>
+                </a:rPr>
+                <a:t>settings</a:t>
+              </a:r>
+            </a:p>
+          </p:txBody>
+        </p:sp>
+        <p:sp>
+          <p:nvSpPr>
+            <p:cNvPr id="19" name="Rectangle: Rounded Corners 18">
+              <a:extLst>
+                <a:ext uri="{FF2B5EF4-FFF2-40B4-BE49-F238E27FC236}">
+                  <a16:creationId xmlns:a16="http://schemas.microsoft.com/office/drawing/2014/main" id="{B81E8492-984A-7533-9A45-0DB07CD9E541}"/>
+                </a:ext>
+              </a:extLst>
+            </p:cNvPr>
+            <p:cNvSpPr/>
+            <p:nvPr/>
+          </p:nvSpPr>
+          <p:spPr>
+            <a:xfrm>
+              <a:off x="950949" y="2676116"/>
+              <a:ext cx="1761893" cy="501805"/>
+            </a:xfrm>
+            <a:prstGeom prst="roundRect">
+              <a:avLst/>
+            </a:prstGeom>
+          </p:spPr>
+          <p:style>
+            <a:lnRef idx="2">
+              <a:schemeClr val="accent1"/>
+            </a:lnRef>
+            <a:fillRef idx="1">
+              <a:schemeClr val="lt1"/>
+            </a:fillRef>
+            <a:effectRef idx="0">
+              <a:schemeClr val="accent1"/>
+            </a:effectRef>
+            <a:fontRef idx="minor">
+              <a:schemeClr val="dk1"/>
+            </a:fontRef>
+          </p:style>
+          <p:txBody>
+            <a:bodyPr rtlCol="0" anchor="ctr"/>
+            <a:lstStyle/>
+            <a:p>
+              <a:pPr algn="ctr"/>
+              <a:r>
+                <a:rPr lang="en-IE" noProof="1">
+                  <a:solidFill>
+                    <a:schemeClr val="accent1"/>
+                  </a:solidFill>
+                </a:rPr>
+                <a:t>location</a:t>
+              </a:r>
+            </a:p>
+          </p:txBody>
+        </p:sp>
+      </p:grpSp>
+      <p:grpSp>
+        <p:nvGrpSpPr>
+          <p:cNvPr id="20" name="Group 19">
+            <a:extLst>
+              <a:ext uri="{FF2B5EF4-FFF2-40B4-BE49-F238E27FC236}">
+                <a16:creationId xmlns:a16="http://schemas.microsoft.com/office/drawing/2014/main" id="{4D58DEE9-947A-2C49-AD15-365ED812B45D}"/>
+              </a:ext>
+            </a:extLst>
+          </p:cNvPr>
+          <p:cNvGrpSpPr/>
+          <p:nvPr/>
+        </p:nvGrpSpPr>
+        <p:grpSpPr>
+          <a:xfrm>
+            <a:off x="6680201" y="1585867"/>
+            <a:ext cx="3975100" cy="5053088"/>
+            <a:chOff x="893056" y="1614489"/>
+            <a:chExt cx="1928938" cy="5053088"/>
+          </a:xfrm>
+        </p:grpSpPr>
+        <p:sp>
+          <p:nvSpPr>
+            <p:cNvPr id="21" name="Rectangle: Rounded Corners 20">
+              <a:extLst>
+                <a:ext uri="{FF2B5EF4-FFF2-40B4-BE49-F238E27FC236}">
+                  <a16:creationId xmlns:a16="http://schemas.microsoft.com/office/drawing/2014/main" id="{E72155F6-0607-F894-64B7-95A5C5CF03B1}"/>
+                </a:ext>
+              </a:extLst>
+            </p:cNvPr>
+            <p:cNvSpPr/>
+            <p:nvPr/>
+          </p:nvSpPr>
+          <p:spPr>
+            <a:xfrm>
+              <a:off x="893056" y="1614489"/>
+              <a:ext cx="1928938" cy="5053088"/>
+            </a:xfrm>
+            <a:prstGeom prst="roundRect">
+              <a:avLst>
+                <a:gd name="adj" fmla="val 3656"/>
+              </a:avLst>
+            </a:prstGeom>
+          </p:spPr>
+          <p:style>
+            <a:lnRef idx="2">
+              <a:schemeClr val="accent1"/>
+            </a:lnRef>
+            <a:fillRef idx="1">
+              <a:schemeClr val="lt1"/>
+            </a:fillRef>
+            <a:effectRef idx="0">
+              <a:schemeClr val="accent1"/>
+            </a:effectRef>
+            <a:fontRef idx="minor">
+              <a:schemeClr val="dk1"/>
+            </a:fontRef>
+          </p:style>
+          <p:txBody>
+            <a:bodyPr rtlCol="0" anchor="t"/>
+            <a:lstStyle/>
+            <a:p>
+              <a:pPr algn="ctr"/>
+              <a:r>
+                <a:rPr lang="en-IE" noProof="1"/>
+                <a:t>/tm_solarshift</a:t>
+              </a:r>
+            </a:p>
+          </p:txBody>
+        </p:sp>
+        <p:sp>
+          <p:nvSpPr>
+            <p:cNvPr id="22" name="Rectangle: Rounded Corners 21">
+              <a:extLst>
+                <a:ext uri="{FF2B5EF4-FFF2-40B4-BE49-F238E27FC236}">
+                  <a16:creationId xmlns:a16="http://schemas.microsoft.com/office/drawing/2014/main" id="{34DF07B3-F423-E379-527C-A6E1E03D8A64}"/>
+                </a:ext>
+              </a:extLst>
+            </p:cNvPr>
+            <p:cNvSpPr/>
+            <p:nvPr/>
+          </p:nvSpPr>
+          <p:spPr>
+            <a:xfrm>
+              <a:off x="950949" y="5547392"/>
+              <a:ext cx="1761893" cy="501805"/>
+            </a:xfrm>
+            <a:prstGeom prst="roundRect">
+              <a:avLst/>
+            </a:prstGeom>
+          </p:spPr>
+          <p:style>
+            <a:lnRef idx="2">
+              <a:schemeClr val="accent5"/>
+            </a:lnRef>
+            <a:fillRef idx="1">
+              <a:schemeClr val="lt1"/>
+            </a:fillRef>
+            <a:effectRef idx="0">
+              <a:schemeClr val="accent5"/>
+            </a:effectRef>
+            <a:fontRef idx="minor">
+              <a:schemeClr val="dk1"/>
+            </a:fontRef>
+          </p:style>
+          <p:txBody>
+            <a:bodyPr rtlCol="0" anchor="ctr"/>
+            <a:lstStyle/>
+            <a:p>
+              <a:pPr algn="ctr"/>
+              <a:r>
+                <a:rPr lang="en-IE" noProof="1">
+                  <a:solidFill>
+                    <a:schemeClr val="accent5"/>
+                  </a:solidFill>
+                </a:rPr>
+                <a:t>weather data</a:t>
+              </a:r>
+            </a:p>
+          </p:txBody>
+        </p:sp>
+        <p:sp>
+          <p:nvSpPr>
+            <p:cNvPr id="23" name="Rectangle: Rounded Corners 22">
+              <a:extLst>
+                <a:ext uri="{FF2B5EF4-FFF2-40B4-BE49-F238E27FC236}">
+                  <a16:creationId xmlns:a16="http://schemas.microsoft.com/office/drawing/2014/main" id="{5113D0AD-80F3-F44D-4CD2-5C83F6407490}"/>
+                </a:ext>
+              </a:extLst>
+            </p:cNvPr>
+            <p:cNvSpPr/>
+            <p:nvPr/>
+          </p:nvSpPr>
+          <p:spPr>
+            <a:xfrm>
+              <a:off x="950949" y="4040436"/>
+              <a:ext cx="1761893" cy="501805"/>
+            </a:xfrm>
+            <a:prstGeom prst="roundRect">
+              <a:avLst/>
+            </a:prstGeom>
+          </p:spPr>
+          <p:style>
+            <a:lnRef idx="2">
+              <a:schemeClr val="accent2"/>
+            </a:lnRef>
+            <a:fillRef idx="1">
+              <a:schemeClr val="lt1"/>
+            </a:fillRef>
+            <a:effectRef idx="0">
+              <a:schemeClr val="accent2"/>
+            </a:effectRef>
+            <a:fontRef idx="minor">
+              <a:schemeClr val="dk1"/>
+            </a:fontRef>
+          </p:style>
+          <p:txBody>
+            <a:bodyPr rtlCol="0" anchor="ctr"/>
+            <a:lstStyle/>
+            <a:p>
+              <a:pPr algn="ctr"/>
+              <a:r>
+                <a:rPr lang="en-IE" noProof="1">
+                  <a:solidFill>
+                    <a:schemeClr val="accent2"/>
+                  </a:solidFill>
+                </a:rPr>
+                <a:t>thermal analysis (particle receiver)</a:t>
+              </a:r>
+            </a:p>
+          </p:txBody>
+        </p:sp>
+        <p:sp>
+          <p:nvSpPr>
+            <p:cNvPr id="24" name="Rectangle: Rounded Corners 23">
+              <a:extLst>
+                <a:ext uri="{FF2B5EF4-FFF2-40B4-BE49-F238E27FC236}">
+                  <a16:creationId xmlns:a16="http://schemas.microsoft.com/office/drawing/2014/main" id="{460D0AC1-2783-8E5D-89F1-09BA4FB47395}"/>
+                </a:ext>
+              </a:extLst>
+            </p:cNvPr>
+            <p:cNvSpPr/>
+            <p:nvPr/>
+          </p:nvSpPr>
+          <p:spPr>
+            <a:xfrm>
+              <a:off x="950949" y="4618257"/>
+              <a:ext cx="1761894" cy="501805"/>
+            </a:xfrm>
+            <a:prstGeom prst="roundRect">
+              <a:avLst/>
+            </a:prstGeom>
+          </p:spPr>
+          <p:style>
+            <a:lnRef idx="2">
+              <a:schemeClr val="accent2"/>
+            </a:lnRef>
+            <a:fillRef idx="1">
+              <a:schemeClr val="lt1"/>
+            </a:fillRef>
+            <a:effectRef idx="0">
+              <a:schemeClr val="accent2"/>
+            </a:effectRef>
+            <a:fontRef idx="minor">
+              <a:schemeClr val="dk1"/>
+            </a:fontRef>
+          </p:style>
+          <p:txBody>
+            <a:bodyPr rtlCol="0" anchor="ctr"/>
+            <a:lstStyle/>
+            <a:p>
+              <a:pPr algn="ctr"/>
+              <a:r>
+                <a:rPr lang="en-IE" noProof="1">
+                  <a:solidFill>
+                    <a:schemeClr val="accent2"/>
+                  </a:solidFill>
+                </a:rPr>
+                <a:t>power generation (dispatch)</a:t>
+              </a:r>
+            </a:p>
+          </p:txBody>
+        </p:sp>
+        <p:sp>
+          <p:nvSpPr>
+            <p:cNvPr id="25" name="Rectangle: Rounded Corners 24">
+              <a:extLst>
+                <a:ext uri="{FF2B5EF4-FFF2-40B4-BE49-F238E27FC236}">
+                  <a16:creationId xmlns:a16="http://schemas.microsoft.com/office/drawing/2014/main" id="{04B02A39-B08A-4A7D-517D-B1A40A675624}"/>
+                </a:ext>
+              </a:extLst>
+            </p:cNvPr>
+            <p:cNvSpPr/>
+            <p:nvPr/>
+          </p:nvSpPr>
+          <p:spPr>
+            <a:xfrm>
+              <a:off x="950949" y="3480344"/>
+              <a:ext cx="1761893" cy="501805"/>
+            </a:xfrm>
+            <a:prstGeom prst="roundRect">
+              <a:avLst/>
+            </a:prstGeom>
+          </p:spPr>
+          <p:style>
+            <a:lnRef idx="2">
+              <a:schemeClr val="accent2"/>
+            </a:lnRef>
+            <a:fillRef idx="1">
+              <a:schemeClr val="lt1"/>
+            </a:fillRef>
+            <a:effectRef idx="0">
+              <a:schemeClr val="accent2"/>
+            </a:effectRef>
+            <a:fontRef idx="minor">
+              <a:schemeClr val="dk1"/>
+            </a:fontRef>
+          </p:style>
+          <p:txBody>
+            <a:bodyPr rtlCol="0" anchor="ctr"/>
+            <a:lstStyle/>
+            <a:p>
+              <a:pPr algn="ctr"/>
+              <a:r>
+                <a:rPr lang="en-IE" noProof="1">
+                  <a:solidFill>
+                    <a:schemeClr val="accent2"/>
+                  </a:solidFill>
+                </a:rPr>
+                <a:t>optical analysis (beam down)</a:t>
+              </a:r>
+            </a:p>
+          </p:txBody>
+        </p:sp>
+        <p:sp>
+          <p:nvSpPr>
+            <p:cNvPr id="26" name="Rectangle: Rounded Corners 25">
+              <a:extLst>
+                <a:ext uri="{FF2B5EF4-FFF2-40B4-BE49-F238E27FC236}">
+                  <a16:creationId xmlns:a16="http://schemas.microsoft.com/office/drawing/2014/main" id="{7528F313-7409-51DE-0183-138BF6FB1E9B}"/>
+                </a:ext>
+              </a:extLst>
+            </p:cNvPr>
+            <p:cNvSpPr/>
+            <p:nvPr/>
+          </p:nvSpPr>
+          <p:spPr>
+            <a:xfrm>
+              <a:off x="950950" y="6094183"/>
+              <a:ext cx="1761894" cy="501805"/>
+            </a:xfrm>
+            <a:prstGeom prst="roundRect">
+              <a:avLst/>
+            </a:prstGeom>
+          </p:spPr>
+          <p:style>
+            <a:lnRef idx="2">
+              <a:schemeClr val="accent5"/>
+            </a:lnRef>
+            <a:fillRef idx="1">
+              <a:schemeClr val="lt1"/>
+            </a:fillRef>
+            <a:effectRef idx="0">
+              <a:schemeClr val="accent5"/>
+            </a:effectRef>
+            <a:fontRef idx="minor">
+              <a:schemeClr val="dk1"/>
+            </a:fontRef>
+          </p:style>
+          <p:txBody>
+            <a:bodyPr rtlCol="0" anchor="ctr"/>
+            <a:lstStyle/>
+            <a:p>
+              <a:pPr algn="ctr"/>
+              <a:r>
+                <a:rPr lang="en-IE" noProof="1">
+                  <a:solidFill>
+                    <a:schemeClr val="accent5"/>
+                  </a:solidFill>
+                </a:rPr>
+                <a:t>market data</a:t>
+              </a:r>
+            </a:p>
+          </p:txBody>
+        </p:sp>
+        <p:sp>
+          <p:nvSpPr>
+            <p:cNvPr id="27" name="Rectangle: Rounded Corners 26">
+              <a:extLst>
+                <a:ext uri="{FF2B5EF4-FFF2-40B4-BE49-F238E27FC236}">
+                  <a16:creationId xmlns:a16="http://schemas.microsoft.com/office/drawing/2014/main" id="{9202022A-1C42-8DE4-B657-B28770F66584}"/>
+                </a:ext>
+              </a:extLst>
+            </p:cNvPr>
+            <p:cNvSpPr/>
+            <p:nvPr/>
+          </p:nvSpPr>
+          <p:spPr>
+            <a:xfrm>
+              <a:off x="950949" y="2109645"/>
+              <a:ext cx="1761893" cy="501805"/>
+            </a:xfrm>
+            <a:prstGeom prst="roundRect">
+              <a:avLst/>
+            </a:prstGeom>
+          </p:spPr>
+          <p:style>
+            <a:lnRef idx="2">
+              <a:schemeClr val="accent1"/>
+            </a:lnRef>
+            <a:fillRef idx="1">
+              <a:schemeClr val="lt1"/>
+            </a:fillRef>
+            <a:effectRef idx="0">
+              <a:schemeClr val="accent1"/>
+            </a:effectRef>
+            <a:fontRef idx="minor">
+              <a:schemeClr val="dk1"/>
+            </a:fontRef>
+          </p:style>
+          <p:txBody>
+            <a:bodyPr rtlCol="0" anchor="ctr"/>
+            <a:lstStyle/>
+            <a:p>
+              <a:pPr algn="ctr"/>
+              <a:r>
+                <a:rPr lang="en-IE" noProof="1">
+                  <a:solidFill>
+                    <a:schemeClr val="accent1"/>
+                  </a:solidFill>
+                </a:rPr>
+                <a:t>settings</a:t>
+              </a:r>
+            </a:p>
+          </p:txBody>
+        </p:sp>
+        <p:sp>
+          <p:nvSpPr>
+            <p:cNvPr id="29" name="Rectangle: Rounded Corners 28">
+              <a:extLst>
+                <a:ext uri="{FF2B5EF4-FFF2-40B4-BE49-F238E27FC236}">
+                  <a16:creationId xmlns:a16="http://schemas.microsoft.com/office/drawing/2014/main" id="{6B662275-2B41-EFE6-B337-3C4D9B45505D}"/>
+                </a:ext>
+              </a:extLst>
+            </p:cNvPr>
+            <p:cNvSpPr/>
+            <p:nvPr/>
+          </p:nvSpPr>
+          <p:spPr>
+            <a:xfrm>
+              <a:off x="950949" y="2676116"/>
+              <a:ext cx="1761893" cy="501805"/>
+            </a:xfrm>
+            <a:prstGeom prst="roundRect">
+              <a:avLst/>
+            </a:prstGeom>
+          </p:spPr>
+          <p:style>
+            <a:lnRef idx="2">
+              <a:schemeClr val="accent1"/>
+            </a:lnRef>
+            <a:fillRef idx="1">
+              <a:schemeClr val="lt1"/>
+            </a:fillRef>
+            <a:effectRef idx="0">
+              <a:schemeClr val="accent1"/>
+            </a:effectRef>
+            <a:fontRef idx="minor">
+              <a:schemeClr val="dk1"/>
+            </a:fontRef>
+          </p:style>
+          <p:txBody>
+            <a:bodyPr rtlCol="0" anchor="ctr"/>
+            <a:lstStyle/>
+            <a:p>
+              <a:pPr algn="ctr"/>
+              <a:r>
+                <a:rPr lang="en-IE" noProof="1">
+                  <a:solidFill>
+                    <a:schemeClr val="accent1"/>
+                  </a:solidFill>
+                </a:rPr>
+                <a:t>location</a:t>
+              </a:r>
+            </a:p>
+          </p:txBody>
+        </p:sp>
+      </p:grpSp>
+    </p:spTree>
+    <p:extLst>
+      <p:ext uri="{BB962C8B-B14F-4D97-AF65-F5344CB8AC3E}">
+        <p14:creationId xmlns:p14="http://schemas.microsoft.com/office/powerpoint/2010/main" val="1699489779"/>
+      </p:ext>
+    </p:extLst>
+  </p:cSld>
+  <p:clrMapOvr>
+    <a:masterClrMapping/>
+  </p:clrMapOvr>
+</p:sld>
+</file>
+
+<file path=ppt/slides/slide4.xml><?xml version="1.0" encoding="utf-8"?>
+<p:sld xmlns:a="http://schemas.openxmlformats.org/drawingml/2006/main" xmlns:r="http://schemas.openxmlformats.org/officeDocument/2006/relationships" xmlns:p="http://schemas.openxmlformats.org/presentationml/2006/main">
+  <p:cSld>
+    <p:spTree>
+      <p:nvGrpSpPr>
+        <p:cNvPr id="1" name="">
+          <a:extLst>
+            <a:ext uri="{FF2B5EF4-FFF2-40B4-BE49-F238E27FC236}">
+              <a16:creationId xmlns:a16="http://schemas.microsoft.com/office/drawing/2014/main" id="{D7E3920F-B17B-F871-7C24-BD1E8061F57E}"/>
+            </a:ext>
+          </a:extLst>
+        </p:cNvPr>
+        <p:cNvGrpSpPr/>
+        <p:nvPr/>
+      </p:nvGrpSpPr>
+      <p:grpSpPr>
+        <a:xfrm>
+          <a:off x="0" y="0"/>
+          <a:ext cx="0" cy="0"/>
+          <a:chOff x="0" y="0"/>
+          <a:chExt cx="0" cy="0"/>
+        </a:xfrm>
+      </p:grpSpPr>
+      <p:sp>
+        <p:nvSpPr>
+          <p:cNvPr id="2" name="Title 1">
+            <a:extLst>
+              <a:ext uri="{FF2B5EF4-FFF2-40B4-BE49-F238E27FC236}">
+                <a16:creationId xmlns:a16="http://schemas.microsoft.com/office/drawing/2014/main" id="{EA9DB39C-010A-AB44-64B0-8C0A85974890}"/>
+              </a:ext>
+            </a:extLst>
+          </p:cNvPr>
+          <p:cNvSpPr>
+            <a:spLocks noGrp="1"/>
+          </p:cNvSpPr>
+          <p:nvPr>
+            <p:ph type="title"/>
+          </p:nvPr>
+        </p:nvSpPr>
         <p:spPr/>
         <p:txBody>
           <a:bodyPr/>
           <a:lstStyle/>
           <a:p>
             <a:r>
-              <a:rPr lang="en-US" dirty="0" err="1"/>
-              <a:t>phd</a:t>
+              <a:rPr lang="en-IE" noProof="1"/>
+              <a:t>postdoc</a:t>
             </a:r>
-            <a:r>
-              <a:rPr lang="en-US" dirty="0"/>
-              <a:t> code</a:t>
-            </a:r>
-            <a:endParaRPr lang="en-IE" dirty="0"/>
           </a:p>
         </p:txBody>
       </p:sp>
@@ -3624,7 +6587,7 @@
           <p:cNvPr id="43" name="Group 42">
             <a:extLst>
               <a:ext uri="{FF2B5EF4-FFF2-40B4-BE49-F238E27FC236}">
-                <a16:creationId xmlns:a16="http://schemas.microsoft.com/office/drawing/2014/main" id="{9B48BF3B-A25F-6AD4-7789-AFF2E77D8341}"/>
+                <a16:creationId xmlns:a16="http://schemas.microsoft.com/office/drawing/2014/main" id="{66EBDD1D-9341-158A-1674-6CC696ABD534}"/>
               </a:ext>
             </a:extLst>
           </p:cNvPr>
@@ -3644,7 +6607,7 @@
             <p:cNvPr id="4" name="Rectangle: Rounded Corners 3">
               <a:extLst>
                 <a:ext uri="{FF2B5EF4-FFF2-40B4-BE49-F238E27FC236}">
-                  <a16:creationId xmlns:a16="http://schemas.microsoft.com/office/drawing/2014/main" id="{B1DA4A3E-C7E9-77CB-FFEC-23B8A769C626}"/>
+                  <a16:creationId xmlns:a16="http://schemas.microsoft.com/office/drawing/2014/main" id="{B4C4E948-8F12-7AB9-4522-328A0EE86CB4}"/>
                 </a:ext>
               </a:extLst>
             </p:cNvPr>
@@ -3682,7 +6645,7 @@
             <a:p>
               <a:pPr algn="ctr"/>
               <a:r>
-                <a:rPr lang="en-IE" dirty="0"/>
+                <a:rPr lang="en-IE" noProof="1"/>
                 <a:t>CSP Plant</a:t>
               </a:r>
             </a:p>
@@ -3693,7 +6656,7 @@
             <p:cNvPr id="5" name="Rectangle: Rounded Corners 4">
               <a:extLst>
                 <a:ext uri="{FF2B5EF4-FFF2-40B4-BE49-F238E27FC236}">
-                  <a16:creationId xmlns:a16="http://schemas.microsoft.com/office/drawing/2014/main" id="{47CB1C96-CEA9-458A-31F4-6DFC40FE18CA}"/>
+                  <a16:creationId xmlns:a16="http://schemas.microsoft.com/office/drawing/2014/main" id="{69607E51-5068-09B3-168A-071B48B2FCC3}"/>
                 </a:ext>
               </a:extLst>
             </p:cNvPr>
@@ -3729,7 +6692,7 @@
             <a:p>
               <a:pPr algn="ctr"/>
               <a:r>
-                <a:rPr lang="en-IE" dirty="0">
+                <a:rPr lang="en-IE" noProof="1">
                   <a:solidFill>
                     <a:schemeClr val="accent5"/>
                   </a:solidFill>
@@ -3744,7 +6707,7 @@
             <p:cNvPr id="6" name="Rectangle: Rounded Corners 5">
               <a:extLst>
                 <a:ext uri="{FF2B5EF4-FFF2-40B4-BE49-F238E27FC236}">
-                  <a16:creationId xmlns:a16="http://schemas.microsoft.com/office/drawing/2014/main" id="{150E3438-B061-1B5F-BE2D-2210C0924004}"/>
+                  <a16:creationId xmlns:a16="http://schemas.microsoft.com/office/drawing/2014/main" id="{1FFC234A-D6E1-5FEE-E402-BAF5534B4FB8}"/>
                 </a:ext>
               </a:extLst>
             </p:cNvPr>
@@ -3780,7 +6743,7 @@
             <a:p>
               <a:pPr algn="ctr"/>
               <a:r>
-                <a:rPr lang="en-IE" dirty="0">
+                <a:rPr lang="en-IE" noProof="1">
                   <a:solidFill>
                     <a:schemeClr val="accent2"/>
                   </a:solidFill>
@@ -3795,7 +6758,7 @@
             <p:cNvPr id="7" name="Rectangle: Rounded Corners 6">
               <a:extLst>
                 <a:ext uri="{FF2B5EF4-FFF2-40B4-BE49-F238E27FC236}">
-                  <a16:creationId xmlns:a16="http://schemas.microsoft.com/office/drawing/2014/main" id="{3C5DBDEE-4B43-8536-ABF3-5391AD62B864}"/>
+                  <a16:creationId xmlns:a16="http://schemas.microsoft.com/office/drawing/2014/main" id="{968854D6-C2E5-48E9-A041-D0241DCE87CB}"/>
                 </a:ext>
               </a:extLst>
             </p:cNvPr>
@@ -3831,7 +6794,7 @@
             <a:p>
               <a:pPr algn="ctr"/>
               <a:r>
-                <a:rPr lang="en-IE" dirty="0">
+                <a:rPr lang="en-IE" noProof="1">
                   <a:solidFill>
                     <a:schemeClr val="accent2"/>
                   </a:solidFill>
@@ -3846,7 +6809,7 @@
             <p:cNvPr id="9" name="Rectangle: Rounded Corners 8">
               <a:extLst>
                 <a:ext uri="{FF2B5EF4-FFF2-40B4-BE49-F238E27FC236}">
-                  <a16:creationId xmlns:a16="http://schemas.microsoft.com/office/drawing/2014/main" id="{19BC2A04-C430-6143-D950-A7C0993C8743}"/>
+                  <a16:creationId xmlns:a16="http://schemas.microsoft.com/office/drawing/2014/main" id="{FCDE6FBE-C5E7-123B-A780-7A9F0A9F4FCC}"/>
                 </a:ext>
               </a:extLst>
             </p:cNvPr>
@@ -3882,7 +6845,7 @@
             <a:p>
               <a:pPr algn="ctr"/>
               <a:r>
-                <a:rPr lang="en-IE" dirty="0">
+                <a:rPr lang="en-IE" noProof="1">
                   <a:solidFill>
                     <a:schemeClr val="accent2"/>
                   </a:solidFill>
@@ -3897,7 +6860,7 @@
             <p:cNvPr id="10" name="Rectangle: Rounded Corners 9">
               <a:extLst>
                 <a:ext uri="{FF2B5EF4-FFF2-40B4-BE49-F238E27FC236}">
-                  <a16:creationId xmlns:a16="http://schemas.microsoft.com/office/drawing/2014/main" id="{3FF75557-ADDC-7AA9-6DD9-CCDE1997AE86}"/>
+                  <a16:creationId xmlns:a16="http://schemas.microsoft.com/office/drawing/2014/main" id="{AEA5EE00-1694-47FD-1543-A4618D4E50D2}"/>
                 </a:ext>
               </a:extLst>
             </p:cNvPr>
@@ -3933,7 +6896,7 @@
             <a:p>
               <a:pPr algn="ctr"/>
               <a:r>
-                <a:rPr lang="en-IE" dirty="0">
+                <a:rPr lang="en-IE" noProof="1">
                   <a:solidFill>
                     <a:schemeClr val="accent5"/>
                   </a:solidFill>
@@ -3948,7 +6911,7 @@
             <p:cNvPr id="14" name="Rectangle: Rounded Corners 13">
               <a:extLst>
                 <a:ext uri="{FF2B5EF4-FFF2-40B4-BE49-F238E27FC236}">
-                  <a16:creationId xmlns:a16="http://schemas.microsoft.com/office/drawing/2014/main" id="{9ACEFC5F-A964-5B71-EAD6-97725EB6048C}"/>
+                  <a16:creationId xmlns:a16="http://schemas.microsoft.com/office/drawing/2014/main" id="{E4CC1D8C-2F72-8A8D-D788-D597EFCDCE74}"/>
                 </a:ext>
               </a:extLst>
             </p:cNvPr>
@@ -3984,7 +6947,7 @@
             <a:p>
               <a:pPr algn="ctr"/>
               <a:r>
-                <a:rPr lang="en-IE" dirty="0">
+                <a:rPr lang="en-IE" noProof="1">
                   <a:solidFill>
                     <a:schemeClr val="accent1"/>
                   </a:solidFill>
@@ -3999,7 +6962,7 @@
             <p:cNvPr id="28" name="Rectangle: Rounded Corners 27">
               <a:extLst>
                 <a:ext uri="{FF2B5EF4-FFF2-40B4-BE49-F238E27FC236}">
-                  <a16:creationId xmlns:a16="http://schemas.microsoft.com/office/drawing/2014/main" id="{657F5B9B-5A7B-425E-5D00-F7BE60CDBCF4}"/>
+                  <a16:creationId xmlns:a16="http://schemas.microsoft.com/office/drawing/2014/main" id="{55C53219-38B5-49CD-2F67-022CBC3F81E9}"/>
                 </a:ext>
               </a:extLst>
             </p:cNvPr>
@@ -4035,7 +6998,7 @@
             <a:p>
               <a:pPr algn="ctr"/>
               <a:r>
-                <a:rPr lang="en-IE" dirty="0">
+                <a:rPr lang="en-IE" noProof="1">
                   <a:solidFill>
                     <a:schemeClr val="accent1"/>
                   </a:solidFill>
@@ -4049,7 +7012,7 @@
     </p:spTree>
     <p:extLst>
       <p:ext uri="{BB962C8B-B14F-4D97-AF65-F5344CB8AC3E}">
-        <p14:creationId xmlns:p14="http://schemas.microsoft.com/office/powerpoint/2010/main" val="577795663"/>
+        <p14:creationId xmlns:p14="http://schemas.microsoft.com/office/powerpoint/2010/main" val="2044198678"/>
       </p:ext>
     </p:extLst>
   </p:cSld>
@@ -4059,7 +7022,7 @@
 </p:sld>
 </file>
 
-<file path=ppt/slides/slide3.xml><?xml version="1.0" encoding="utf-8"?>
+<file path=ppt/slides/slide5.xml><?xml version="1.0" encoding="utf-8"?>
 <p:sld xmlns:a="http://schemas.openxmlformats.org/drawingml/2006/main" xmlns:r="http://schemas.openxmlformats.org/officeDocument/2006/relationships" xmlns:p="http://schemas.openxmlformats.org/presentationml/2006/main">
   <p:cSld>
     <p:spTree>
@@ -4098,10 +7061,9 @@
           <a:lstStyle/>
           <a:p>
             <a:r>
-              <a:rPr lang="en-US" dirty="0"/>
+              <a:rPr lang="en-IE" noProof="1"/>
               <a:t>existing module architectures</a:t>
             </a:r>
-            <a:endParaRPr lang="en-IE" dirty="0"/>
           </a:p>
         </p:txBody>
       </p:sp>
@@ -4166,7 +7128,7 @@
             <a:p>
               <a:pPr algn="ctr"/>
               <a:r>
-                <a:rPr lang="en-IE" dirty="0"/>
+                <a:rPr lang="en-IE" noProof="1"/>
                 <a:t>DEWH</a:t>
               </a:r>
             </a:p>
@@ -4213,7 +7175,7 @@
             <a:p>
               <a:pPr algn="ctr"/>
               <a:r>
-                <a:rPr lang="en-IE" dirty="0">
+                <a:rPr lang="en-IE" noProof="1">
                   <a:solidFill>
                     <a:schemeClr val="accent1"/>
                   </a:solidFill>
@@ -4264,7 +7226,7 @@
             <a:p>
               <a:pPr algn="ctr"/>
               <a:r>
-                <a:rPr lang="en-IE" dirty="0">
+                <a:rPr lang="en-IE" noProof="1">
                   <a:solidFill>
                     <a:schemeClr val="accent1"/>
                   </a:solidFill>
@@ -4315,7 +7277,7 @@
             <a:p>
               <a:pPr algn="ctr"/>
               <a:r>
-                <a:rPr lang="en-IE" dirty="0">
+                <a:rPr lang="en-IE" noProof="1">
                   <a:solidFill>
                     <a:schemeClr val="accent2"/>
                   </a:solidFill>
@@ -4366,7 +7328,7 @@
             <a:p>
               <a:pPr algn="ctr"/>
               <a:r>
-                <a:rPr lang="en-IE" dirty="0">
+                <a:rPr lang="en-IE" noProof="1">
                   <a:solidFill>
                     <a:schemeClr val="accent2"/>
                   </a:solidFill>
@@ -4417,18 +7379,13 @@
             <a:p>
               <a:pPr algn="ctr"/>
               <a:r>
-                <a:rPr lang="en-IE" dirty="0" err="1">
+                <a:rPr lang="en-IE" noProof="1">
                   <a:solidFill>
                     <a:schemeClr val="accent2"/>
                   </a:solidFill>
                 </a:rPr>
                 <a:t>PVSystem</a:t>
               </a:r>
-              <a:endParaRPr lang="en-IE" dirty="0">
-                <a:solidFill>
-                  <a:schemeClr val="accent2"/>
-                </a:solidFill>
-              </a:endParaRPr>
             </a:p>
           </p:txBody>
         </p:sp>
@@ -4473,7 +7430,7 @@
             <a:p>
               <a:pPr algn="ctr"/>
               <a:r>
-                <a:rPr lang="en-IE" dirty="0">
+                <a:rPr lang="en-IE" noProof="1">
                   <a:solidFill>
                     <a:schemeClr val="accent5"/>
                   </a:solidFill>
@@ -4524,7 +7481,7 @@
             <a:p>
               <a:pPr algn="ctr"/>
               <a:r>
-                <a:rPr lang="en-IE" dirty="0">
+                <a:rPr lang="en-IE" noProof="1">
                   <a:solidFill>
                     <a:schemeClr val="accent5"/>
                   </a:solidFill>
@@ -4575,7 +7532,7 @@
             <a:p>
               <a:pPr algn="ctr"/>
               <a:r>
-                <a:rPr lang="en-IE" dirty="0">
+                <a:rPr lang="en-IE" noProof="1">
                   <a:solidFill>
                     <a:schemeClr val="accent5"/>
                   </a:solidFill>
@@ -4647,10 +7604,9 @@
             <a:p>
               <a:pPr algn="ctr"/>
               <a:r>
-                <a:rPr lang="en-IE" dirty="0" err="1"/>
+                <a:rPr lang="en-IE" noProof="1"/>
                 <a:t>PlantCSP</a:t>
               </a:r>
-              <a:endParaRPr lang="en-IE" dirty="0"/>
             </a:p>
           </p:txBody>
         </p:sp>
@@ -4695,7 +7651,7 @@
             <a:p>
               <a:pPr algn="ctr"/>
               <a:r>
-                <a:rPr lang="en-IE" dirty="0">
+                <a:rPr lang="en-IE" noProof="1">
                   <a:solidFill>
                     <a:schemeClr val="accent5"/>
                   </a:solidFill>
@@ -4746,7 +7702,7 @@
             <a:p>
               <a:pPr algn="ctr"/>
               <a:r>
-                <a:rPr lang="en-IE" dirty="0">
+                <a:rPr lang="en-IE" noProof="1">
                   <a:solidFill>
                     <a:schemeClr val="accent2"/>
                   </a:solidFill>
@@ -4797,7 +7753,7 @@
             <a:p>
               <a:pPr algn="ctr"/>
               <a:r>
-                <a:rPr lang="en-IE" dirty="0">
+                <a:rPr lang="en-IE" noProof="1">
                   <a:solidFill>
                     <a:schemeClr val="accent2"/>
                   </a:solidFill>
@@ -4848,18 +7804,13 @@
             <a:p>
               <a:pPr algn="ctr"/>
               <a:r>
-                <a:rPr lang="en-IE" dirty="0" err="1">
+                <a:rPr lang="en-IE" noProof="1">
                   <a:solidFill>
                     <a:schemeClr val="accent2"/>
                   </a:solidFill>
                 </a:rPr>
                 <a:t>PowerBlock</a:t>
               </a:r>
-              <a:endParaRPr lang="en-IE" dirty="0">
-                <a:solidFill>
-                  <a:schemeClr val="accent2"/>
-                </a:solidFill>
-              </a:endParaRPr>
             </a:p>
           </p:txBody>
         </p:sp>
@@ -4904,18 +7855,13 @@
             <a:p>
               <a:pPr algn="ctr"/>
               <a:r>
-                <a:rPr lang="en-IE" dirty="0" err="1">
+                <a:rPr lang="en-IE" noProof="1">
                   <a:solidFill>
                     <a:schemeClr val="accent2"/>
                   </a:solidFill>
                 </a:rPr>
                 <a:t>OpticalSystem</a:t>
               </a:r>
-              <a:endParaRPr lang="en-IE" dirty="0">
-                <a:solidFill>
-                  <a:schemeClr val="accent2"/>
-                </a:solidFill>
-              </a:endParaRPr>
             </a:p>
           </p:txBody>
         </p:sp>
@@ -4960,7 +7906,7 @@
             <a:p>
               <a:pPr algn="ctr"/>
               <a:r>
-                <a:rPr lang="en-IE" dirty="0">
+                <a:rPr lang="en-IE" noProof="1">
                   <a:solidFill>
                     <a:schemeClr val="accent5"/>
                   </a:solidFill>
@@ -5011,7 +7957,7 @@
             <a:p>
               <a:pPr algn="ctr"/>
               <a:r>
-                <a:rPr lang="en-IE" dirty="0">
+                <a:rPr lang="en-IE" noProof="1">
                   <a:solidFill>
                     <a:schemeClr val="accent1"/>
                   </a:solidFill>
@@ -5062,709 +8008,12 @@
             <a:p>
               <a:pPr algn="ctr"/>
               <a:r>
-                <a:rPr lang="en-IE" dirty="0">
+                <a:rPr lang="en-IE" noProof="1">
                   <a:solidFill>
                     <a:schemeClr val="accent1"/>
                   </a:solidFill>
                 </a:rPr>
                 <a:t>Location</a:t>
-              </a:r>
-            </a:p>
-          </p:txBody>
-        </p:sp>
-      </p:grpSp>
-      <p:grpSp>
-        <p:nvGrpSpPr>
-          <p:cNvPr id="46" name="Group 45">
-            <a:extLst>
-              <a:ext uri="{FF2B5EF4-FFF2-40B4-BE49-F238E27FC236}">
-                <a16:creationId xmlns:a16="http://schemas.microsoft.com/office/drawing/2014/main" id="{E6ED06A7-32A6-8373-3247-36BA39DD1228}"/>
-              </a:ext>
-            </a:extLst>
-          </p:cNvPr>
-          <p:cNvGrpSpPr/>
-          <p:nvPr/>
-        </p:nvGrpSpPr>
-        <p:grpSpPr>
-          <a:xfrm>
-            <a:off x="6301662" y="1576465"/>
-            <a:ext cx="2732049" cy="4202035"/>
-            <a:chOff x="6301662" y="1576465"/>
-            <a:chExt cx="2732049" cy="4202035"/>
-          </a:xfrm>
-        </p:grpSpPr>
-        <p:sp>
-          <p:nvSpPr>
-            <p:cNvPr id="21" name="Rectangle: Rounded Corners 20">
-              <a:extLst>
-                <a:ext uri="{FF2B5EF4-FFF2-40B4-BE49-F238E27FC236}">
-                  <a16:creationId xmlns:a16="http://schemas.microsoft.com/office/drawing/2014/main" id="{53B0F28A-B4C7-EA7C-0057-AA6FF43E78AF}"/>
-                </a:ext>
-              </a:extLst>
-            </p:cNvPr>
-            <p:cNvSpPr/>
-            <p:nvPr/>
-          </p:nvSpPr>
-          <p:spPr>
-            <a:xfrm>
-              <a:off x="6301662" y="1576465"/>
-              <a:ext cx="2732049" cy="4202035"/>
-            </a:xfrm>
-            <a:prstGeom prst="roundRect">
-              <a:avLst/>
-            </a:prstGeom>
-          </p:spPr>
-          <p:style>
-            <a:lnRef idx="2">
-              <a:schemeClr val="accent1"/>
-            </a:lnRef>
-            <a:fillRef idx="1">
-              <a:schemeClr val="lt1"/>
-            </a:fillRef>
-            <a:effectRef idx="0">
-              <a:schemeClr val="accent1"/>
-            </a:effectRef>
-            <a:fontRef idx="minor">
-              <a:schemeClr val="dk1"/>
-            </a:fontRef>
-          </p:style>
-          <p:txBody>
-            <a:bodyPr rtlCol="0" anchor="t"/>
-            <a:lstStyle/>
-            <a:p>
-              <a:pPr algn="ctr"/>
-              <a:r>
-                <a:rPr lang="en-IE" dirty="0"/>
-                <a:t>MED-Solar</a:t>
-              </a:r>
-            </a:p>
-          </p:txBody>
-        </p:sp>
-        <p:sp>
-          <p:nvSpPr>
-            <p:cNvPr id="30" name="Rectangle: Rounded Corners 29">
-              <a:extLst>
-                <a:ext uri="{FF2B5EF4-FFF2-40B4-BE49-F238E27FC236}">
-                  <a16:creationId xmlns:a16="http://schemas.microsoft.com/office/drawing/2014/main" id="{EC4F3EA9-8516-5629-5E5E-EE4ED9D0183C}"/>
-                </a:ext>
-              </a:extLst>
-            </p:cNvPr>
-            <p:cNvSpPr/>
-            <p:nvPr/>
-          </p:nvSpPr>
-          <p:spPr>
-            <a:xfrm>
-              <a:off x="6789849" y="2126670"/>
-              <a:ext cx="1761893" cy="501805"/>
-            </a:xfrm>
-            <a:prstGeom prst="roundRect">
-              <a:avLst/>
-            </a:prstGeom>
-          </p:spPr>
-          <p:style>
-            <a:lnRef idx="2">
-              <a:schemeClr val="accent1"/>
-            </a:lnRef>
-            <a:fillRef idx="1">
-              <a:schemeClr val="lt1"/>
-            </a:fillRef>
-            <a:effectRef idx="0">
-              <a:schemeClr val="accent1"/>
-            </a:effectRef>
-            <a:fontRef idx="minor">
-              <a:schemeClr val="dk1"/>
-            </a:fontRef>
-          </p:style>
-          <p:txBody>
-            <a:bodyPr rtlCol="0" anchor="ctr"/>
-            <a:lstStyle/>
-            <a:p>
-              <a:pPr algn="ctr"/>
-              <a:r>
-                <a:rPr lang="en-IE" dirty="0">
-                  <a:solidFill>
-                    <a:schemeClr val="accent1"/>
-                  </a:solidFill>
-                </a:rPr>
-                <a:t>Settings</a:t>
-              </a:r>
-            </a:p>
-          </p:txBody>
-        </p:sp>
-        <p:sp>
-          <p:nvSpPr>
-            <p:cNvPr id="31" name="Rectangle: Rounded Corners 30">
-              <a:extLst>
-                <a:ext uri="{FF2B5EF4-FFF2-40B4-BE49-F238E27FC236}">
-                  <a16:creationId xmlns:a16="http://schemas.microsoft.com/office/drawing/2014/main" id="{D19A5861-F1FC-C19F-A36F-57668C224537}"/>
-                </a:ext>
-              </a:extLst>
-            </p:cNvPr>
-            <p:cNvSpPr/>
-            <p:nvPr/>
-          </p:nvSpPr>
-          <p:spPr>
-            <a:xfrm>
-              <a:off x="6789844" y="2714909"/>
-              <a:ext cx="1761893" cy="501805"/>
-            </a:xfrm>
-            <a:prstGeom prst="roundRect">
-              <a:avLst/>
-            </a:prstGeom>
-          </p:spPr>
-          <p:style>
-            <a:lnRef idx="2">
-              <a:schemeClr val="accent1"/>
-            </a:lnRef>
-            <a:fillRef idx="1">
-              <a:schemeClr val="lt1"/>
-            </a:fillRef>
-            <a:effectRef idx="0">
-              <a:schemeClr val="accent1"/>
-            </a:effectRef>
-            <a:fontRef idx="minor">
-              <a:schemeClr val="dk1"/>
-            </a:fontRef>
-          </p:style>
-          <p:txBody>
-            <a:bodyPr rtlCol="0" anchor="ctr"/>
-            <a:lstStyle/>
-            <a:p>
-              <a:pPr algn="ctr"/>
-              <a:r>
-                <a:rPr lang="en-IE" dirty="0">
-                  <a:solidFill>
-                    <a:schemeClr val="accent1"/>
-                  </a:solidFill>
-                </a:rPr>
-                <a:t>Location</a:t>
-              </a:r>
-            </a:p>
-          </p:txBody>
-        </p:sp>
-        <p:sp>
-          <p:nvSpPr>
-            <p:cNvPr id="32" name="Rectangle: Rounded Corners 31">
-              <a:extLst>
-                <a:ext uri="{FF2B5EF4-FFF2-40B4-BE49-F238E27FC236}">
-                  <a16:creationId xmlns:a16="http://schemas.microsoft.com/office/drawing/2014/main" id="{006246F9-993D-0B9A-3C6E-E0CFF21C520F}"/>
-                </a:ext>
-              </a:extLst>
-            </p:cNvPr>
-            <p:cNvSpPr/>
-            <p:nvPr/>
-          </p:nvSpPr>
-          <p:spPr>
-            <a:xfrm>
-              <a:off x="6786739" y="3868743"/>
-              <a:ext cx="1761893" cy="501805"/>
-            </a:xfrm>
-            <a:prstGeom prst="roundRect">
-              <a:avLst/>
-            </a:prstGeom>
-          </p:spPr>
-          <p:style>
-            <a:lnRef idx="2">
-              <a:schemeClr val="accent2"/>
-            </a:lnRef>
-            <a:fillRef idx="1">
-              <a:schemeClr val="lt1"/>
-            </a:fillRef>
-            <a:effectRef idx="0">
-              <a:schemeClr val="accent2"/>
-            </a:effectRef>
-            <a:fontRef idx="minor">
-              <a:schemeClr val="dk1"/>
-            </a:fontRef>
-          </p:style>
-          <p:txBody>
-            <a:bodyPr rtlCol="0" anchor="ctr"/>
-            <a:lstStyle/>
-            <a:p>
-              <a:pPr algn="ctr"/>
-              <a:r>
-                <a:rPr lang="en-IE" dirty="0">
-                  <a:solidFill>
-                    <a:schemeClr val="accent2"/>
-                  </a:solidFill>
-                </a:rPr>
-                <a:t>PTC</a:t>
-              </a:r>
-            </a:p>
-          </p:txBody>
-        </p:sp>
-        <p:sp>
-          <p:nvSpPr>
-            <p:cNvPr id="33" name="Rectangle: Rounded Corners 32">
-              <a:extLst>
-                <a:ext uri="{FF2B5EF4-FFF2-40B4-BE49-F238E27FC236}">
-                  <a16:creationId xmlns:a16="http://schemas.microsoft.com/office/drawing/2014/main" id="{9BFB76D7-B9BD-176A-487F-FD77F7C77165}"/>
-                </a:ext>
-              </a:extLst>
-            </p:cNvPr>
-            <p:cNvSpPr/>
-            <p:nvPr/>
-          </p:nvSpPr>
-          <p:spPr>
-            <a:xfrm>
-              <a:off x="6786739" y="4481727"/>
-              <a:ext cx="1761893" cy="501805"/>
-            </a:xfrm>
-            <a:prstGeom prst="roundRect">
-              <a:avLst/>
-            </a:prstGeom>
-          </p:spPr>
-          <p:style>
-            <a:lnRef idx="2">
-              <a:schemeClr val="accent2"/>
-            </a:lnRef>
-            <a:fillRef idx="1">
-              <a:schemeClr val="lt1"/>
-            </a:fillRef>
-            <a:effectRef idx="0">
-              <a:schemeClr val="accent2"/>
-            </a:effectRef>
-            <a:fontRef idx="minor">
-              <a:schemeClr val="dk1"/>
-            </a:fontRef>
-          </p:style>
-          <p:txBody>
-            <a:bodyPr rtlCol="0" anchor="ctr"/>
-            <a:lstStyle/>
-            <a:p>
-              <a:pPr algn="ctr"/>
-              <a:r>
-                <a:rPr lang="en-IE" dirty="0">
-                  <a:solidFill>
-                    <a:schemeClr val="accent2"/>
-                  </a:solidFill>
-                </a:rPr>
-                <a:t>MED</a:t>
-              </a:r>
-            </a:p>
-          </p:txBody>
-        </p:sp>
-        <p:sp>
-          <p:nvSpPr>
-            <p:cNvPr id="34" name="Rectangle: Rounded Corners 33">
-              <a:extLst>
-                <a:ext uri="{FF2B5EF4-FFF2-40B4-BE49-F238E27FC236}">
-                  <a16:creationId xmlns:a16="http://schemas.microsoft.com/office/drawing/2014/main" id="{2C3B487D-7B4E-4BC5-7F4D-F242125B5150}"/>
-                </a:ext>
-              </a:extLst>
-            </p:cNvPr>
-            <p:cNvSpPr/>
-            <p:nvPr/>
-          </p:nvSpPr>
-          <p:spPr>
-            <a:xfrm>
-              <a:off x="6786738" y="5074241"/>
-              <a:ext cx="1761894" cy="501805"/>
-            </a:xfrm>
-            <a:prstGeom prst="roundRect">
-              <a:avLst/>
-            </a:prstGeom>
-          </p:spPr>
-          <p:style>
-            <a:lnRef idx="2">
-              <a:schemeClr val="accent5"/>
-            </a:lnRef>
-            <a:fillRef idx="1">
-              <a:schemeClr val="lt1"/>
-            </a:fillRef>
-            <a:effectRef idx="0">
-              <a:schemeClr val="accent5"/>
-            </a:effectRef>
-            <a:fontRef idx="minor">
-              <a:schemeClr val="dk1"/>
-            </a:fontRef>
-          </p:style>
-          <p:txBody>
-            <a:bodyPr rtlCol="0" anchor="ctr"/>
-            <a:lstStyle/>
-            <a:p>
-              <a:pPr algn="ctr"/>
-              <a:r>
-                <a:rPr lang="en-IE" dirty="0">
-                  <a:solidFill>
-                    <a:schemeClr val="accent5"/>
-                  </a:solidFill>
-                </a:rPr>
-                <a:t>Market</a:t>
-              </a:r>
-            </a:p>
-          </p:txBody>
-        </p:sp>
-        <p:sp>
-          <p:nvSpPr>
-            <p:cNvPr id="35" name="Rectangle: Rounded Corners 34">
-              <a:extLst>
-                <a:ext uri="{FF2B5EF4-FFF2-40B4-BE49-F238E27FC236}">
-                  <a16:creationId xmlns:a16="http://schemas.microsoft.com/office/drawing/2014/main" id="{BC462F86-B144-2AB9-2267-7FFE18EC71C0}"/>
-                </a:ext>
-              </a:extLst>
-            </p:cNvPr>
-            <p:cNvSpPr/>
-            <p:nvPr/>
-          </p:nvSpPr>
-          <p:spPr>
-            <a:xfrm>
-              <a:off x="6789843" y="3280504"/>
-              <a:ext cx="1761893" cy="501805"/>
-            </a:xfrm>
-            <a:prstGeom prst="roundRect">
-              <a:avLst/>
-            </a:prstGeom>
-          </p:spPr>
-          <p:style>
-            <a:lnRef idx="2">
-              <a:schemeClr val="accent5"/>
-            </a:lnRef>
-            <a:fillRef idx="1">
-              <a:schemeClr val="lt1"/>
-            </a:fillRef>
-            <a:effectRef idx="0">
-              <a:schemeClr val="accent5"/>
-            </a:effectRef>
-            <a:fontRef idx="minor">
-              <a:schemeClr val="dk1"/>
-            </a:fontRef>
-          </p:style>
-          <p:txBody>
-            <a:bodyPr rtlCol="0" anchor="ctr"/>
-            <a:lstStyle/>
-            <a:p>
-              <a:pPr algn="ctr"/>
-              <a:r>
-                <a:rPr lang="en-IE" dirty="0">
-                  <a:solidFill>
-                    <a:schemeClr val="accent5"/>
-                  </a:solidFill>
-                </a:rPr>
-                <a:t>Weather</a:t>
-              </a:r>
-            </a:p>
-          </p:txBody>
-        </p:sp>
-      </p:grpSp>
-      <p:grpSp>
-        <p:nvGrpSpPr>
-          <p:cNvPr id="47" name="Group 46">
-            <a:extLst>
-              <a:ext uri="{FF2B5EF4-FFF2-40B4-BE49-F238E27FC236}">
-                <a16:creationId xmlns:a16="http://schemas.microsoft.com/office/drawing/2014/main" id="{1937D759-E297-45D5-A433-8D5CB3DFBB5C}"/>
-              </a:ext>
-            </a:extLst>
-          </p:cNvPr>
-          <p:cNvGrpSpPr/>
-          <p:nvPr/>
-        </p:nvGrpSpPr>
-        <p:grpSpPr>
-          <a:xfrm>
-            <a:off x="9336962" y="1576465"/>
-            <a:ext cx="2732049" cy="4202035"/>
-            <a:chOff x="9336962" y="1576465"/>
-            <a:chExt cx="2732049" cy="4202035"/>
-          </a:xfrm>
-        </p:grpSpPr>
-        <p:sp>
-          <p:nvSpPr>
-            <p:cNvPr id="36" name="Rectangle: Rounded Corners 35">
-              <a:extLst>
-                <a:ext uri="{FF2B5EF4-FFF2-40B4-BE49-F238E27FC236}">
-                  <a16:creationId xmlns:a16="http://schemas.microsoft.com/office/drawing/2014/main" id="{3FFFFB88-F2EB-57A1-E43C-77240FF7E545}"/>
-                </a:ext>
-              </a:extLst>
-            </p:cNvPr>
-            <p:cNvSpPr/>
-            <p:nvPr/>
-          </p:nvSpPr>
-          <p:spPr>
-            <a:xfrm>
-              <a:off x="9336962" y="1576465"/>
-              <a:ext cx="2732049" cy="4202035"/>
-            </a:xfrm>
-            <a:prstGeom prst="roundRect">
-              <a:avLst/>
-            </a:prstGeom>
-          </p:spPr>
-          <p:style>
-            <a:lnRef idx="2">
-              <a:schemeClr val="accent1"/>
-            </a:lnRef>
-            <a:fillRef idx="1">
-              <a:schemeClr val="lt1"/>
-            </a:fillRef>
-            <a:effectRef idx="0">
-              <a:schemeClr val="accent1"/>
-            </a:effectRef>
-            <a:fontRef idx="minor">
-              <a:schemeClr val="dk1"/>
-            </a:fontRef>
-          </p:style>
-          <p:txBody>
-            <a:bodyPr rtlCol="0" anchor="t"/>
-            <a:lstStyle/>
-            <a:p>
-              <a:pPr algn="ctr"/>
-              <a:r>
-                <a:rPr lang="en-IE" dirty="0"/>
-                <a:t>CAES</a:t>
-              </a:r>
-            </a:p>
-          </p:txBody>
-        </p:sp>
-        <p:sp>
-          <p:nvSpPr>
-            <p:cNvPr id="37" name="Rectangle: Rounded Corners 36">
-              <a:extLst>
-                <a:ext uri="{FF2B5EF4-FFF2-40B4-BE49-F238E27FC236}">
-                  <a16:creationId xmlns:a16="http://schemas.microsoft.com/office/drawing/2014/main" id="{B075F9B0-89F4-4B63-5E23-B7F04CF45FD0}"/>
-                </a:ext>
-              </a:extLst>
-            </p:cNvPr>
-            <p:cNvSpPr/>
-            <p:nvPr/>
-          </p:nvSpPr>
-          <p:spPr>
-            <a:xfrm>
-              <a:off x="9825149" y="2126670"/>
-              <a:ext cx="1761893" cy="501805"/>
-            </a:xfrm>
-            <a:prstGeom prst="roundRect">
-              <a:avLst/>
-            </a:prstGeom>
-          </p:spPr>
-          <p:style>
-            <a:lnRef idx="2">
-              <a:schemeClr val="accent1"/>
-            </a:lnRef>
-            <a:fillRef idx="1">
-              <a:schemeClr val="lt1"/>
-            </a:fillRef>
-            <a:effectRef idx="0">
-              <a:schemeClr val="accent1"/>
-            </a:effectRef>
-            <a:fontRef idx="minor">
-              <a:schemeClr val="dk1"/>
-            </a:fontRef>
-          </p:style>
-          <p:txBody>
-            <a:bodyPr rtlCol="0" anchor="ctr"/>
-            <a:lstStyle/>
-            <a:p>
-              <a:pPr algn="ctr"/>
-              <a:r>
-                <a:rPr lang="en-IE" dirty="0">
-                  <a:solidFill>
-                    <a:schemeClr val="accent1"/>
-                  </a:solidFill>
-                </a:rPr>
-                <a:t>Settings</a:t>
-              </a:r>
-            </a:p>
-          </p:txBody>
-        </p:sp>
-        <p:sp>
-          <p:nvSpPr>
-            <p:cNvPr id="38" name="Rectangle: Rounded Corners 37">
-              <a:extLst>
-                <a:ext uri="{FF2B5EF4-FFF2-40B4-BE49-F238E27FC236}">
-                  <a16:creationId xmlns:a16="http://schemas.microsoft.com/office/drawing/2014/main" id="{71476E60-46A5-8351-70E9-0F31E36DB2E6}"/>
-                </a:ext>
-              </a:extLst>
-            </p:cNvPr>
-            <p:cNvSpPr/>
-            <p:nvPr/>
-          </p:nvSpPr>
-          <p:spPr>
-            <a:xfrm>
-              <a:off x="9825144" y="2714909"/>
-              <a:ext cx="1761893" cy="501805"/>
-            </a:xfrm>
-            <a:prstGeom prst="roundRect">
-              <a:avLst/>
-            </a:prstGeom>
-          </p:spPr>
-          <p:style>
-            <a:lnRef idx="2">
-              <a:schemeClr val="accent1"/>
-            </a:lnRef>
-            <a:fillRef idx="1">
-              <a:schemeClr val="lt1"/>
-            </a:fillRef>
-            <a:effectRef idx="0">
-              <a:schemeClr val="accent1"/>
-            </a:effectRef>
-            <a:fontRef idx="minor">
-              <a:schemeClr val="dk1"/>
-            </a:fontRef>
-          </p:style>
-          <p:txBody>
-            <a:bodyPr rtlCol="0" anchor="ctr"/>
-            <a:lstStyle/>
-            <a:p>
-              <a:pPr algn="ctr"/>
-              <a:r>
-                <a:rPr lang="en-IE" dirty="0">
-                  <a:solidFill>
-                    <a:schemeClr val="accent1"/>
-                  </a:solidFill>
-                </a:rPr>
-                <a:t>Location</a:t>
-              </a:r>
-            </a:p>
-          </p:txBody>
-        </p:sp>
-        <p:sp>
-          <p:nvSpPr>
-            <p:cNvPr id="39" name="Rectangle: Rounded Corners 38">
-              <a:extLst>
-                <a:ext uri="{FF2B5EF4-FFF2-40B4-BE49-F238E27FC236}">
-                  <a16:creationId xmlns:a16="http://schemas.microsoft.com/office/drawing/2014/main" id="{5D6D9959-0FCF-D180-BE28-37D2B56F61C5}"/>
-                </a:ext>
-              </a:extLst>
-            </p:cNvPr>
-            <p:cNvSpPr/>
-            <p:nvPr/>
-          </p:nvSpPr>
-          <p:spPr>
-            <a:xfrm>
-              <a:off x="9822039" y="3868743"/>
-              <a:ext cx="1761893" cy="501805"/>
-            </a:xfrm>
-            <a:prstGeom prst="roundRect">
-              <a:avLst/>
-            </a:prstGeom>
-          </p:spPr>
-          <p:style>
-            <a:lnRef idx="2">
-              <a:schemeClr val="accent2"/>
-            </a:lnRef>
-            <a:fillRef idx="1">
-              <a:schemeClr val="lt1"/>
-            </a:fillRef>
-            <a:effectRef idx="0">
-              <a:schemeClr val="accent2"/>
-            </a:effectRef>
-            <a:fontRef idx="minor">
-              <a:schemeClr val="dk1"/>
-            </a:fontRef>
-          </p:style>
-          <p:txBody>
-            <a:bodyPr rtlCol="0" anchor="ctr"/>
-            <a:lstStyle/>
-            <a:p>
-              <a:pPr algn="ctr"/>
-              <a:r>
-                <a:rPr lang="en-IE" dirty="0">
-                  <a:solidFill>
-                    <a:schemeClr val="accent2"/>
-                  </a:solidFill>
-                </a:rPr>
-                <a:t>CAES</a:t>
-              </a:r>
-            </a:p>
-          </p:txBody>
-        </p:sp>
-        <p:sp>
-          <p:nvSpPr>
-            <p:cNvPr id="41" name="Rectangle: Rounded Corners 40">
-              <a:extLst>
-                <a:ext uri="{FF2B5EF4-FFF2-40B4-BE49-F238E27FC236}">
-                  <a16:creationId xmlns:a16="http://schemas.microsoft.com/office/drawing/2014/main" id="{8F74EA40-F44E-2E38-9FBB-4D1D6F8BAE50}"/>
-                </a:ext>
-              </a:extLst>
-            </p:cNvPr>
-            <p:cNvSpPr/>
-            <p:nvPr/>
-          </p:nvSpPr>
-          <p:spPr>
-            <a:xfrm>
-              <a:off x="9822039" y="4466477"/>
-              <a:ext cx="1761894" cy="501805"/>
-            </a:xfrm>
-            <a:prstGeom prst="roundRect">
-              <a:avLst/>
-            </a:prstGeom>
-          </p:spPr>
-          <p:style>
-            <a:lnRef idx="2">
-              <a:schemeClr val="accent5"/>
-            </a:lnRef>
-            <a:fillRef idx="1">
-              <a:schemeClr val="lt1"/>
-            </a:fillRef>
-            <a:effectRef idx="0">
-              <a:schemeClr val="accent5"/>
-            </a:effectRef>
-            <a:fontRef idx="minor">
-              <a:schemeClr val="dk1"/>
-            </a:fontRef>
-          </p:style>
-          <p:txBody>
-            <a:bodyPr rtlCol="0" anchor="ctr"/>
-            <a:lstStyle/>
-            <a:p>
-              <a:pPr algn="ctr"/>
-              <a:r>
-                <a:rPr lang="en-IE" dirty="0">
-                  <a:solidFill>
-                    <a:schemeClr val="accent5"/>
-                  </a:solidFill>
-                </a:rPr>
-                <a:t>Market</a:t>
-              </a:r>
-            </a:p>
-          </p:txBody>
-        </p:sp>
-        <p:sp>
-          <p:nvSpPr>
-            <p:cNvPr id="42" name="Rectangle: Rounded Corners 41">
-              <a:extLst>
-                <a:ext uri="{FF2B5EF4-FFF2-40B4-BE49-F238E27FC236}">
-                  <a16:creationId xmlns:a16="http://schemas.microsoft.com/office/drawing/2014/main" id="{C540D844-2E26-5EBA-07CF-B0D198E37699}"/>
-                </a:ext>
-              </a:extLst>
-            </p:cNvPr>
-            <p:cNvSpPr/>
-            <p:nvPr/>
-          </p:nvSpPr>
-          <p:spPr>
-            <a:xfrm>
-              <a:off x="9825143" y="3280504"/>
-              <a:ext cx="1761893" cy="501805"/>
-            </a:xfrm>
-            <a:prstGeom prst="roundRect">
-              <a:avLst/>
-            </a:prstGeom>
-          </p:spPr>
-          <p:style>
-            <a:lnRef idx="2">
-              <a:schemeClr val="accent5"/>
-            </a:lnRef>
-            <a:fillRef idx="1">
-              <a:schemeClr val="lt1"/>
-            </a:fillRef>
-            <a:effectRef idx="0">
-              <a:schemeClr val="accent5"/>
-            </a:effectRef>
-            <a:fontRef idx="minor">
-              <a:schemeClr val="dk1"/>
-            </a:fontRef>
-          </p:style>
-          <p:txBody>
-            <a:bodyPr rtlCol="0" anchor="ctr"/>
-            <a:lstStyle/>
-            <a:p>
-              <a:pPr algn="ctr"/>
-              <a:r>
-                <a:rPr lang="en-IE" dirty="0">
-                  <a:solidFill>
-                    <a:schemeClr val="accent5"/>
-                  </a:solidFill>
-                </a:rPr>
-                <a:t>Weather</a:t>
               </a:r>
             </a:p>
           </p:txBody>
@@ -5783,7 +8032,7 @@
 </p:sld>
 </file>
 
-<file path=ppt/slides/slide4.xml><?xml version="1.0" encoding="utf-8"?>
+<file path=ppt/slides/slide6.xml><?xml version="1.0" encoding="utf-8"?>
 <p:sld xmlns:a="http://schemas.openxmlformats.org/drawingml/2006/main" xmlns:r="http://schemas.openxmlformats.org/officeDocument/2006/relationships" xmlns:p="http://schemas.openxmlformats.org/presentationml/2006/main">
   <p:cSld>
     <p:spTree>
@@ -5849,7 +8098,7 @@
           <a:p>
             <a:pPr algn="ctr"/>
             <a:r>
-              <a:rPr lang="en-IE" dirty="0"/>
+              <a:rPr lang="en-IE" noProof="1"/>
               <a:t>Process</a:t>
             </a:r>
           </a:p>
@@ -5898,7 +8147,7 @@
           <a:p>
             <a:pPr algn="ctr"/>
             <a:r>
-              <a:rPr lang="en-IE" dirty="0">
+              <a:rPr lang="en-IE" noProof="1">
                 <a:solidFill>
                   <a:schemeClr val="accent1"/>
                 </a:solidFill>
@@ -5930,14 +8179,9 @@
           <a:lstStyle/>
           <a:p>
             <a:r>
-              <a:rPr lang="en-US" dirty="0"/>
-              <a:t>module architectures example: </a:t>
+              <a:rPr lang="en-IE" noProof="1"/>
+              <a:t>module architectures example: csp</a:t>
             </a:r>
-            <a:r>
-              <a:rPr lang="en-US" dirty="0" err="1"/>
-              <a:t>csp</a:t>
-            </a:r>
-            <a:endParaRPr lang="en-IE" dirty="0"/>
           </a:p>
         </p:txBody>
       </p:sp>
@@ -6002,10 +8246,9 @@
             <a:p>
               <a:pPr algn="ctr"/>
               <a:r>
-                <a:rPr lang="en-IE" dirty="0" err="1"/>
+                <a:rPr lang="en-IE" noProof="1"/>
                 <a:t>PlantCSP</a:t>
               </a:r>
-              <a:endParaRPr lang="en-IE" dirty="0"/>
             </a:p>
           </p:txBody>
         </p:sp>
@@ -6050,7 +8293,7 @@
             <a:p>
               <a:pPr algn="ctr"/>
               <a:r>
-                <a:rPr lang="en-IE" dirty="0">
+                <a:rPr lang="en-IE" noProof="1">
                   <a:solidFill>
                     <a:schemeClr val="accent5"/>
                   </a:solidFill>
@@ -6101,7 +8344,7 @@
             <a:p>
               <a:pPr algn="ctr"/>
               <a:r>
-                <a:rPr lang="en-IE" dirty="0">
+                <a:rPr lang="en-IE" noProof="1">
                   <a:solidFill>
                     <a:schemeClr val="accent2"/>
                   </a:solidFill>
@@ -6152,7 +8395,7 @@
             <a:p>
               <a:pPr algn="ctr"/>
               <a:r>
-                <a:rPr lang="en-IE" dirty="0">
+                <a:rPr lang="en-IE" noProof="1">
                   <a:solidFill>
                     <a:schemeClr val="accent2"/>
                   </a:solidFill>
@@ -6203,18 +8446,13 @@
             <a:p>
               <a:pPr algn="ctr"/>
               <a:r>
-                <a:rPr lang="en-IE" dirty="0" err="1">
+                <a:rPr lang="en-IE" noProof="1">
                   <a:solidFill>
                     <a:schemeClr val="accent2"/>
                   </a:solidFill>
                 </a:rPr>
                 <a:t>PowerBlock</a:t>
               </a:r>
-              <a:endParaRPr lang="en-IE" dirty="0">
-                <a:solidFill>
-                  <a:schemeClr val="accent2"/>
-                </a:solidFill>
-              </a:endParaRPr>
             </a:p>
           </p:txBody>
         </p:sp>
@@ -6259,18 +8497,13 @@
             <a:p>
               <a:pPr algn="ctr"/>
               <a:r>
-                <a:rPr lang="en-IE" dirty="0" err="1">
+                <a:rPr lang="en-IE" noProof="1">
                   <a:solidFill>
                     <a:schemeClr val="accent2"/>
                   </a:solidFill>
                 </a:rPr>
                 <a:t>OpticalSystem</a:t>
               </a:r>
-              <a:endParaRPr lang="en-IE" dirty="0">
-                <a:solidFill>
-                  <a:schemeClr val="accent2"/>
-                </a:solidFill>
-              </a:endParaRPr>
             </a:p>
           </p:txBody>
         </p:sp>
@@ -6315,7 +8548,7 @@
             <a:p>
               <a:pPr algn="ctr"/>
               <a:r>
-                <a:rPr lang="en-IE" dirty="0">
+                <a:rPr lang="en-IE" noProof="1">
                   <a:solidFill>
                     <a:schemeClr val="accent5"/>
                   </a:solidFill>
@@ -6366,7 +8599,7 @@
             <a:p>
               <a:pPr algn="ctr"/>
               <a:r>
-                <a:rPr lang="en-IE" dirty="0">
+                <a:rPr lang="en-IE" noProof="1">
                   <a:solidFill>
                     <a:schemeClr val="accent1"/>
                   </a:solidFill>
@@ -6417,7 +8650,7 @@
             <a:p>
               <a:pPr algn="ctr"/>
               <a:r>
-                <a:rPr lang="en-IE" dirty="0">
+                <a:rPr lang="en-IE" noProof="1">
                   <a:solidFill>
                     <a:schemeClr val="accent1"/>
                   </a:solidFill>
@@ -6471,7 +8704,7 @@
           <a:p>
             <a:pPr algn="ctr"/>
             <a:r>
-              <a:rPr lang="en-IE" dirty="0">
+              <a:rPr lang="en-IE" noProof="1">
                 <a:solidFill>
                   <a:schemeClr val="accent1"/>
                 </a:solidFill>
@@ -6524,7 +8757,7 @@
           <a:p>
             <a:pPr algn="ctr"/>
             <a:r>
-              <a:rPr lang="en-IE" dirty="0">
+              <a:rPr lang="en-IE" noProof="1">
                 <a:solidFill>
                   <a:schemeClr val="accent1"/>
                 </a:solidFill>
@@ -6535,28 +8768,12 @@
           <a:p>
             <a:pPr algn="ctr"/>
             <a:r>
-              <a:rPr lang="en-IE" dirty="0">
+              <a:rPr lang="en-IE" noProof="1">
                 <a:solidFill>
                   <a:schemeClr val="accent1"/>
                 </a:solidFill>
               </a:rPr>
-              <a:t>(</a:t>
-            </a:r>
-            <a:r>
-              <a:rPr lang="en-IE" dirty="0" err="1">
-                <a:solidFill>
-                  <a:schemeClr val="accent1"/>
-                </a:solidFill>
-              </a:rPr>
-              <a:t>MonteCarlo</a:t>
-            </a:r>
-            <a:r>
-              <a:rPr lang="en-IE" dirty="0">
-                <a:solidFill>
-                  <a:schemeClr val="accent1"/>
-                </a:solidFill>
-              </a:rPr>
-              <a:t> Simulation)</a:t>
+              <a:t>(MonteCarlo Simulation)</a:t>
             </a:r>
           </a:p>
         </p:txBody>
@@ -6624,7 +8841,7 @@
             <a:p>
               <a:pPr algn="ctr"/>
               <a:r>
-                <a:rPr lang="en-IE" dirty="0">
+                <a:rPr lang="en-IE" noProof="1">
                   <a:solidFill>
                     <a:schemeClr val="accent1"/>
                   </a:solidFill>
@@ -6675,22 +8892,17 @@
             <a:p>
               <a:pPr algn="ctr"/>
               <a:r>
-                <a:rPr lang="en-IE" b="0" dirty="0" err="1">
+                <a:rPr lang="en-IE" b="0" noProof="1">
                   <a:solidFill>
                     <a:schemeClr val="accent1"/>
                   </a:solidFill>
                 </a:rPr>
                 <a:t>mcrt</a:t>
               </a:r>
-              <a:endParaRPr lang="en-IE" b="0" dirty="0">
-                <a:solidFill>
-                  <a:schemeClr val="accent1"/>
-                </a:solidFill>
-              </a:endParaRPr>
             </a:p>
             <a:p>
               <a:pPr algn="ctr"/>
-              <a:endParaRPr lang="en-IE" dirty="0">
+              <a:endParaRPr lang="en-IE" noProof="1">
                 <a:solidFill>
                   <a:schemeClr val="accent1"/>
                 </a:solidFill>
@@ -6739,7 +8951,7 @@
             <a:p>
               <a:pPr algn="ctr"/>
               <a:r>
-                <a:rPr lang="en-IE" b="0" dirty="0">
+                <a:rPr lang="en-IE" b="0" noProof="1">
                   <a:solidFill>
                     <a:schemeClr val="accent1"/>
                   </a:solidFill>
@@ -6749,7 +8961,7 @@
             </a:p>
             <a:p>
               <a:pPr algn="ctr"/>
-              <a:endParaRPr lang="en-IE" dirty="0">
+              <a:endParaRPr lang="en-IE" noProof="1">
                 <a:solidFill>
                   <a:schemeClr val="accent1"/>
                 </a:solidFill>
@@ -6798,7 +9010,7 @@
             <a:p>
               <a:pPr algn="ctr"/>
               <a:r>
-                <a:rPr lang="en-IE" b="0" dirty="0">
+                <a:rPr lang="en-IE" b="0" noProof="1">
                   <a:solidFill>
                     <a:schemeClr val="accent1"/>
                   </a:solidFill>
@@ -6808,7 +9020,7 @@
             </a:p>
             <a:p>
               <a:pPr algn="ctr"/>
-              <a:endParaRPr lang="en-IE" dirty="0">
+              <a:endParaRPr lang="en-IE" noProof="1">
                 <a:solidFill>
                   <a:schemeClr val="accent1"/>
                 </a:solidFill>
@@ -6857,14 +9069,14 @@
             <a:p>
               <a:pPr algn="ctr"/>
               <a:r>
-                <a:rPr lang="en-IE" sz="1400" b="0" dirty="0" err="1">
+                <a:rPr lang="en-IE" sz="1400" b="0" noProof="1">
                   <a:solidFill>
                     <a:schemeClr val="accent1"/>
                   </a:solidFill>
                 </a:rPr>
                 <a:t>dispatch_optim</a:t>
               </a:r>
-              <a:endParaRPr lang="en-IE" b="0" dirty="0">
+              <a:endParaRPr lang="en-IE" b="0" noProof="1">
                 <a:solidFill>
                   <a:schemeClr val="accent1"/>
                 </a:solidFill>
@@ -6872,7 +9084,7 @@
             </a:p>
             <a:p>
               <a:pPr algn="ctr"/>
-              <a:endParaRPr lang="en-IE" dirty="0">
+              <a:endParaRPr lang="en-IE" noProof="1">
                 <a:solidFill>
                   <a:schemeClr val="accent1"/>
                 </a:solidFill>
@@ -6922,7 +9134,7 @@
           <a:p>
             <a:pPr algn="ctr"/>
             <a:r>
-              <a:rPr lang="en-IE" sz="1200" dirty="0">
+              <a:rPr lang="en-IE" sz="1200" noProof="1">
                 <a:solidFill>
                   <a:schemeClr val="accent1"/>
                 </a:solidFill>
@@ -6933,7 +9145,7 @@
           <a:p>
             <a:pPr algn="ctr"/>
             <a:r>
-              <a:rPr lang="en-IE" sz="1200" dirty="0">
+              <a:rPr lang="en-IE" sz="1200" noProof="1">
                 <a:solidFill>
                   <a:schemeClr val="accent1"/>
                 </a:solidFill>
@@ -6984,20 +9196,12 @@
           <a:p>
             <a:pPr algn="ctr"/>
             <a:r>
-              <a:rPr lang="en-IE" sz="1200" dirty="0" err="1">
+              <a:rPr lang="en-IE" sz="1200" noProof="1">
                 <a:solidFill>
                   <a:schemeClr val="accent1"/>
                 </a:solidFill>
               </a:rPr>
-              <a:t>postproc</a:t>
-            </a:r>
-            <a:r>
-              <a:rPr lang="en-IE" sz="1200" dirty="0">
-                <a:solidFill>
-                  <a:schemeClr val="accent1"/>
-                </a:solidFill>
-              </a:rPr>
-              <a:t> technical</a:t>
+              <a:t>postproc technical</a:t>
             </a:r>
           </a:p>
         </p:txBody>
@@ -7043,20 +9247,12 @@
           <a:p>
             <a:pPr algn="ctr"/>
             <a:r>
-              <a:rPr lang="en-IE" sz="1200" dirty="0" err="1">
+              <a:rPr lang="en-IE" sz="1200" noProof="1">
                 <a:solidFill>
                   <a:schemeClr val="accent1"/>
                 </a:solidFill>
               </a:rPr>
-              <a:t>postproc</a:t>
-            </a:r>
-            <a:r>
-              <a:rPr lang="en-IE" sz="1200" dirty="0">
-                <a:solidFill>
-                  <a:schemeClr val="accent1"/>
-                </a:solidFill>
-              </a:rPr>
-              <a:t> economics</a:t>
+              <a:t>postproc economics</a:t>
             </a:r>
           </a:p>
         </p:txBody>
@@ -7102,20 +9298,12 @@
           <a:p>
             <a:pPr algn="ctr"/>
             <a:r>
-              <a:rPr lang="en-IE" sz="1200" dirty="0" err="1">
+              <a:rPr lang="en-IE" sz="1200" noProof="1">
                 <a:solidFill>
                   <a:schemeClr val="accent1"/>
                 </a:solidFill>
               </a:rPr>
-              <a:t>postproc</a:t>
-            </a:r>
-            <a:r>
-              <a:rPr lang="en-IE" sz="1200" dirty="0">
-                <a:solidFill>
-                  <a:schemeClr val="accent1"/>
-                </a:solidFill>
-              </a:rPr>
-              <a:t> financial</a:t>
+              <a:t>postproc financial</a:t>
             </a:r>
           </a:p>
         </p:txBody>
@@ -7133,7 +9321,7 @@
 </p:sld>
 </file>
 
-<file path=ppt/slides/slide5.xml><?xml version="1.0" encoding="utf-8"?>
+<file path=ppt/slides/slide7.xml><?xml version="1.0" encoding="utf-8"?>
 <p:sld xmlns:a="http://schemas.openxmlformats.org/drawingml/2006/main" xmlns:r="http://schemas.openxmlformats.org/officeDocument/2006/relationships" xmlns:p="http://schemas.openxmlformats.org/presentationml/2006/main">
   <p:cSld>
     <p:spTree>
@@ -7198,12 +9386,12 @@
           <a:lstStyle/>
           <a:p>
             <a:r>
-              <a:rPr lang="en-IE" dirty="0">
+              <a:rPr lang="en-IE" noProof="1">
                 <a:solidFill>
                   <a:schemeClr val="accent1"/>
                 </a:solidFill>
               </a:rPr>
-              <a:t>core layer</a:t>
+              <a:t>core</a:t>
             </a:r>
           </a:p>
         </p:txBody>
@@ -7249,13 +9437,26 @@
           <a:p>
             <a:pPr algn="ctr"/>
             <a:r>
-              <a:rPr lang="en-IE" dirty="0">
+              <a:rPr lang="en-IE" noProof="1">
                 <a:solidFill>
                   <a:schemeClr val="accent1"/>
                 </a:solidFill>
               </a:rPr>
-              <a:t>Var (scalar)</a:t>
+              <a:t>Var </a:t>
             </a:r>
+            <a:r>
+              <a:rPr lang="en-IE" sz="1000" noProof="1">
+                <a:solidFill>
+                  <a:schemeClr val="accent1"/>
+                </a:solidFill>
+              </a:rPr>
+              <a:t>(float, str)</a:t>
+            </a:r>
+            <a:endParaRPr lang="en-IE" noProof="1">
+              <a:solidFill>
+                <a:schemeClr val="accent1"/>
+              </a:solidFill>
+            </a:endParaRPr>
           </a:p>
         </p:txBody>
       </p:sp>
@@ -7300,13 +9501,26 @@
           <a:p>
             <a:pPr algn="ctr"/>
             <a:r>
-              <a:rPr lang="en-IE" dirty="0">
+              <a:rPr lang="en-IE" noProof="1">
                 <a:solidFill>
                   <a:schemeClr val="accent1"/>
                 </a:solidFill>
               </a:rPr>
-              <a:t>Array (vector)</a:t>
+              <a:t>Array </a:t>
             </a:r>
+            <a:r>
+              <a:rPr lang="en-IE" sz="1000" noProof="1">
+                <a:solidFill>
+                  <a:schemeClr val="accent1"/>
+                </a:solidFill>
+              </a:rPr>
+              <a:t>(np.ndarray, str)</a:t>
+            </a:r>
+            <a:endParaRPr lang="en-IE" noProof="1">
+              <a:solidFill>
+                <a:schemeClr val="accent1"/>
+              </a:solidFill>
+            </a:endParaRPr>
           </a:p>
         </p:txBody>
       </p:sp>
@@ -7354,13 +9568,26 @@
           <a:p>
             <a:pPr algn="ctr"/>
             <a:r>
-              <a:rPr lang="en-IE" dirty="0">
+              <a:rPr lang="en-IE" noProof="1">
                 <a:solidFill>
                   <a:schemeClr val="accent1"/>
                 </a:solidFill>
               </a:rPr>
-              <a:t>Frame (tabular)</a:t>
+              <a:t>Frame </a:t>
             </a:r>
+            <a:r>
+              <a:rPr lang="en-IE" sz="1000" noProof="1">
+                <a:solidFill>
+                  <a:schemeClr val="accent1"/>
+                </a:solidFill>
+              </a:rPr>
+              <a:t>(pd.DataFrame, str)</a:t>
+            </a:r>
+            <a:endParaRPr lang="en-IE" sz="1400" noProof="1">
+              <a:solidFill>
+                <a:schemeClr val="accent1"/>
+              </a:solidFill>
+            </a:endParaRPr>
           </a:p>
         </p:txBody>
       </p:sp>
@@ -7378,7 +9605,7 @@
         </p:nvGrpSpPr>
         <p:grpSpPr>
           <a:xfrm>
-            <a:off x="1561744" y="2130515"/>
+            <a:off x="1553584" y="2159404"/>
             <a:ext cx="6938534" cy="963330"/>
             <a:chOff x="1561744" y="2130515"/>
             <a:chExt cx="6938534" cy="963330"/>
@@ -7398,8 +9625,8 @@
           </p:nvSpPr>
           <p:spPr>
             <a:xfrm>
-              <a:off x="3860092" y="2544139"/>
-              <a:ext cx="1301796" cy="402198"/>
+              <a:off x="3186532" y="2533987"/>
+              <a:ext cx="1128739" cy="402198"/>
             </a:xfrm>
             <a:prstGeom prst="roundRect">
               <a:avLst/>
@@ -7431,7 +9658,7 @@
             <a:p>
               <a:pPr algn="ctr"/>
               <a:r>
-                <a:rPr lang="en-IE" dirty="0">
+                <a:rPr lang="en-IE" noProof="1">
                   <a:solidFill>
                     <a:schemeClr val="accent3"/>
                   </a:solidFill>
@@ -7455,8 +9682,8 @@
           </p:nvSpPr>
           <p:spPr>
             <a:xfrm>
-              <a:off x="5257705" y="2544139"/>
-              <a:ext cx="1301796" cy="402198"/>
+              <a:off x="4625175" y="2533987"/>
+              <a:ext cx="1128739" cy="402198"/>
             </a:xfrm>
             <a:prstGeom prst="roundRect">
               <a:avLst/>
@@ -7488,7 +9715,7 @@
             <a:p>
               <a:pPr algn="ctr"/>
               <a:r>
-                <a:rPr lang="en-IE" dirty="0">
+                <a:rPr lang="en-IE" noProof="1">
                   <a:solidFill>
                     <a:schemeClr val="accent3"/>
                   </a:solidFill>
@@ -7512,8 +9739,8 @@
           </p:nvSpPr>
           <p:spPr>
             <a:xfrm>
-              <a:off x="2462479" y="2544139"/>
-              <a:ext cx="1301796" cy="402198"/>
+              <a:off x="1788940" y="2544139"/>
+              <a:ext cx="1128739" cy="402198"/>
             </a:xfrm>
             <a:prstGeom prst="roundRect">
               <a:avLst/>
@@ -7544,7 +9771,7 @@
             <a:p>
               <a:pPr algn="ctr"/>
               <a:r>
-                <a:rPr lang="en-IE" dirty="0">
+                <a:rPr lang="en-IE" noProof="1">
                   <a:solidFill>
                     <a:schemeClr val="accent3"/>
                   </a:solidFill>
@@ -7568,8 +9795,8 @@
           </p:nvSpPr>
           <p:spPr>
             <a:xfrm>
-              <a:off x="6655318" y="2544139"/>
-              <a:ext cx="1301796" cy="402198"/>
+              <a:off x="6063818" y="2533987"/>
+              <a:ext cx="1128739" cy="402198"/>
             </a:xfrm>
             <a:prstGeom prst="roundRect">
               <a:avLst/>
@@ -7601,7 +9828,7 @@
             <a:p>
               <a:pPr algn="ctr"/>
               <a:r>
-                <a:rPr lang="en-IE" dirty="0">
+                <a:rPr lang="en-IE" noProof="1">
                   <a:solidFill>
                     <a:schemeClr val="accent3"/>
                   </a:solidFill>
@@ -7659,12 +9886,12 @@
             <a:lstStyle/>
             <a:p>
               <a:r>
-                <a:rPr lang="en-IE" dirty="0">
+                <a:rPr lang="en-IE" noProof="1">
                   <a:solidFill>
                     <a:schemeClr val="accent3"/>
                   </a:solidFill>
                 </a:rPr>
-                <a:t>utilities layer</a:t>
+                <a:t>utils</a:t>
               </a:r>
             </a:p>
           </p:txBody>
@@ -7685,7 +9912,7 @@
         <p:spPr>
           <a:xfrm>
             <a:off x="8666359" y="866273"/>
-            <a:ext cx="1700980" cy="3410759"/>
+            <a:ext cx="1700980" cy="3715558"/>
           </a:xfrm>
           <a:prstGeom prst="roundRect">
             <a:avLst>
@@ -7721,18 +9948,13 @@
           <a:p>
             <a:pPr algn="ctr"/>
             <a:r>
-              <a:rPr lang="en-US" sz="1600" dirty="0">
+              <a:rPr lang="en-IE" sz="1600" noProof="1">
                 <a:solidFill>
                   <a:schemeClr val="accent2"/>
                 </a:solidFill>
               </a:rPr>
-              <a:t>Catalog</a:t>
+              <a:t>catalog</a:t>
             </a:r>
-            <a:endParaRPr lang="en-AU" sz="1600" dirty="0">
-              <a:solidFill>
-                <a:schemeClr val="accent2"/>
-              </a:solidFill>
-            </a:endParaRPr>
           </a:p>
         </p:txBody>
       </p:sp>
@@ -7750,7 +9972,7 @@
         </p:nvSpPr>
         <p:spPr>
           <a:xfrm>
-            <a:off x="8850076" y="1827418"/>
+            <a:off x="8874513" y="1722633"/>
             <a:ext cx="1301796" cy="323508"/>
           </a:xfrm>
           <a:prstGeom prst="roundRect">
@@ -7782,7 +10004,7 @@
           <a:p>
             <a:pPr algn="ctr"/>
             <a:r>
-              <a:rPr lang="en-IE" dirty="0">
+              <a:rPr lang="en-IE" noProof="1">
                 <a:solidFill>
                   <a:schemeClr val="accent2"/>
                 </a:solidFill>
@@ -7806,7 +10028,7 @@
         </p:nvSpPr>
         <p:spPr>
           <a:xfrm>
-            <a:off x="8838650" y="2683580"/>
+            <a:off x="8877978" y="2516436"/>
             <a:ext cx="1301796" cy="323508"/>
           </a:xfrm>
           <a:prstGeom prst="roundRect">
@@ -7839,7 +10061,7 @@
           <a:p>
             <a:pPr algn="ctr"/>
             <a:r>
-              <a:rPr lang="en-IE" dirty="0">
+              <a:rPr lang="en-IE" noProof="1">
                 <a:solidFill>
                   <a:schemeClr val="accent2"/>
                 </a:solidFill>
@@ -7863,7 +10085,7 @@
         </p:nvSpPr>
         <p:spPr>
           <a:xfrm>
-            <a:off x="8838650" y="1426805"/>
+            <a:off x="8874513" y="1332808"/>
             <a:ext cx="1301796" cy="323508"/>
           </a:xfrm>
           <a:prstGeom prst="roundRect">
@@ -7895,7 +10117,7 @@
           <a:p>
             <a:pPr algn="ctr"/>
             <a:r>
-              <a:rPr lang="en-IE" dirty="0">
+              <a:rPr lang="en-IE" noProof="1">
                 <a:solidFill>
                   <a:schemeClr val="accent2"/>
                 </a:solidFill>
@@ -7920,7 +10142,7 @@
         <p:spPr>
           <a:xfrm>
             <a:off x="1395663" y="288758"/>
-            <a:ext cx="9225728" cy="4155423"/>
+            <a:ext cx="9225728" cy="4647036"/>
           </a:xfrm>
           <a:prstGeom prst="roundRect">
             <a:avLst>
@@ -7958,18 +10180,13 @@
           <a:p>
             <a:pPr algn="ctr"/>
             <a:r>
-              <a:rPr lang="en-US" dirty="0">
+              <a:rPr lang="en-IE" noProof="1">
                 <a:solidFill>
                   <a:schemeClr val="tx1"/>
                 </a:solidFill>
               </a:rPr>
-              <a:t>antupy architecture</a:t>
+              <a:t>antupy architecture (now, roughly)</a:t>
             </a:r>
-            <a:endParaRPr lang="en-AU" dirty="0">
-              <a:solidFill>
-                <a:schemeClr val="tx1"/>
-              </a:solidFill>
-            </a:endParaRPr>
           </a:p>
         </p:txBody>
       </p:sp>
@@ -7987,7 +10204,7 @@
         </p:nvSpPr>
         <p:spPr>
           <a:xfrm>
-            <a:off x="8850076" y="2224751"/>
+            <a:off x="8879572" y="2116599"/>
             <a:ext cx="1301796" cy="323508"/>
           </a:xfrm>
           <a:prstGeom prst="roundRect">
@@ -8020,7 +10237,7 @@
           <a:p>
             <a:pPr algn="ctr"/>
             <a:r>
-              <a:rPr lang="en-IE" dirty="0">
+              <a:rPr lang="en-IE" noProof="1">
                 <a:solidFill>
                   <a:schemeClr val="accent2"/>
                 </a:solidFill>
@@ -8044,8 +10261,8 @@
         </p:nvGrpSpPr>
         <p:grpSpPr>
           <a:xfrm>
-            <a:off x="1581287" y="3233095"/>
-            <a:ext cx="6938534" cy="963330"/>
+            <a:off x="1555945" y="3227512"/>
+            <a:ext cx="6938534" cy="1354319"/>
             <a:chOff x="1581287" y="3723782"/>
             <a:chExt cx="6938534" cy="963330"/>
           </a:xfrm>
@@ -8064,12 +10281,15 @@
           </p:nvSpPr>
           <p:spPr>
             <a:xfrm>
-              <a:off x="3362282" y="4132243"/>
+              <a:off x="3246686" y="4129543"/>
               <a:ext cx="1289646" cy="416152"/>
             </a:xfrm>
             <a:prstGeom prst="roundRect">
               <a:avLst/>
             </a:prstGeom>
+            <a:ln>
+              <a:prstDash val="dash"/>
+            </a:ln>
           </p:spPr>
           <p:style>
             <a:lnRef idx="2">
@@ -8091,7 +10311,7 @@
             <a:p>
               <a:pPr algn="ctr"/>
               <a:r>
-                <a:rPr lang="en-IE" dirty="0">
+                <a:rPr lang="en-IE" noProof="1">
                   <a:solidFill>
                     <a:schemeClr val="accent5"/>
                   </a:solidFill>
@@ -8115,8 +10335,8 @@
           </p:nvSpPr>
           <p:spPr>
             <a:xfrm>
-              <a:off x="5047922" y="4132982"/>
-              <a:ext cx="1384633" cy="415413"/>
+              <a:off x="6550827" y="3796031"/>
+              <a:ext cx="1794481" cy="860375"/>
             </a:xfrm>
             <a:prstGeom prst="roundRect">
               <a:avLst/>
@@ -8140,12 +10360,12 @@
             </a:fontRef>
           </p:style>
           <p:txBody>
-            <a:bodyPr rtlCol="0" anchor="ctr"/>
+            <a:bodyPr rtlCol="0" anchor="t" anchorCtr="0"/>
             <a:lstStyle/>
             <a:p>
               <a:pPr algn="ctr"/>
               <a:r>
-                <a:rPr lang="en-IE" dirty="0">
+                <a:rPr lang="en-IE" sz="1200" noProof="1">
                   <a:solidFill>
                     <a:schemeClr val="accent5"/>
                   </a:solidFill>
@@ -8203,12 +10423,12 @@
             <a:lstStyle/>
             <a:p>
               <a:r>
-                <a:rPr lang="en-IE" dirty="0">
+                <a:rPr lang="en-IE" noProof="1">
                   <a:solidFill>
                     <a:schemeClr val="accent5"/>
                   </a:solidFill>
                 </a:rPr>
-                <a:t>simulation layer</a:t>
+                <a:t>simulation</a:t>
               </a:r>
             </a:p>
           </p:txBody>
@@ -8227,7 +10447,7 @@
           </p:nvSpPr>
           <p:spPr>
             <a:xfrm>
-              <a:off x="6765531" y="4133723"/>
+              <a:off x="4783450" y="4132879"/>
               <a:ext cx="1559223" cy="415413"/>
             </a:xfrm>
             <a:prstGeom prst="roundRect">
@@ -8254,7 +10474,7 @@
             <a:p>
               <a:pPr algn="ctr"/>
               <a:r>
-                <a:rPr lang="en-IE" dirty="0">
+                <a:rPr lang="en-IE" noProof="1">
                   <a:solidFill>
                     <a:schemeClr val="accent5"/>
                   </a:solidFill>
@@ -8308,7 +10528,7 @@
             <a:p>
               <a:pPr algn="ctr"/>
               <a:r>
-                <a:rPr lang="en-IE" dirty="0">
+                <a:rPr lang="en-IE" noProof="1">
                   <a:solidFill>
                     <a:schemeClr val="accent5"/>
                   </a:solidFill>
@@ -8333,7 +10553,7 @@
         </p:nvSpPr>
         <p:spPr>
           <a:xfrm>
-            <a:off x="8850076" y="3116694"/>
+            <a:off x="8879572" y="2920049"/>
             <a:ext cx="1301796" cy="323508"/>
           </a:xfrm>
           <a:prstGeom prst="roundRect">
@@ -8366,9 +10586,532 @@
           <a:p>
             <a:pPr algn="ctr"/>
             <a:r>
-              <a:rPr lang="en-IE" dirty="0">
+              <a:rPr lang="en-IE" noProof="1">
                 <a:solidFill>
                   <a:schemeClr val="accent2"/>
+                </a:solidFill>
+              </a:rPr>
+              <a:t>cycles</a:t>
+            </a:r>
+          </a:p>
+        </p:txBody>
+      </p:sp>
+      <p:sp>
+        <p:nvSpPr>
+          <p:cNvPr id="3" name="Rectangle: Rounded Corners 2">
+            <a:extLst>
+              <a:ext uri="{FF2B5EF4-FFF2-40B4-BE49-F238E27FC236}">
+                <a16:creationId xmlns:a16="http://schemas.microsoft.com/office/drawing/2014/main" id="{C80B8BD0-C504-112E-29E6-362D47AA58C1}"/>
+              </a:ext>
+            </a:extLst>
+          </p:cNvPr>
+          <p:cNvSpPr/>
+          <p:nvPr/>
+        </p:nvSpPr>
+        <p:spPr>
+          <a:xfrm>
+            <a:off x="8874513" y="3337429"/>
+            <a:ext cx="1301796" cy="323508"/>
+          </a:xfrm>
+          <a:prstGeom prst="roundRect">
+            <a:avLst/>
+          </a:prstGeom>
+          <a:ln>
+            <a:solidFill>
+              <a:schemeClr val="accent2"/>
+            </a:solidFill>
+            <a:prstDash val="sysDot"/>
+          </a:ln>
+        </p:spPr>
+        <p:style>
+          <a:lnRef idx="2">
+            <a:schemeClr val="accent2"/>
+          </a:lnRef>
+          <a:fillRef idx="1">
+            <a:schemeClr val="lt1"/>
+          </a:fillRef>
+          <a:effectRef idx="0">
+            <a:schemeClr val="accent2"/>
+          </a:effectRef>
+          <a:fontRef idx="minor">
+            <a:schemeClr val="dk1"/>
+          </a:fontRef>
+        </p:style>
+        <p:txBody>
+          <a:bodyPr rtlCol="0" anchor="ctr"/>
+          <a:lstStyle/>
+          <a:p>
+            <a:pPr algn="ctr"/>
+            <a:r>
+              <a:rPr lang="en-IE" noProof="1">
+                <a:solidFill>
+                  <a:schemeClr val="accent2"/>
+                </a:solidFill>
+              </a:rPr>
+              <a:t>chem</a:t>
+            </a:r>
+          </a:p>
+        </p:txBody>
+      </p:sp>
+      <p:sp>
+        <p:nvSpPr>
+          <p:cNvPr id="21" name="Rectangle: Rounded Corners 20">
+            <a:extLst>
+              <a:ext uri="{FF2B5EF4-FFF2-40B4-BE49-F238E27FC236}">
+                <a16:creationId xmlns:a16="http://schemas.microsoft.com/office/drawing/2014/main" id="{698F1227-885D-13AA-1FF6-A5A1FA3A8B61}"/>
+              </a:ext>
+            </a:extLst>
+          </p:cNvPr>
+          <p:cNvSpPr/>
+          <p:nvPr/>
+        </p:nvSpPr>
+        <p:spPr>
+          <a:xfrm>
+            <a:off x="8874513" y="3750013"/>
+            <a:ext cx="1301796" cy="323508"/>
+          </a:xfrm>
+          <a:prstGeom prst="roundRect">
+            <a:avLst/>
+          </a:prstGeom>
+          <a:ln>
+            <a:solidFill>
+              <a:schemeClr val="accent2"/>
+            </a:solidFill>
+            <a:prstDash val="sysDot"/>
+          </a:ln>
+        </p:spPr>
+        <p:style>
+          <a:lnRef idx="2">
+            <a:schemeClr val="accent2"/>
+          </a:lnRef>
+          <a:fillRef idx="1">
+            <a:schemeClr val="lt1"/>
+          </a:fillRef>
+          <a:effectRef idx="0">
+            <a:schemeClr val="accent2"/>
+          </a:effectRef>
+          <a:fontRef idx="minor">
+            <a:schemeClr val="dk1"/>
+          </a:fontRef>
+        </p:style>
+        <p:txBody>
+          <a:bodyPr rtlCol="0" anchor="ctr"/>
+          <a:lstStyle/>
+          <a:p>
+            <a:pPr algn="ctr"/>
+            <a:r>
+              <a:rPr lang="en-IE" noProof="1">
+                <a:solidFill>
+                  <a:schemeClr val="accent2"/>
+                </a:solidFill>
+              </a:rPr>
+              <a:t>cryo</a:t>
+            </a:r>
+          </a:p>
+        </p:txBody>
+      </p:sp>
+      <p:sp>
+        <p:nvSpPr>
+          <p:cNvPr id="26" name="Rectangle: Rounded Corners 25">
+            <a:extLst>
+              <a:ext uri="{FF2B5EF4-FFF2-40B4-BE49-F238E27FC236}">
+                <a16:creationId xmlns:a16="http://schemas.microsoft.com/office/drawing/2014/main" id="{86E8A25C-B823-0418-6721-2A4A98CF3504}"/>
+              </a:ext>
+            </a:extLst>
+          </p:cNvPr>
+          <p:cNvSpPr/>
+          <p:nvPr/>
+        </p:nvSpPr>
+        <p:spPr>
+          <a:xfrm>
+            <a:off x="8889560" y="4170375"/>
+            <a:ext cx="1301796" cy="323508"/>
+          </a:xfrm>
+          <a:prstGeom prst="roundRect">
+            <a:avLst/>
+          </a:prstGeom>
+          <a:ln>
+            <a:solidFill>
+              <a:schemeClr val="accent2"/>
+            </a:solidFill>
+            <a:prstDash val="sysDot"/>
+          </a:ln>
+        </p:spPr>
+        <p:style>
+          <a:lnRef idx="2">
+            <a:schemeClr val="accent2"/>
+          </a:lnRef>
+          <a:fillRef idx="1">
+            <a:schemeClr val="lt1"/>
+          </a:fillRef>
+          <a:effectRef idx="0">
+            <a:schemeClr val="accent2"/>
+          </a:effectRef>
+          <a:fontRef idx="minor">
+            <a:schemeClr val="dk1"/>
+          </a:fontRef>
+        </p:style>
+        <p:txBody>
+          <a:bodyPr rtlCol="0" anchor="ctr"/>
+          <a:lstStyle/>
+          <a:p>
+            <a:pPr algn="ctr"/>
+            <a:r>
+              <a:rPr lang="en-IE" noProof="1">
+                <a:solidFill>
+                  <a:schemeClr val="accent2"/>
+                </a:solidFill>
+              </a:rPr>
+              <a:t>+</a:t>
+            </a:r>
+          </a:p>
+        </p:txBody>
+      </p:sp>
+      <p:sp>
+        <p:nvSpPr>
+          <p:cNvPr id="27" name="Rectangle: Rounded Corners 26">
+            <a:extLst>
+              <a:ext uri="{FF2B5EF4-FFF2-40B4-BE49-F238E27FC236}">
+                <a16:creationId xmlns:a16="http://schemas.microsoft.com/office/drawing/2014/main" id="{D72C649E-AA45-6272-8598-5F08DF9DA447}"/>
+              </a:ext>
+            </a:extLst>
+          </p:cNvPr>
+          <p:cNvSpPr/>
+          <p:nvPr/>
+        </p:nvSpPr>
+        <p:spPr>
+          <a:xfrm>
+            <a:off x="6665345" y="3648590"/>
+            <a:ext cx="692109" cy="198643"/>
+          </a:xfrm>
+          <a:prstGeom prst="roundRect">
+            <a:avLst/>
+          </a:prstGeom>
+          <a:ln>
+            <a:prstDash val="dash"/>
+          </a:ln>
+        </p:spPr>
+        <p:style>
+          <a:lnRef idx="2">
+            <a:schemeClr val="accent5"/>
+          </a:lnRef>
+          <a:fillRef idx="1">
+            <a:schemeClr val="lt1"/>
+          </a:fillRef>
+          <a:effectRef idx="0">
+            <a:schemeClr val="accent5"/>
+          </a:effectRef>
+          <a:fontRef idx="minor">
+            <a:schemeClr val="dk1"/>
+          </a:fontRef>
+        </p:style>
+        <p:txBody>
+          <a:bodyPr lIns="18000" tIns="18000" rIns="18000" bIns="18000" rtlCol="0" anchor="ctr"/>
+          <a:lstStyle/>
+          <a:p>
+            <a:pPr algn="ctr"/>
+            <a:r>
+              <a:rPr lang="en-IE" sz="1000" noProof="1">
+                <a:solidFill>
+                  <a:schemeClr val="accent5"/>
+                </a:solidFill>
+              </a:rPr>
+              <a:t>Weather</a:t>
+            </a:r>
+            <a:endParaRPr lang="en-IE" noProof="1">
+              <a:solidFill>
+                <a:schemeClr val="accent5"/>
+              </a:solidFill>
+            </a:endParaRPr>
+          </a:p>
+        </p:txBody>
+      </p:sp>
+      <p:sp>
+        <p:nvSpPr>
+          <p:cNvPr id="29" name="Rectangle: Rounded Corners 28">
+            <a:extLst>
+              <a:ext uri="{FF2B5EF4-FFF2-40B4-BE49-F238E27FC236}">
+                <a16:creationId xmlns:a16="http://schemas.microsoft.com/office/drawing/2014/main" id="{21D68607-E3FD-684F-20B3-49CE57EAED5B}"/>
+              </a:ext>
+            </a:extLst>
+          </p:cNvPr>
+          <p:cNvSpPr/>
+          <p:nvPr/>
+        </p:nvSpPr>
+        <p:spPr>
+          <a:xfrm>
+            <a:off x="7494675" y="3648589"/>
+            <a:ext cx="692109" cy="198643"/>
+          </a:xfrm>
+          <a:prstGeom prst="roundRect">
+            <a:avLst/>
+          </a:prstGeom>
+          <a:ln>
+            <a:prstDash val="dash"/>
+          </a:ln>
+        </p:spPr>
+        <p:style>
+          <a:lnRef idx="2">
+            <a:schemeClr val="accent5"/>
+          </a:lnRef>
+          <a:fillRef idx="1">
+            <a:schemeClr val="lt1"/>
+          </a:fillRef>
+          <a:effectRef idx="0">
+            <a:schemeClr val="accent5"/>
+          </a:effectRef>
+          <a:fontRef idx="minor">
+            <a:schemeClr val="dk1"/>
+          </a:fontRef>
+        </p:style>
+        <p:txBody>
+          <a:bodyPr lIns="18000" tIns="18000" rIns="18000" bIns="18000" rtlCol="0" anchor="ctr"/>
+          <a:lstStyle/>
+          <a:p>
+            <a:pPr algn="ctr"/>
+            <a:r>
+              <a:rPr lang="en-IE" sz="1000" noProof="1">
+                <a:solidFill>
+                  <a:schemeClr val="accent5"/>
+                </a:solidFill>
+              </a:rPr>
+              <a:t>Market</a:t>
+            </a:r>
+            <a:endParaRPr lang="en-IE" noProof="1">
+              <a:solidFill>
+                <a:schemeClr val="accent5"/>
+              </a:solidFill>
+            </a:endParaRPr>
+          </a:p>
+        </p:txBody>
+      </p:sp>
+      <p:sp>
+        <p:nvSpPr>
+          <p:cNvPr id="30" name="Rectangle: Rounded Corners 29">
+            <a:extLst>
+              <a:ext uri="{FF2B5EF4-FFF2-40B4-BE49-F238E27FC236}">
+                <a16:creationId xmlns:a16="http://schemas.microsoft.com/office/drawing/2014/main" id="{66F90816-86C2-772F-80FF-19578D2032DF}"/>
+              </a:ext>
+            </a:extLst>
+          </p:cNvPr>
+          <p:cNvSpPr/>
+          <p:nvPr/>
+        </p:nvSpPr>
+        <p:spPr>
+          <a:xfrm>
+            <a:off x="6665345" y="3948806"/>
+            <a:ext cx="692109" cy="198643"/>
+          </a:xfrm>
+          <a:prstGeom prst="roundRect">
+            <a:avLst/>
+          </a:prstGeom>
+          <a:ln>
+            <a:prstDash val="dash"/>
+          </a:ln>
+        </p:spPr>
+        <p:style>
+          <a:lnRef idx="2">
+            <a:schemeClr val="accent5"/>
+          </a:lnRef>
+          <a:fillRef idx="1">
+            <a:schemeClr val="lt1"/>
+          </a:fillRef>
+          <a:effectRef idx="0">
+            <a:schemeClr val="accent5"/>
+          </a:effectRef>
+          <a:fontRef idx="minor">
+            <a:schemeClr val="dk1"/>
+          </a:fontRef>
+        </p:style>
+        <p:txBody>
+          <a:bodyPr lIns="18000" tIns="18000" rIns="18000" bIns="18000" rtlCol="0" anchor="ctr"/>
+          <a:lstStyle/>
+          <a:p>
+            <a:pPr algn="ctr"/>
+            <a:r>
+              <a:rPr lang="en-IE" sz="1000" noProof="1">
+                <a:solidFill>
+                  <a:schemeClr val="accent5"/>
+                </a:solidFill>
+              </a:rPr>
+              <a:t>HWD</a:t>
+            </a:r>
+            <a:endParaRPr lang="en-IE" noProof="1">
+              <a:solidFill>
+                <a:schemeClr val="accent5"/>
+              </a:solidFill>
+            </a:endParaRPr>
+          </a:p>
+        </p:txBody>
+      </p:sp>
+      <p:sp>
+        <p:nvSpPr>
+          <p:cNvPr id="31" name="Rectangle: Rounded Corners 30">
+            <a:extLst>
+              <a:ext uri="{FF2B5EF4-FFF2-40B4-BE49-F238E27FC236}">
+                <a16:creationId xmlns:a16="http://schemas.microsoft.com/office/drawing/2014/main" id="{8D639D98-D523-A6ED-EFAC-B25EFED0FED3}"/>
+              </a:ext>
+            </a:extLst>
+          </p:cNvPr>
+          <p:cNvSpPr/>
+          <p:nvPr/>
+        </p:nvSpPr>
+        <p:spPr>
+          <a:xfrm>
+            <a:off x="7500847" y="3948806"/>
+            <a:ext cx="692109" cy="198643"/>
+          </a:xfrm>
+          <a:prstGeom prst="roundRect">
+            <a:avLst/>
+          </a:prstGeom>
+          <a:ln>
+            <a:prstDash val="sysDot"/>
+          </a:ln>
+        </p:spPr>
+        <p:style>
+          <a:lnRef idx="2">
+            <a:schemeClr val="accent5"/>
+          </a:lnRef>
+          <a:fillRef idx="1">
+            <a:schemeClr val="lt1"/>
+          </a:fillRef>
+          <a:effectRef idx="0">
+            <a:schemeClr val="accent5"/>
+          </a:effectRef>
+          <a:fontRef idx="minor">
+            <a:schemeClr val="dk1"/>
+          </a:fontRef>
+        </p:style>
+        <p:txBody>
+          <a:bodyPr lIns="18000" tIns="18000" rIns="18000" bIns="18000" rtlCol="0" anchor="ctr"/>
+          <a:lstStyle/>
+          <a:p>
+            <a:pPr algn="ctr"/>
+            <a:r>
+              <a:rPr lang="en-IE" sz="1000" noProof="1">
+                <a:solidFill>
+                  <a:schemeClr val="accent5"/>
+                </a:solidFill>
+              </a:rPr>
+              <a:t>Loads</a:t>
+            </a:r>
+            <a:endParaRPr lang="en-IE" noProof="1">
+              <a:solidFill>
+                <a:schemeClr val="accent5"/>
+              </a:solidFill>
+            </a:endParaRPr>
+          </a:p>
+        </p:txBody>
+      </p:sp>
+      <p:sp>
+        <p:nvSpPr>
+          <p:cNvPr id="32" name="Rectangle: Rounded Corners 31">
+            <a:extLst>
+              <a:ext uri="{FF2B5EF4-FFF2-40B4-BE49-F238E27FC236}">
+                <a16:creationId xmlns:a16="http://schemas.microsoft.com/office/drawing/2014/main" id="{4DB7CC37-3D0E-AC6F-71D1-8D84D8807A50}"/>
+              </a:ext>
+            </a:extLst>
+          </p:cNvPr>
+          <p:cNvSpPr/>
+          <p:nvPr/>
+        </p:nvSpPr>
+        <p:spPr>
+          <a:xfrm>
+            <a:off x="7184397" y="4243734"/>
+            <a:ext cx="476655" cy="198643"/>
+          </a:xfrm>
+          <a:prstGeom prst="roundRect">
+            <a:avLst/>
+          </a:prstGeom>
+          <a:ln>
+            <a:prstDash val="sysDot"/>
+          </a:ln>
+        </p:spPr>
+        <p:style>
+          <a:lnRef idx="2">
+            <a:schemeClr val="accent5"/>
+          </a:lnRef>
+          <a:fillRef idx="1">
+            <a:schemeClr val="lt1"/>
+          </a:fillRef>
+          <a:effectRef idx="0">
+            <a:schemeClr val="accent5"/>
+          </a:effectRef>
+          <a:fontRef idx="minor">
+            <a:schemeClr val="dk1"/>
+          </a:fontRef>
+        </p:style>
+        <p:txBody>
+          <a:bodyPr lIns="18000" tIns="18000" rIns="18000" bIns="18000" rtlCol="0" anchor="ctr"/>
+          <a:lstStyle/>
+          <a:p>
+            <a:pPr algn="ctr"/>
+            <a:r>
+              <a:rPr lang="en-IE" sz="1000" noProof="1">
+                <a:solidFill>
+                  <a:schemeClr val="accent5"/>
+                </a:solidFill>
+              </a:rPr>
+              <a:t>+</a:t>
+            </a:r>
+            <a:endParaRPr lang="en-IE" noProof="1">
+              <a:solidFill>
+                <a:schemeClr val="accent5"/>
+              </a:solidFill>
+            </a:endParaRPr>
+          </a:p>
+        </p:txBody>
+      </p:sp>
+      <p:sp>
+        <p:nvSpPr>
+          <p:cNvPr id="33" name="Rectangle: Rounded Corners 32">
+            <a:extLst>
+              <a:ext uri="{FF2B5EF4-FFF2-40B4-BE49-F238E27FC236}">
+                <a16:creationId xmlns:a16="http://schemas.microsoft.com/office/drawing/2014/main" id="{7572FF06-3D93-0E80-BAAC-B4F02AA1CF01}"/>
+              </a:ext>
+            </a:extLst>
+          </p:cNvPr>
+          <p:cNvSpPr/>
+          <p:nvPr/>
+        </p:nvSpPr>
+        <p:spPr>
+          <a:xfrm>
+            <a:off x="7494301" y="2570224"/>
+            <a:ext cx="861874" cy="402198"/>
+          </a:xfrm>
+          <a:prstGeom prst="roundRect">
+            <a:avLst/>
+          </a:prstGeom>
+          <a:ln>
+            <a:solidFill>
+              <a:schemeClr val="accent3"/>
+            </a:solidFill>
+            <a:prstDash val="dash"/>
+          </a:ln>
+        </p:spPr>
+        <p:style>
+          <a:lnRef idx="2">
+            <a:schemeClr val="accent2"/>
+          </a:lnRef>
+          <a:fillRef idx="1">
+            <a:schemeClr val="lt1"/>
+          </a:fillRef>
+          <a:effectRef idx="0">
+            <a:schemeClr val="accent2"/>
+          </a:effectRef>
+          <a:fontRef idx="minor">
+            <a:schemeClr val="dk1"/>
+          </a:fontRef>
+        </p:style>
+        <p:txBody>
+          <a:bodyPr rtlCol="0" anchor="ctr"/>
+          <a:lstStyle/>
+          <a:p>
+            <a:pPr algn="ctr"/>
+            <a:r>
+              <a:rPr lang="en-IE" noProof="1">
+                <a:solidFill>
+                  <a:schemeClr val="accent3"/>
                 </a:solidFill>
               </a:rPr>
               <a:t>+</a:t>

--- a/tuts/prezzo/antupy_diagram.pptx
+++ b/tuts/prezzo/antupy_diagram.pptx
@@ -416,7 +416,7 @@
           <a:p>
             <a:fld id="{0F545F80-4238-44B2-8FA4-030309B17934}" type="datetimeFigureOut">
               <a:rPr lang="en-IE" smtClean="0"/>
-              <a:t>16/04/2026</a:t>
+              <a:t>13/05/2026</a:t>
             </a:fld>
             <a:endParaRPr lang="en-IE"/>
           </a:p>
@@ -616,7 +616,7 @@
           <a:p>
             <a:fld id="{0F545F80-4238-44B2-8FA4-030309B17934}" type="datetimeFigureOut">
               <a:rPr lang="en-IE" smtClean="0"/>
-              <a:t>16/04/2026</a:t>
+              <a:t>13/05/2026</a:t>
             </a:fld>
             <a:endParaRPr lang="en-IE"/>
           </a:p>
@@ -826,7 +826,7 @@
           <a:p>
             <a:fld id="{0F545F80-4238-44B2-8FA4-030309B17934}" type="datetimeFigureOut">
               <a:rPr lang="en-IE" smtClean="0"/>
-              <a:t>16/04/2026</a:t>
+              <a:t>13/05/2026</a:t>
             </a:fld>
             <a:endParaRPr lang="en-IE"/>
           </a:p>
@@ -1026,7 +1026,7 @@
           <a:p>
             <a:fld id="{0F545F80-4238-44B2-8FA4-030309B17934}" type="datetimeFigureOut">
               <a:rPr lang="en-IE" smtClean="0"/>
-              <a:t>16/04/2026</a:t>
+              <a:t>13/05/2026</a:t>
             </a:fld>
             <a:endParaRPr lang="en-IE"/>
           </a:p>
@@ -1302,7 +1302,7 @@
           <a:p>
             <a:fld id="{0F545F80-4238-44B2-8FA4-030309B17934}" type="datetimeFigureOut">
               <a:rPr lang="en-IE" smtClean="0"/>
-              <a:t>16/04/2026</a:t>
+              <a:t>13/05/2026</a:t>
             </a:fld>
             <a:endParaRPr lang="en-IE"/>
           </a:p>
@@ -1570,7 +1570,7 @@
           <a:p>
             <a:fld id="{0F545F80-4238-44B2-8FA4-030309B17934}" type="datetimeFigureOut">
               <a:rPr lang="en-IE" smtClean="0"/>
-              <a:t>16/04/2026</a:t>
+              <a:t>13/05/2026</a:t>
             </a:fld>
             <a:endParaRPr lang="en-IE"/>
           </a:p>
@@ -1985,7 +1985,7 @@
           <a:p>
             <a:fld id="{0F545F80-4238-44B2-8FA4-030309B17934}" type="datetimeFigureOut">
               <a:rPr lang="en-IE" smtClean="0"/>
-              <a:t>16/04/2026</a:t>
+              <a:t>13/05/2026</a:t>
             </a:fld>
             <a:endParaRPr lang="en-IE"/>
           </a:p>
@@ -2127,7 +2127,7 @@
           <a:p>
             <a:fld id="{0F545F80-4238-44B2-8FA4-030309B17934}" type="datetimeFigureOut">
               <a:rPr lang="en-IE" smtClean="0"/>
-              <a:t>16/04/2026</a:t>
+              <a:t>13/05/2026</a:t>
             </a:fld>
             <a:endParaRPr lang="en-IE"/>
           </a:p>
@@ -2240,7 +2240,7 @@
           <a:p>
             <a:fld id="{0F545F80-4238-44B2-8FA4-030309B17934}" type="datetimeFigureOut">
               <a:rPr lang="en-IE" smtClean="0"/>
-              <a:t>16/04/2026</a:t>
+              <a:t>13/05/2026</a:t>
             </a:fld>
             <a:endParaRPr lang="en-IE"/>
           </a:p>
@@ -2553,7 +2553,7 @@
           <a:p>
             <a:fld id="{0F545F80-4238-44B2-8FA4-030309B17934}" type="datetimeFigureOut">
               <a:rPr lang="en-IE" smtClean="0"/>
-              <a:t>16/04/2026</a:t>
+              <a:t>13/05/2026</a:t>
             </a:fld>
             <a:endParaRPr lang="en-IE"/>
           </a:p>
@@ -2842,7 +2842,7 @@
           <a:p>
             <a:fld id="{0F545F80-4238-44B2-8FA4-030309B17934}" type="datetimeFigureOut">
               <a:rPr lang="en-IE" smtClean="0"/>
-              <a:t>16/04/2026</a:t>
+              <a:t>13/05/2026</a:t>
             </a:fld>
             <a:endParaRPr lang="en-IE"/>
           </a:p>
@@ -3085,7 +3085,7 @@
           <a:p>
             <a:fld id="{0F545F80-4238-44B2-8FA4-030309B17934}" type="datetimeFigureOut">
               <a:rPr lang="en-IE" smtClean="0"/>
-              <a:t>16/04/2026</a:t>
+              <a:t>13/05/2026</a:t>
             </a:fld>
             <a:endParaRPr lang="en-IE"/>
           </a:p>
@@ -3526,17 +3526,19 @@
         </p:nvSpPr>
         <p:spPr>
           <a:xfrm>
-            <a:off x="1789355" y="290634"/>
+            <a:off x="1316253" y="614061"/>
             <a:ext cx="3352800" cy="1325563"/>
           </a:xfrm>
         </p:spPr>
         <p:txBody>
-          <a:bodyPr/>
+          <a:bodyPr>
+            <a:normAutofit/>
+          </a:bodyPr>
           <a:lstStyle/>
           <a:p>
             <a:r>
-              <a:rPr lang="en-IE" noProof="1"/>
-              <a:t>phd code</a:t>
+              <a:rPr lang="en-IE" sz="3200" noProof="1"/>
+              <a:t>phd</a:t>
             </a:r>
           </a:p>
         </p:txBody>
@@ -3557,7 +3559,7 @@
         </p:nvSpPr>
         <p:spPr>
           <a:xfrm>
-            <a:off x="6939205" y="341096"/>
+            <a:off x="3646483" y="587314"/>
             <a:ext cx="4457700" cy="1325563"/>
           </a:xfrm>
           <a:prstGeom prst="rect">
@@ -3589,7 +3591,7 @@
           </a:lstStyle>
           <a:p>
             <a:r>
-              <a:rPr lang="en-IE" noProof="1"/>
+              <a:rPr lang="en-IE" sz="3200" noProof="1"/>
               <a:t>postdoc_1</a:t>
             </a:r>
           </a:p>
@@ -3609,8 +3611,8 @@
         </p:nvGrpSpPr>
         <p:grpSpPr>
           <a:xfrm>
-            <a:off x="1167055" y="1585867"/>
-            <a:ext cx="3975100" cy="5053088"/>
+            <a:off x="353426" y="1508299"/>
+            <a:ext cx="2746577" cy="5053088"/>
             <a:chOff x="893056" y="1614489"/>
             <a:chExt cx="1928938" cy="5053088"/>
           </a:xfrm>
@@ -3678,7 +3680,7 @@
           </p:nvSpPr>
           <p:spPr>
             <a:xfrm>
-              <a:off x="950949" y="5547392"/>
+              <a:off x="950949" y="5437867"/>
               <a:ext cx="1761893" cy="501805"/>
             </a:xfrm>
             <a:prstGeom prst="roundRect">
@@ -3761,7 +3763,7 @@
                     <a:schemeClr val="accent2"/>
                   </a:solidFill>
                 </a:rPr>
-                <a:t>thermal analysis (particle receiver)</a:t>
+                <a:t>thermal analysis</a:t>
               </a:r>
             </a:p>
           </p:txBody>
@@ -3812,7 +3814,7 @@
                     <a:schemeClr val="accent2"/>
                   </a:solidFill>
                 </a:rPr>
-                <a:t>power generation (dispatch)</a:t>
+                <a:t>power generation</a:t>
               </a:r>
             </a:p>
           </p:txBody>
@@ -3863,7 +3865,7 @@
                     <a:schemeClr val="accent2"/>
                   </a:solidFill>
                 </a:rPr>
-                <a:t>optical analysis (beam down)</a:t>
+                <a:t>optical analysis</a:t>
               </a:r>
             </a:p>
           </p:txBody>
@@ -3882,7 +3884,7 @@
           </p:nvSpPr>
           <p:spPr>
             <a:xfrm>
-              <a:off x="950950" y="6094183"/>
+              <a:off x="950949" y="6015851"/>
               <a:ext cx="1761894" cy="501805"/>
             </a:xfrm>
             <a:prstGeom prst="roundRect">
@@ -4036,8 +4038,8 @@
         </p:nvGrpSpPr>
         <p:grpSpPr>
           <a:xfrm>
-            <a:off x="6680201" y="1585867"/>
-            <a:ext cx="3975100" cy="5053088"/>
+            <a:off x="3265893" y="1520647"/>
+            <a:ext cx="2931565" cy="5053088"/>
             <a:chOff x="893056" y="1614489"/>
             <a:chExt cx="1928938" cy="5053088"/>
           </a:xfrm>
@@ -4105,8 +4107,8 @@
           </p:nvSpPr>
           <p:spPr>
             <a:xfrm>
-              <a:off x="950949" y="5547392"/>
-              <a:ext cx="1761893" cy="501805"/>
+              <a:off x="950947" y="5348747"/>
+              <a:ext cx="1761893" cy="291270"/>
             </a:xfrm>
             <a:prstGeom prst="roundRect">
               <a:avLst/>
@@ -4156,7 +4158,7 @@
           </p:nvSpPr>
           <p:spPr>
             <a:xfrm>
-              <a:off x="950949" y="4040436"/>
+              <a:off x="950949" y="3959437"/>
               <a:ext cx="1761893" cy="501805"/>
             </a:xfrm>
             <a:prstGeom prst="roundRect">
@@ -4188,7 +4190,7 @@
                     <a:schemeClr val="accent2"/>
                   </a:solidFill>
                 </a:rPr>
-                <a:t>thermal analysis (particle receiver)</a:t>
+                <a:t>pv simulation</a:t>
               </a:r>
             </a:p>
           </p:txBody>
@@ -4207,7 +4209,7 @@
           </p:nvSpPr>
           <p:spPr>
             <a:xfrm>
-              <a:off x="950949" y="4618257"/>
+              <a:off x="950948" y="4561581"/>
               <a:ext cx="1761894" cy="501805"/>
             </a:xfrm>
             <a:prstGeom prst="roundRect">
@@ -4239,7 +4241,7 @@
                     <a:schemeClr val="accent2"/>
                   </a:solidFill>
                 </a:rPr>
-                <a:t>power generation (dispatch)</a:t>
+                <a:t>financial calculations</a:t>
               </a:r>
             </a:p>
           </p:txBody>
@@ -4258,7 +4260,7 @@
           </p:nvSpPr>
           <p:spPr>
             <a:xfrm>
-              <a:off x="950949" y="3480344"/>
+              <a:off x="950949" y="3358531"/>
               <a:ext cx="1761893" cy="501805"/>
             </a:xfrm>
             <a:prstGeom prst="roundRect">
@@ -4290,7 +4292,7 @@
                     <a:schemeClr val="accent2"/>
                   </a:solidFill>
                 </a:rPr>
-                <a:t>optical analysis (beam down)</a:t>
+                <a:t>dewh simulation</a:t>
               </a:r>
             </a:p>
           </p:txBody>
@@ -4309,8 +4311,8 @@
           </p:nvSpPr>
           <p:spPr>
             <a:xfrm>
-              <a:off x="950950" y="6094183"/>
-              <a:ext cx="1761894" cy="501805"/>
+              <a:off x="950947" y="5757594"/>
+              <a:ext cx="1761894" cy="295824"/>
             </a:xfrm>
             <a:prstGeom prst="roundRect">
               <a:avLst/>
@@ -4449,6 +4451,436 @@
           </p:txBody>
         </p:sp>
       </p:grpSp>
+      <p:sp>
+        <p:nvSpPr>
+          <p:cNvPr id="4" name="Rectangle: Rounded Corners 3">
+            <a:extLst>
+              <a:ext uri="{FF2B5EF4-FFF2-40B4-BE49-F238E27FC236}">
+                <a16:creationId xmlns:a16="http://schemas.microsoft.com/office/drawing/2014/main" id="{44A87002-F9E8-BE4D-F44A-BD59132DBA16}"/>
+              </a:ext>
+            </a:extLst>
+          </p:cNvPr>
+          <p:cNvSpPr/>
+          <p:nvPr/>
+        </p:nvSpPr>
+        <p:spPr>
+          <a:xfrm>
+            <a:off x="3353875" y="6043647"/>
+            <a:ext cx="2677695" cy="322419"/>
+          </a:xfrm>
+          <a:prstGeom prst="roundRect">
+            <a:avLst/>
+          </a:prstGeom>
+        </p:spPr>
+        <p:style>
+          <a:lnRef idx="2">
+            <a:schemeClr val="accent5"/>
+          </a:lnRef>
+          <a:fillRef idx="1">
+            <a:schemeClr val="lt1"/>
+          </a:fillRef>
+          <a:effectRef idx="0">
+            <a:schemeClr val="accent5"/>
+          </a:effectRef>
+          <a:fontRef idx="minor">
+            <a:schemeClr val="dk1"/>
+          </a:fontRef>
+        </p:style>
+        <p:txBody>
+          <a:bodyPr rtlCol="0" anchor="ctr"/>
+          <a:lstStyle/>
+          <a:p>
+            <a:pPr algn="ctr"/>
+            <a:r>
+              <a:rPr lang="en-IE" noProof="1">
+                <a:solidFill>
+                  <a:schemeClr val="accent5"/>
+                </a:solidFill>
+              </a:rPr>
+              <a:t>hwd data</a:t>
+            </a:r>
+          </a:p>
+        </p:txBody>
+      </p:sp>
+      <p:grpSp>
+        <p:nvGrpSpPr>
+          <p:cNvPr id="5" name="Group 4">
+            <a:extLst>
+              <a:ext uri="{FF2B5EF4-FFF2-40B4-BE49-F238E27FC236}">
+                <a16:creationId xmlns:a16="http://schemas.microsoft.com/office/drawing/2014/main" id="{B1385FB5-7E21-FA4D-60FE-E23EB44D28D5}"/>
+              </a:ext>
+            </a:extLst>
+          </p:cNvPr>
+          <p:cNvGrpSpPr/>
+          <p:nvPr/>
+        </p:nvGrpSpPr>
+        <p:grpSpPr>
+          <a:xfrm>
+            <a:off x="6407233" y="1563449"/>
+            <a:ext cx="2416727" cy="4202035"/>
+            <a:chOff x="6301662" y="1576465"/>
+            <a:chExt cx="2416727" cy="4202035"/>
+          </a:xfrm>
+        </p:grpSpPr>
+        <p:sp>
+          <p:nvSpPr>
+            <p:cNvPr id="6" name="Rectangle: Rounded Corners 5">
+              <a:extLst>
+                <a:ext uri="{FF2B5EF4-FFF2-40B4-BE49-F238E27FC236}">
+                  <a16:creationId xmlns:a16="http://schemas.microsoft.com/office/drawing/2014/main" id="{3B8C9ACB-DBFF-DFCE-7D98-ECC148DC4474}"/>
+                </a:ext>
+              </a:extLst>
+            </p:cNvPr>
+            <p:cNvSpPr/>
+            <p:nvPr/>
+          </p:nvSpPr>
+          <p:spPr>
+            <a:xfrm>
+              <a:off x="6301662" y="1576465"/>
+              <a:ext cx="2416727" cy="4202035"/>
+            </a:xfrm>
+            <a:prstGeom prst="roundRect">
+              <a:avLst>
+                <a:gd name="adj" fmla="val 9304"/>
+              </a:avLst>
+            </a:prstGeom>
+          </p:spPr>
+          <p:style>
+            <a:lnRef idx="2">
+              <a:schemeClr val="accent1"/>
+            </a:lnRef>
+            <a:fillRef idx="1">
+              <a:schemeClr val="lt1"/>
+            </a:fillRef>
+            <a:effectRef idx="0">
+              <a:schemeClr val="accent1"/>
+            </a:effectRef>
+            <a:fontRef idx="minor">
+              <a:schemeClr val="dk1"/>
+            </a:fontRef>
+          </p:style>
+          <p:txBody>
+            <a:bodyPr rtlCol="0" anchor="t"/>
+            <a:lstStyle/>
+            <a:p>
+              <a:pPr algn="ctr"/>
+              <a:r>
+                <a:rPr lang="en-IE" noProof="1"/>
+                <a:t>MED-Solar</a:t>
+              </a:r>
+            </a:p>
+          </p:txBody>
+        </p:sp>
+        <p:sp>
+          <p:nvSpPr>
+            <p:cNvPr id="7" name="Rectangle: Rounded Corners 6">
+              <a:extLst>
+                <a:ext uri="{FF2B5EF4-FFF2-40B4-BE49-F238E27FC236}">
+                  <a16:creationId xmlns:a16="http://schemas.microsoft.com/office/drawing/2014/main" id="{B21C0B24-4EE3-9A40-6B9F-7FE1316681BA}"/>
+                </a:ext>
+              </a:extLst>
+            </p:cNvPr>
+            <p:cNvSpPr/>
+            <p:nvPr/>
+          </p:nvSpPr>
+          <p:spPr>
+            <a:xfrm>
+              <a:off x="6634401" y="2126670"/>
+              <a:ext cx="1761893" cy="501805"/>
+            </a:xfrm>
+            <a:prstGeom prst="roundRect">
+              <a:avLst/>
+            </a:prstGeom>
+          </p:spPr>
+          <p:style>
+            <a:lnRef idx="2">
+              <a:schemeClr val="accent1"/>
+            </a:lnRef>
+            <a:fillRef idx="1">
+              <a:schemeClr val="lt1"/>
+            </a:fillRef>
+            <a:effectRef idx="0">
+              <a:schemeClr val="accent1"/>
+            </a:effectRef>
+            <a:fontRef idx="minor">
+              <a:schemeClr val="dk1"/>
+            </a:fontRef>
+          </p:style>
+          <p:txBody>
+            <a:bodyPr rtlCol="0" anchor="ctr"/>
+            <a:lstStyle/>
+            <a:p>
+              <a:pPr algn="ctr"/>
+              <a:r>
+                <a:rPr lang="en-IE" noProof="1">
+                  <a:solidFill>
+                    <a:schemeClr val="accent1"/>
+                  </a:solidFill>
+                </a:rPr>
+                <a:t>settings</a:t>
+              </a:r>
+            </a:p>
+          </p:txBody>
+        </p:sp>
+        <p:sp>
+          <p:nvSpPr>
+            <p:cNvPr id="9" name="Rectangle: Rounded Corners 8">
+              <a:extLst>
+                <a:ext uri="{FF2B5EF4-FFF2-40B4-BE49-F238E27FC236}">
+                  <a16:creationId xmlns:a16="http://schemas.microsoft.com/office/drawing/2014/main" id="{F0271F9D-6116-C87D-C5A0-BD4DBCF4EEA5}"/>
+                </a:ext>
+              </a:extLst>
+            </p:cNvPr>
+            <p:cNvSpPr/>
+            <p:nvPr/>
+          </p:nvSpPr>
+          <p:spPr>
+            <a:xfrm>
+              <a:off x="6634396" y="2714909"/>
+              <a:ext cx="1761893" cy="501805"/>
+            </a:xfrm>
+            <a:prstGeom prst="roundRect">
+              <a:avLst/>
+            </a:prstGeom>
+          </p:spPr>
+          <p:style>
+            <a:lnRef idx="2">
+              <a:schemeClr val="accent1"/>
+            </a:lnRef>
+            <a:fillRef idx="1">
+              <a:schemeClr val="lt1"/>
+            </a:fillRef>
+            <a:effectRef idx="0">
+              <a:schemeClr val="accent1"/>
+            </a:effectRef>
+            <a:fontRef idx="minor">
+              <a:schemeClr val="dk1"/>
+            </a:fontRef>
+          </p:style>
+          <p:txBody>
+            <a:bodyPr rtlCol="0" anchor="ctr"/>
+            <a:lstStyle/>
+            <a:p>
+              <a:pPr algn="ctr"/>
+              <a:r>
+                <a:rPr lang="en-IE" noProof="1">
+                  <a:solidFill>
+                    <a:schemeClr val="accent1"/>
+                  </a:solidFill>
+                </a:rPr>
+                <a:t>location</a:t>
+              </a:r>
+            </a:p>
+          </p:txBody>
+        </p:sp>
+        <p:sp>
+          <p:nvSpPr>
+            <p:cNvPr id="10" name="Rectangle: Rounded Corners 9">
+              <a:extLst>
+                <a:ext uri="{FF2B5EF4-FFF2-40B4-BE49-F238E27FC236}">
+                  <a16:creationId xmlns:a16="http://schemas.microsoft.com/office/drawing/2014/main" id="{2C082905-0EB3-C87A-7185-B0A52D967651}"/>
+                </a:ext>
+              </a:extLst>
+            </p:cNvPr>
+            <p:cNvSpPr/>
+            <p:nvPr/>
+          </p:nvSpPr>
+          <p:spPr>
+            <a:xfrm>
+              <a:off x="6631291" y="3338391"/>
+              <a:ext cx="1761893" cy="501805"/>
+            </a:xfrm>
+            <a:prstGeom prst="roundRect">
+              <a:avLst/>
+            </a:prstGeom>
+          </p:spPr>
+          <p:style>
+            <a:lnRef idx="2">
+              <a:schemeClr val="accent2"/>
+            </a:lnRef>
+            <a:fillRef idx="1">
+              <a:schemeClr val="lt1"/>
+            </a:fillRef>
+            <a:effectRef idx="0">
+              <a:schemeClr val="accent2"/>
+            </a:effectRef>
+            <a:fontRef idx="minor">
+              <a:schemeClr val="dk1"/>
+            </a:fontRef>
+          </p:style>
+          <p:txBody>
+            <a:bodyPr rtlCol="0" anchor="ctr"/>
+            <a:lstStyle/>
+            <a:p>
+              <a:pPr algn="ctr"/>
+              <a:r>
+                <a:rPr lang="en-IE" noProof="1">
+                  <a:solidFill>
+                    <a:schemeClr val="accent2"/>
+                  </a:solidFill>
+                </a:rPr>
+                <a:t>PTC</a:t>
+              </a:r>
+            </a:p>
+          </p:txBody>
+        </p:sp>
+        <p:sp>
+          <p:nvSpPr>
+            <p:cNvPr id="14" name="Rectangle: Rounded Corners 13">
+              <a:extLst>
+                <a:ext uri="{FF2B5EF4-FFF2-40B4-BE49-F238E27FC236}">
+                  <a16:creationId xmlns:a16="http://schemas.microsoft.com/office/drawing/2014/main" id="{5698E974-DE34-6B23-3D12-3D9BFDF5799B}"/>
+                </a:ext>
+              </a:extLst>
+            </p:cNvPr>
+            <p:cNvSpPr/>
+            <p:nvPr/>
+          </p:nvSpPr>
+          <p:spPr>
+            <a:xfrm>
+              <a:off x="6631291" y="3951375"/>
+              <a:ext cx="1761893" cy="501805"/>
+            </a:xfrm>
+            <a:prstGeom prst="roundRect">
+              <a:avLst/>
+            </a:prstGeom>
+          </p:spPr>
+          <p:style>
+            <a:lnRef idx="2">
+              <a:schemeClr val="accent2"/>
+            </a:lnRef>
+            <a:fillRef idx="1">
+              <a:schemeClr val="lt1"/>
+            </a:fillRef>
+            <a:effectRef idx="0">
+              <a:schemeClr val="accent2"/>
+            </a:effectRef>
+            <a:fontRef idx="minor">
+              <a:schemeClr val="dk1"/>
+            </a:fontRef>
+          </p:style>
+          <p:txBody>
+            <a:bodyPr rtlCol="0" anchor="ctr"/>
+            <a:lstStyle/>
+            <a:p>
+              <a:pPr algn="ctr"/>
+              <a:r>
+                <a:rPr lang="en-IE" noProof="1">
+                  <a:solidFill>
+                    <a:schemeClr val="accent2"/>
+                  </a:solidFill>
+                </a:rPr>
+                <a:t>MED</a:t>
+              </a:r>
+            </a:p>
+          </p:txBody>
+        </p:sp>
+        <p:sp>
+          <p:nvSpPr>
+            <p:cNvPr id="28" name="Rectangle: Rounded Corners 27">
+              <a:extLst>
+                <a:ext uri="{FF2B5EF4-FFF2-40B4-BE49-F238E27FC236}">
+                  <a16:creationId xmlns:a16="http://schemas.microsoft.com/office/drawing/2014/main" id="{6D547355-8E2C-D9BF-C1B5-4695D121E427}"/>
+                </a:ext>
+              </a:extLst>
+            </p:cNvPr>
+            <p:cNvSpPr/>
+            <p:nvPr/>
+          </p:nvSpPr>
+          <p:spPr>
+            <a:xfrm>
+              <a:off x="6631291" y="4560652"/>
+              <a:ext cx="1761893" cy="501805"/>
+            </a:xfrm>
+            <a:prstGeom prst="roundRect">
+              <a:avLst/>
+            </a:prstGeom>
+          </p:spPr>
+          <p:style>
+            <a:lnRef idx="2">
+              <a:schemeClr val="accent5"/>
+            </a:lnRef>
+            <a:fillRef idx="1">
+              <a:schemeClr val="lt1"/>
+            </a:fillRef>
+            <a:effectRef idx="0">
+              <a:schemeClr val="accent5"/>
+            </a:effectRef>
+            <a:fontRef idx="minor">
+              <a:schemeClr val="dk1"/>
+            </a:fontRef>
+          </p:style>
+          <p:txBody>
+            <a:bodyPr rtlCol="0" anchor="ctr"/>
+            <a:lstStyle/>
+            <a:p>
+              <a:pPr algn="ctr"/>
+              <a:r>
+                <a:rPr lang="en-IE" noProof="1">
+                  <a:solidFill>
+                    <a:schemeClr val="accent5"/>
+                  </a:solidFill>
+                </a:rPr>
+                <a:t>weather</a:t>
+              </a:r>
+            </a:p>
+          </p:txBody>
+        </p:sp>
+      </p:grpSp>
+      <p:sp>
+        <p:nvSpPr>
+          <p:cNvPr id="30" name="Title 1">
+            <a:extLst>
+              <a:ext uri="{FF2B5EF4-FFF2-40B4-BE49-F238E27FC236}">
+                <a16:creationId xmlns:a16="http://schemas.microsoft.com/office/drawing/2014/main" id="{D5A7CEB4-D68B-3150-9664-1D2F7C2D4144}"/>
+              </a:ext>
+            </a:extLst>
+          </p:cNvPr>
+          <p:cNvSpPr txBox="1">
+            <a:spLocks/>
+          </p:cNvSpPr>
+          <p:nvPr/>
+        </p:nvSpPr>
+        <p:spPr>
+          <a:xfrm>
+            <a:off x="6926131" y="604857"/>
+            <a:ext cx="4457700" cy="1325563"/>
+          </a:xfrm>
+          <a:prstGeom prst="rect">
+            <a:avLst/>
+          </a:prstGeom>
+        </p:spPr>
+        <p:txBody>
+          <a:bodyPr vert="horz" lIns="91440" tIns="45720" rIns="91440" bIns="45720" rtlCol="0" anchor="ctr">
+            <a:normAutofit/>
+          </a:bodyPr>
+          <a:lstStyle>
+            <a:lvl1pPr algn="l" defTabSz="914400" rtl="0" eaLnBrk="1" latinLnBrk="0" hangingPunct="1">
+              <a:lnSpc>
+                <a:spcPct val="90000"/>
+              </a:lnSpc>
+              <a:spcBef>
+                <a:spcPct val="0"/>
+              </a:spcBef>
+              <a:buNone/>
+              <a:defRPr sz="4400" kern="1200">
+                <a:solidFill>
+                  <a:schemeClr val="tx1"/>
+                </a:solidFill>
+                <a:latin typeface="+mj-lt"/>
+                <a:ea typeface="+mj-ea"/>
+                <a:cs typeface="+mj-cs"/>
+              </a:defRPr>
+            </a:lvl1pPr>
+          </a:lstStyle>
+          <a:p>
+            <a:r>
+              <a:rPr lang="en-IE" sz="3200" noProof="1"/>
+              <a:t>master</a:t>
+            </a:r>
+          </a:p>
+        </p:txBody>
+      </p:sp>
     </p:spTree>
     <p:extLst>
       <p:ext uri="{BB962C8B-B14F-4D97-AF65-F5344CB8AC3E}">
